--- a/ppt/boxing_coach.pptx
+++ b/ppt/boxing_coach.pptx
@@ -5,21 +5,23 @@
     <p:sldMasterId id="2147483648" r:id="rId1"/>
   </p:sldMasterIdLst>
   <p:notesMasterIdLst>
-    <p:notesMasterId r:id="rId14"/>
+    <p:notesMasterId r:id="rId16"/>
   </p:notesMasterIdLst>
   <p:sldIdLst>
     <p:sldId id="256" r:id="rId2"/>
     <p:sldId id="257" r:id="rId3"/>
-    <p:sldId id="258" r:id="rId4"/>
-    <p:sldId id="259" r:id="rId5"/>
-    <p:sldId id="260" r:id="rId6"/>
-    <p:sldId id="261" r:id="rId7"/>
-    <p:sldId id="262" r:id="rId8"/>
-    <p:sldId id="263" r:id="rId9"/>
-    <p:sldId id="264" r:id="rId10"/>
-    <p:sldId id="265" r:id="rId11"/>
-    <p:sldId id="266" r:id="rId12"/>
-    <p:sldId id="267" r:id="rId13"/>
+    <p:sldId id="259" r:id="rId4"/>
+    <p:sldId id="260" r:id="rId5"/>
+    <p:sldId id="261" r:id="rId6"/>
+    <p:sldId id="262" r:id="rId7"/>
+    <p:sldId id="268" r:id="rId8"/>
+    <p:sldId id="269" r:id="rId9"/>
+    <p:sldId id="263" r:id="rId10"/>
+    <p:sldId id="264" r:id="rId11"/>
+    <p:sldId id="270" r:id="rId12"/>
+    <p:sldId id="266" r:id="rId13"/>
+    <p:sldId id="271" r:id="rId14"/>
+    <p:sldId id="272" r:id="rId15"/>
   </p:sldIdLst>
   <p:sldSz cx="9144000" cy="5143500" type="screen16x9"/>
   <p:notesSz cx="5143500" cy="9144000"/>
@@ -421,7 +423,13 @@
   <p:cSld>
     <p:spTree>
       <p:nvGrpSpPr>
-        <p:cNvPr id="1" name=""/>
+        <p:cNvPr id="1" name="">
+          <a:extLst>
+            <a:ext uri="{FF2B5EF4-FFF2-40B4-BE49-F238E27FC236}">
+              <a16:creationId xmlns:a16="http://schemas.microsoft.com/office/drawing/2014/main" id="{1D0ACEF0-015A-0BBF-39A1-A10166F0676B}"/>
+            </a:ext>
+          </a:extLst>
+        </p:cNvPr>
         <p:cNvGrpSpPr/>
         <p:nvPr/>
       </p:nvGrpSpPr>
@@ -435,7 +443,13 @@
       </p:grpSpPr>
       <p:sp>
         <p:nvSpPr>
-          <p:cNvPr id="2" name="Slide Image Placeholder 1"/>
+          <p:cNvPr id="2" name="Slide Image Placeholder 1">
+            <a:extLst>
+              <a:ext uri="{FF2B5EF4-FFF2-40B4-BE49-F238E27FC236}">
+                <a16:creationId xmlns:a16="http://schemas.microsoft.com/office/drawing/2014/main" id="{5610C712-227C-A059-196E-123C5DE349EB}"/>
+              </a:ext>
+            </a:extLst>
+          </p:cNvPr>
           <p:cNvSpPr>
             <a:spLocks noGrp="1" noRot="1" noChangeAspect="1"/>
           </p:cNvSpPr>
@@ -447,7 +461,13 @@
       </p:sp>
       <p:sp>
         <p:nvSpPr>
-          <p:cNvPr id="3" name="Notes Placeholder 2"/>
+          <p:cNvPr id="3" name="Notes Placeholder 2">
+            <a:extLst>
+              <a:ext uri="{FF2B5EF4-FFF2-40B4-BE49-F238E27FC236}">
+                <a16:creationId xmlns:a16="http://schemas.microsoft.com/office/drawing/2014/main" id="{3E240935-B4D4-9DF3-FFFA-430F80C07A02}"/>
+              </a:ext>
+            </a:extLst>
+          </p:cNvPr>
           <p:cNvSpPr>
             <a:spLocks noGrp="1"/>
           </p:cNvSpPr>
@@ -466,7 +486,13 @@
       </p:sp>
       <p:sp>
         <p:nvSpPr>
-          <p:cNvPr id="4" name="Slide Number Placeholder 3"/>
+          <p:cNvPr id="4" name="Slide Number Placeholder 3">
+            <a:extLst>
+              <a:ext uri="{FF2B5EF4-FFF2-40B4-BE49-F238E27FC236}">
+                <a16:creationId xmlns:a16="http://schemas.microsoft.com/office/drawing/2014/main" id="{8E6404F1-B818-2042-37CE-69AE255ED2B9}"/>
+              </a:ext>
+            </a:extLst>
+          </p:cNvPr>
           <p:cNvSpPr>
             <a:spLocks noGrp="1"/>
           </p:cNvSpPr>
@@ -490,7 +516,7 @@
     </p:spTree>
     <p:extLst>
       <p:ext uri="{BB962C8B-B14F-4D97-AF65-F5344CB8AC3E}">
-        <p14:creationId xmlns:p14="http://schemas.microsoft.com/office/powerpoint/2010/main" val="1024086991"/>
+        <p14:creationId xmlns:p14="http://schemas.microsoft.com/office/powerpoint/2010/main" val="3835895967"/>
       </p:ext>
     </p:extLst>
   </p:cSld>
@@ -575,6 +601,222 @@
     <p:extLst>
       <p:ext uri="{BB962C8B-B14F-4D97-AF65-F5344CB8AC3E}">
         <p14:creationId xmlns:p14="http://schemas.microsoft.com/office/powerpoint/2010/main" val="1024086991"/>
+      </p:ext>
+    </p:extLst>
+  </p:cSld>
+  <p:clrMapOvr>
+    <a:masterClrMapping/>
+  </p:clrMapOvr>
+</p:notes>
+</file>
+
+<file path=ppt/notesSlides/notesSlide13.xml><?xml version="1.0" encoding="utf-8"?>
+<p:notes xmlns:a="http://schemas.openxmlformats.org/drawingml/2006/main" xmlns:r="http://schemas.openxmlformats.org/officeDocument/2006/relationships" xmlns:p="http://schemas.openxmlformats.org/presentationml/2006/main">
+  <p:cSld>
+    <p:spTree>
+      <p:nvGrpSpPr>
+        <p:cNvPr id="1" name="">
+          <a:extLst>
+            <a:ext uri="{FF2B5EF4-FFF2-40B4-BE49-F238E27FC236}">
+              <a16:creationId xmlns:a16="http://schemas.microsoft.com/office/drawing/2014/main" id="{DFD41E5E-A070-8B76-60FD-1BED35B012CA}"/>
+            </a:ext>
+          </a:extLst>
+        </p:cNvPr>
+        <p:cNvGrpSpPr/>
+        <p:nvPr/>
+      </p:nvGrpSpPr>
+      <p:grpSpPr>
+        <a:xfrm>
+          <a:off x="0" y="0"/>
+          <a:ext cx="0" cy="0"/>
+          <a:chOff x="0" y="0"/>
+          <a:chExt cx="0" cy="0"/>
+        </a:xfrm>
+      </p:grpSpPr>
+      <p:sp>
+        <p:nvSpPr>
+          <p:cNvPr id="2" name="Slide Image Placeholder 1">
+            <a:extLst>
+              <a:ext uri="{FF2B5EF4-FFF2-40B4-BE49-F238E27FC236}">
+                <a16:creationId xmlns:a16="http://schemas.microsoft.com/office/drawing/2014/main" id="{7FCE9159-3B57-EB05-01DC-57459D64EBCC}"/>
+              </a:ext>
+            </a:extLst>
+          </p:cNvPr>
+          <p:cNvSpPr>
+            <a:spLocks noGrp="1" noRot="1" noChangeAspect="1"/>
+          </p:cNvSpPr>
+          <p:nvPr>
+            <p:ph type="sldImg"/>
+          </p:nvPr>
+        </p:nvSpPr>
+        <p:spPr/>
+      </p:sp>
+      <p:sp>
+        <p:nvSpPr>
+          <p:cNvPr id="3" name="Notes Placeholder 2">
+            <a:extLst>
+              <a:ext uri="{FF2B5EF4-FFF2-40B4-BE49-F238E27FC236}">
+                <a16:creationId xmlns:a16="http://schemas.microsoft.com/office/drawing/2014/main" id="{E25AEBFA-4288-9039-632E-AED491AF73EC}"/>
+              </a:ext>
+            </a:extLst>
+          </p:cNvPr>
+          <p:cNvSpPr>
+            <a:spLocks noGrp="1"/>
+          </p:cNvSpPr>
+          <p:nvPr>
+            <p:ph type="body" idx="1"/>
+          </p:nvPr>
+        </p:nvSpPr>
+        <p:spPr/>
+        <p:txBody>
+          <a:bodyPr/>
+          <a:lstStyle/>
+          <a:p>
+            <a:endParaRPr lang="en-US" dirty="0"/>
+          </a:p>
+        </p:txBody>
+      </p:sp>
+      <p:sp>
+        <p:nvSpPr>
+          <p:cNvPr id="4" name="Slide Number Placeholder 3">
+            <a:extLst>
+              <a:ext uri="{FF2B5EF4-FFF2-40B4-BE49-F238E27FC236}">
+                <a16:creationId xmlns:a16="http://schemas.microsoft.com/office/drawing/2014/main" id="{1FBEA14C-6B0E-B859-F49F-83F36CFE954E}"/>
+              </a:ext>
+            </a:extLst>
+          </p:cNvPr>
+          <p:cNvSpPr>
+            <a:spLocks noGrp="1"/>
+          </p:cNvSpPr>
+          <p:nvPr>
+            <p:ph type="sldNum" sz="quarter" idx="10"/>
+          </p:nvPr>
+        </p:nvSpPr>
+        <p:spPr/>
+        <p:txBody>
+          <a:bodyPr/>
+          <a:lstStyle/>
+          <a:p>
+            <a:fld id="{F7021451-1387-4CA6-816F-3879F97B5CBC}" type="slidenum">
+              <a:rPr lang="en-US"/>
+              <a:t>13</a:t>
+            </a:fld>
+            <a:endParaRPr lang="en-US"/>
+          </a:p>
+        </p:txBody>
+      </p:sp>
+    </p:spTree>
+    <p:extLst>
+      <p:ext uri="{BB962C8B-B14F-4D97-AF65-F5344CB8AC3E}">
+        <p14:creationId xmlns:p14="http://schemas.microsoft.com/office/powerpoint/2010/main" val="1961705286"/>
+      </p:ext>
+    </p:extLst>
+  </p:cSld>
+  <p:clrMapOvr>
+    <a:masterClrMapping/>
+  </p:clrMapOvr>
+</p:notes>
+</file>
+
+<file path=ppt/notesSlides/notesSlide14.xml><?xml version="1.0" encoding="utf-8"?>
+<p:notes xmlns:a="http://schemas.openxmlformats.org/drawingml/2006/main" xmlns:r="http://schemas.openxmlformats.org/officeDocument/2006/relationships" xmlns:p="http://schemas.openxmlformats.org/presentationml/2006/main">
+  <p:cSld>
+    <p:spTree>
+      <p:nvGrpSpPr>
+        <p:cNvPr id="1" name="">
+          <a:extLst>
+            <a:ext uri="{FF2B5EF4-FFF2-40B4-BE49-F238E27FC236}">
+              <a16:creationId xmlns:a16="http://schemas.microsoft.com/office/drawing/2014/main" id="{83868094-DB3C-759E-5AE1-D376782FAAFF}"/>
+            </a:ext>
+          </a:extLst>
+        </p:cNvPr>
+        <p:cNvGrpSpPr/>
+        <p:nvPr/>
+      </p:nvGrpSpPr>
+      <p:grpSpPr>
+        <a:xfrm>
+          <a:off x="0" y="0"/>
+          <a:ext cx="0" cy="0"/>
+          <a:chOff x="0" y="0"/>
+          <a:chExt cx="0" cy="0"/>
+        </a:xfrm>
+      </p:grpSpPr>
+      <p:sp>
+        <p:nvSpPr>
+          <p:cNvPr id="2" name="Slide Image Placeholder 1">
+            <a:extLst>
+              <a:ext uri="{FF2B5EF4-FFF2-40B4-BE49-F238E27FC236}">
+                <a16:creationId xmlns:a16="http://schemas.microsoft.com/office/drawing/2014/main" id="{FCF6F0FF-ED6A-ED48-7FBA-891AE701EDE9}"/>
+              </a:ext>
+            </a:extLst>
+          </p:cNvPr>
+          <p:cNvSpPr>
+            <a:spLocks noGrp="1" noRot="1" noChangeAspect="1"/>
+          </p:cNvSpPr>
+          <p:nvPr>
+            <p:ph type="sldImg"/>
+          </p:nvPr>
+        </p:nvSpPr>
+        <p:spPr/>
+      </p:sp>
+      <p:sp>
+        <p:nvSpPr>
+          <p:cNvPr id="3" name="Notes Placeholder 2">
+            <a:extLst>
+              <a:ext uri="{FF2B5EF4-FFF2-40B4-BE49-F238E27FC236}">
+                <a16:creationId xmlns:a16="http://schemas.microsoft.com/office/drawing/2014/main" id="{BC8CBCF4-A69D-ACAC-9A29-909900B14CAD}"/>
+              </a:ext>
+            </a:extLst>
+          </p:cNvPr>
+          <p:cNvSpPr>
+            <a:spLocks noGrp="1"/>
+          </p:cNvSpPr>
+          <p:nvPr>
+            <p:ph type="body" idx="1"/>
+          </p:nvPr>
+        </p:nvSpPr>
+        <p:spPr/>
+        <p:txBody>
+          <a:bodyPr/>
+          <a:lstStyle/>
+          <a:p>
+            <a:endParaRPr lang="en-US" dirty="0"/>
+          </a:p>
+        </p:txBody>
+      </p:sp>
+      <p:sp>
+        <p:nvSpPr>
+          <p:cNvPr id="4" name="Slide Number Placeholder 3">
+            <a:extLst>
+              <a:ext uri="{FF2B5EF4-FFF2-40B4-BE49-F238E27FC236}">
+                <a16:creationId xmlns:a16="http://schemas.microsoft.com/office/drawing/2014/main" id="{727732D2-7A83-0C54-55EC-C32A9D49000A}"/>
+              </a:ext>
+            </a:extLst>
+          </p:cNvPr>
+          <p:cNvSpPr>
+            <a:spLocks noGrp="1"/>
+          </p:cNvSpPr>
+          <p:nvPr>
+            <p:ph type="sldNum" sz="quarter" idx="10"/>
+          </p:nvPr>
+        </p:nvSpPr>
+        <p:spPr/>
+        <p:txBody>
+          <a:bodyPr/>
+          <a:lstStyle/>
+          <a:p>
+            <a:fld id="{F7021451-1387-4CA6-816F-3879F97B5CBC}" type="slidenum">
+              <a:rPr lang="en-US"/>
+              <a:t>14</a:t>
+            </a:fld>
+            <a:endParaRPr lang="en-US"/>
+          </a:p>
+        </p:txBody>
+      </p:sp>
+    </p:spTree>
+    <p:extLst>
+      <p:ext uri="{BB962C8B-B14F-4D97-AF65-F5344CB8AC3E}">
+        <p14:creationId xmlns:p14="http://schemas.microsoft.com/office/powerpoint/2010/main" val="2650023052"/>
       </p:ext>
     </p:extLst>
   </p:cSld>
@@ -1722,52 +1964,13 @@
       </p:sp>
       <p:sp>
         <p:nvSpPr>
-          <p:cNvPr id="5" name="Text 3"/>
-          <p:cNvSpPr/>
-          <p:nvPr/>
-        </p:nvSpPr>
-        <p:spPr>
-          <a:xfrm>
-            <a:off x="457200" y="3108960"/>
-            <a:ext cx="7315200" cy="365760"/>
-          </a:xfrm>
-          <a:prstGeom prst="rect">
-            <a:avLst/>
-          </a:prstGeom>
-          <a:noFill/>
-          <a:ln/>
-        </p:spPr>
-        <p:txBody>
-          <a:bodyPr wrap="square" lIns="0" tIns="0" rIns="0" bIns="0" rtlCol="0" anchor="ctr"/>
-          <a:lstStyle/>
-          <a:p>
-            <a:pPr marL="0" indent="0" algn="l">
-              <a:buNone/>
-            </a:pPr>
-            <a:r>
-              <a:rPr lang="en-US" sz="1800" dirty="0">
-                <a:solidFill>
-                  <a:srgbClr val="8892A4"/>
-                </a:solidFill>
-                <a:latin typeface="Calibri" pitchFamily="34" charset="0"/>
-                <a:ea typeface="Calibri" pitchFamily="34" charset="-122"/>
-                <a:cs typeface="Calibri" pitchFamily="34" charset="-120"/>
-              </a:rPr>
-              <a:t>Using On-Device Deep Learning + LLM Analysis</a:t>
-            </a:r>
-            <a:endParaRPr lang="en-US" sz="1800" dirty="0"/>
-          </a:p>
-        </p:txBody>
-      </p:sp>
-      <p:sp>
-        <p:nvSpPr>
           <p:cNvPr id="6" name="Shape 4"/>
           <p:cNvSpPr/>
           <p:nvPr/>
         </p:nvSpPr>
         <p:spPr>
           <a:xfrm>
-            <a:off x="457200" y="3566160"/>
+            <a:off x="457200" y="3368732"/>
             <a:ext cx="3657600" cy="0"/>
           </a:xfrm>
           <a:prstGeom prst="line">
@@ -1797,7 +2000,7 @@
         </p:nvSpPr>
         <p:spPr>
           <a:xfrm>
-            <a:off x="457200" y="3703320"/>
+            <a:off x="457200" y="3497580"/>
             <a:ext cx="7315200" cy="640080"/>
           </a:xfrm>
           <a:prstGeom prst="rect">
@@ -1855,7 +2058,7 @@
 
 <file path=ppt/slides/slide10.xml><?xml version="1.0" encoding="utf-8"?>
 <p:sld xmlns:a="http://schemas.openxmlformats.org/drawingml/2006/main" xmlns:r="http://schemas.openxmlformats.org/officeDocument/2006/relationships" xmlns:p="http://schemas.openxmlformats.org/presentationml/2006/main">
-  <p:cSld name="Slide 10">
+  <p:cSld name="Slide 9">
     <p:bg>
       <p:bgPr>
         <a:solidFill>
@@ -1911,7 +2114,7 @@
                 <a:ea typeface="Trebuchet MS" pitchFamily="34" charset="-122"/>
                 <a:cs typeface="Trebuchet MS" pitchFamily="34" charset="-120"/>
               </a:rPr>
-              <a:t>Model Optimization: MoveNet Quantization</a:t>
+              <a:t>Android Application</a:t>
             </a:r>
             <a:endParaRPr lang="en-US" sz="2800" dirty="0"/>
           </a:p>
@@ -1951,53 +2154,14 @@
       </p:sp>
       <p:sp>
         <p:nvSpPr>
-          <p:cNvPr id="4" name="Text 2"/>
-          <p:cNvSpPr/>
-          <p:nvPr/>
-        </p:nvSpPr>
-        <p:spPr>
-          <a:xfrm>
-            <a:off x="365760" y="1005840"/>
-            <a:ext cx="8412480" cy="320040"/>
-          </a:xfrm>
-          <a:prstGeom prst="rect">
-            <a:avLst/>
-          </a:prstGeom>
-          <a:noFill/>
-          <a:ln/>
-        </p:spPr>
-        <p:txBody>
-          <a:bodyPr wrap="square" lIns="0" tIns="0" rIns="0" bIns="0" rtlCol="0" anchor="ctr"/>
-          <a:lstStyle/>
-          <a:p>
-            <a:pPr marL="0" indent="0">
-              <a:buNone/>
-            </a:pPr>
-            <a:r>
-              <a:rPr lang="en-US" sz="1600" b="1" dirty="0">
-                <a:solidFill>
-                  <a:srgbClr val="FFFFFF"/>
-                </a:solidFill>
-                <a:latin typeface="Trebuchet MS" pitchFamily="34" charset="0"/>
-                <a:ea typeface="Trebuchet MS" pitchFamily="34" charset="-122"/>
-                <a:cs typeface="Trebuchet MS" pitchFamily="34" charset="-120"/>
-              </a:rPr>
-              <a:t>MoveNet Lightning — TFLite INT8 Deployment</a:t>
-            </a:r>
-            <a:endParaRPr lang="en-US" sz="1600" dirty="0"/>
-          </a:p>
-        </p:txBody>
-      </p:sp>
-      <p:sp>
-        <p:nvSpPr>
-          <p:cNvPr id="5" name="Shape 3"/>
-          <p:cNvSpPr/>
-          <p:nvPr/>
-        </p:nvSpPr>
-        <p:spPr>
-          <a:xfrm>
-            <a:off x="365760" y="1463040"/>
-            <a:ext cx="1920240" cy="914400"/>
+          <p:cNvPr id="4" name="Shape 2"/>
+          <p:cNvSpPr/>
+          <p:nvPr/>
+        </p:nvSpPr>
+        <p:spPr>
+          <a:xfrm>
+            <a:off x="365760" y="1051560"/>
+            <a:ext cx="3931920" cy="3749040"/>
           </a:xfrm>
           <a:prstGeom prst="rect">
             <a:avLst/>
@@ -2029,92 +2193,183 @@
       </p:sp>
       <p:sp>
         <p:nvSpPr>
+          <p:cNvPr id="5" name="Text 3"/>
+          <p:cNvSpPr/>
+          <p:nvPr/>
+        </p:nvSpPr>
+        <p:spPr>
+          <a:xfrm>
+            <a:off x="502920" y="1143000"/>
+            <a:ext cx="3657600" cy="228600"/>
+          </a:xfrm>
+          <a:prstGeom prst="rect">
+            <a:avLst/>
+          </a:prstGeom>
+          <a:noFill/>
+          <a:ln/>
+        </p:spPr>
+        <p:txBody>
+          <a:bodyPr wrap="square" lIns="0" tIns="0" rIns="0" bIns="0" rtlCol="0" anchor="ctr"/>
+          <a:lstStyle/>
+          <a:p>
+            <a:pPr marL="0" indent="0" algn="l">
+              <a:buNone/>
+            </a:pPr>
+            <a:r>
+              <a:rPr lang="en-US" sz="900" b="1" kern="0" spc="300" dirty="0">
+                <a:solidFill>
+                  <a:srgbClr val="1565C0"/>
+                </a:solidFill>
+                <a:latin typeface="Calibri" pitchFamily="34" charset="0"/>
+                <a:ea typeface="Calibri" pitchFamily="34" charset="-122"/>
+                <a:cs typeface="Calibri" pitchFamily="34" charset="-120"/>
+              </a:rPr>
+              <a:t>MAIN SESSION SCREEN</a:t>
+            </a:r>
+            <a:endParaRPr lang="en-US" sz="900" dirty="0"/>
+          </a:p>
+        </p:txBody>
+      </p:sp>
+      <p:sp>
+        <p:nvSpPr>
           <p:cNvPr id="6" name="Text 4"/>
           <p:cNvSpPr/>
           <p:nvPr/>
         </p:nvSpPr>
         <p:spPr>
           <a:xfrm>
-            <a:off x="365760" y="1508760"/>
-            <a:ext cx="1920240" cy="548640"/>
-          </a:xfrm>
-          <a:prstGeom prst="rect">
-            <a:avLst/>
-          </a:prstGeom>
-          <a:noFill/>
-          <a:ln/>
-        </p:spPr>
-        <p:txBody>
-          <a:bodyPr wrap="square" lIns="0" tIns="0" rIns="0" bIns="0" rtlCol="0" anchor="ctr"/>
-          <a:lstStyle/>
-          <a:p>
-            <a:pPr marL="0" indent="0" algn="ctr">
-              <a:buNone/>
-            </a:pPr>
-            <a:r>
-              <a:rPr lang="en-US" sz="3800" b="1" dirty="0">
-                <a:solidFill>
-                  <a:srgbClr val="00ACC1"/>
-                </a:solidFill>
-                <a:latin typeface="Trebuchet MS" pitchFamily="34" charset="0"/>
-                <a:ea typeface="Trebuchet MS" pitchFamily="34" charset="-122"/>
-                <a:cs typeface="Trebuchet MS" pitchFamily="34" charset="-120"/>
-              </a:rPr>
-              <a:t>192px</a:t>
-            </a:r>
-            <a:endParaRPr lang="en-US" sz="3800" dirty="0"/>
-          </a:p>
-        </p:txBody>
-      </p:sp>
-      <p:sp>
-        <p:nvSpPr>
-          <p:cNvPr id="7" name="Text 5"/>
-          <p:cNvSpPr/>
-          <p:nvPr/>
-        </p:nvSpPr>
-        <p:spPr>
-          <a:xfrm>
-            <a:off x="365760" y="2057400"/>
-            <a:ext cx="1920240" cy="274320"/>
-          </a:xfrm>
-          <a:prstGeom prst="rect">
-            <a:avLst/>
-          </a:prstGeom>
-          <a:noFill/>
-          <a:ln/>
-        </p:spPr>
-        <p:txBody>
-          <a:bodyPr wrap="square" lIns="0" tIns="0" rIns="0" bIns="0" rtlCol="0" anchor="ctr"/>
-          <a:lstStyle/>
-          <a:p>
-            <a:pPr marL="0" indent="0" algn="ctr">
-              <a:buNone/>
-            </a:pPr>
-            <a:r>
-              <a:rPr lang="en-US" sz="1100" dirty="0">
-                <a:solidFill>
-                  <a:srgbClr val="8892A4"/>
-                </a:solidFill>
-                <a:latin typeface="Calibri" pitchFamily="34" charset="0"/>
-                <a:ea typeface="Calibri" pitchFamily="34" charset="-122"/>
-                <a:cs typeface="Calibri" pitchFamily="34" charset="-120"/>
-              </a:rPr>
-              <a:t>Input Resolution</a:t>
-            </a:r>
-            <a:endParaRPr lang="en-US" sz="1100" dirty="0"/>
-          </a:p>
-        </p:txBody>
-      </p:sp>
-      <p:sp>
-        <p:nvSpPr>
-          <p:cNvPr id="8" name="Shape 6"/>
-          <p:cNvSpPr/>
-          <p:nvPr/>
-        </p:nvSpPr>
-        <p:spPr>
-          <a:xfrm>
-            <a:off x="2468880" y="1463040"/>
-            <a:ext cx="1920240" cy="914400"/>
+            <a:off x="502920" y="1371600"/>
+            <a:ext cx="3566160" cy="3200400"/>
+          </a:xfrm>
+          <a:prstGeom prst="rect">
+            <a:avLst/>
+          </a:prstGeom>
+          <a:noFill/>
+          <a:ln/>
+        </p:spPr>
+        <p:txBody>
+          <a:bodyPr wrap="square" rtlCol="0" anchor="ctr"/>
+          <a:lstStyle/>
+          <a:p>
+            <a:pPr marL="342900" indent="-342900">
+              <a:buSzPct val="100000"/>
+              <a:buChar char="•"/>
+            </a:pPr>
+            <a:r>
+              <a:rPr lang="en-US" sz="1500" dirty="0">
+                <a:solidFill>
+                  <a:srgbClr val="E8EAF0"/>
+                </a:solidFill>
+                <a:latin typeface="Calibri" pitchFamily="34" charset="0"/>
+                <a:ea typeface="Calibri" pitchFamily="34" charset="-122"/>
+                <a:cs typeface="Calibri" pitchFamily="34" charset="-120"/>
+              </a:rPr>
+              <a:t>Stance selector: Orthodox / Southpaw</a:t>
+            </a:r>
+            <a:endParaRPr lang="en-US" sz="1300" dirty="0"/>
+          </a:p>
+          <a:p>
+            <a:pPr marL="342900" indent="-342900">
+              <a:buSzPct val="100000"/>
+              <a:buChar char="•"/>
+            </a:pPr>
+            <a:r>
+              <a:rPr lang="en-US" sz="1500" dirty="0">
+                <a:solidFill>
+                  <a:srgbClr val="E8EAF0"/>
+                </a:solidFill>
+                <a:latin typeface="Calibri" pitchFamily="34" charset="0"/>
+                <a:ea typeface="Calibri" pitchFamily="34" charset="-122"/>
+                <a:cs typeface="Calibri" pitchFamily="34" charset="-120"/>
+              </a:rPr>
+              <a:t>Duration selector: 10s / 15s / 30s</a:t>
+            </a:r>
+            <a:endParaRPr lang="en-US" sz="1300" dirty="0"/>
+          </a:p>
+          <a:p>
+            <a:pPr marL="342900" indent="-342900">
+              <a:buSzPct val="100000"/>
+              <a:buChar char="•"/>
+            </a:pPr>
+            <a:r>
+              <a:rPr lang="en-US" sz="1500" dirty="0">
+                <a:solidFill>
+                  <a:srgbClr val="E8EAF0"/>
+                </a:solidFill>
+                <a:latin typeface="Calibri" pitchFamily="34" charset="0"/>
+                <a:ea typeface="Calibri" pitchFamily="34" charset="-122"/>
+                <a:cs typeface="Calibri" pitchFamily="34" charset="-120"/>
+              </a:rPr>
+              <a:t>START → countdown → auto-record → analyze</a:t>
+            </a:r>
+            <a:endParaRPr lang="en-US" sz="1300" dirty="0"/>
+          </a:p>
+          <a:p>
+            <a:pPr marL="342900" indent="-342900">
+              <a:buSzPct val="100000"/>
+              <a:buChar char="•"/>
+            </a:pPr>
+            <a:r>
+              <a:rPr lang="en-US" sz="1500" dirty="0">
+                <a:solidFill>
+                  <a:srgbClr val="E8EAF0"/>
+                </a:solidFill>
+                <a:latin typeface="Calibri" pitchFamily="34" charset="0"/>
+                <a:ea typeface="Calibri" pitchFamily="34" charset="-122"/>
+                <a:cs typeface="Calibri" pitchFamily="34" charset="-120"/>
+              </a:rPr>
+              <a:t>Live camera preview with real-time skeleton overlay</a:t>
+            </a:r>
+            <a:endParaRPr lang="en-US" sz="1300" dirty="0"/>
+          </a:p>
+          <a:p>
+            <a:pPr marL="342900" indent="-342900">
+              <a:buSzPct val="100000"/>
+              <a:buChar char="•"/>
+            </a:pPr>
+            <a:r>
+              <a:rPr lang="en-US" sz="1500" dirty="0">
+                <a:solidFill>
+                  <a:srgbClr val="E8EAF0"/>
+                </a:solidFill>
+                <a:latin typeface="Calibri" pitchFamily="34" charset="0"/>
+                <a:ea typeface="Calibri" pitchFamily="34" charset="-122"/>
+                <a:cs typeface="Calibri" pitchFamily="34" charset="-120"/>
+              </a:rPr>
+              <a:t>MoveNet Lightning runs on-device (TFLite)</a:t>
+            </a:r>
+            <a:endParaRPr lang="en-US" sz="1300" dirty="0"/>
+          </a:p>
+          <a:p>
+            <a:pPr marL="342900" indent="-342900">
+              <a:buSzPct val="100000"/>
+              <a:buChar char="•"/>
+            </a:pPr>
+            <a:r>
+              <a:rPr lang="en-US" sz="1500" dirty="0">
+                <a:solidFill>
+                  <a:srgbClr val="E8EAF0"/>
+                </a:solidFill>
+                <a:latin typeface="Calibri" pitchFamily="34" charset="0"/>
+                <a:ea typeface="Calibri" pitchFamily="34" charset="-122"/>
+                <a:cs typeface="Calibri" pitchFamily="34" charset="-120"/>
+              </a:rPr>
+              <a:t>Keypoints sampled at ~3fps during session</a:t>
+            </a:r>
+            <a:endParaRPr lang="en-US" sz="1300" dirty="0"/>
+          </a:p>
+        </p:txBody>
+      </p:sp>
+      <p:sp>
+        <p:nvSpPr>
+          <p:cNvPr id="7" name="Shape 5"/>
+          <p:cNvSpPr/>
+          <p:nvPr/>
+        </p:nvSpPr>
+        <p:spPr>
+          <a:xfrm>
+            <a:off x="4526280" y="1051560"/>
+            <a:ext cx="4206240" cy="3749040"/>
           </a:xfrm>
           <a:prstGeom prst="rect">
             <a:avLst/>
@@ -2146,14 +2401,183 @@
       </p:sp>
       <p:sp>
         <p:nvSpPr>
+          <p:cNvPr id="8" name="Text 6"/>
+          <p:cNvSpPr/>
+          <p:nvPr/>
+        </p:nvSpPr>
+        <p:spPr>
+          <a:xfrm>
+            <a:off x="4663440" y="1143000"/>
+            <a:ext cx="3657600" cy="228600"/>
+          </a:xfrm>
+          <a:prstGeom prst="rect">
+            <a:avLst/>
+          </a:prstGeom>
+          <a:noFill/>
+          <a:ln/>
+        </p:spPr>
+        <p:txBody>
+          <a:bodyPr wrap="square" lIns="0" tIns="0" rIns="0" bIns="0" rtlCol="0" anchor="ctr"/>
+          <a:lstStyle/>
+          <a:p>
+            <a:pPr marL="0" indent="0" algn="l">
+              <a:buNone/>
+            </a:pPr>
+            <a:r>
+              <a:rPr lang="en-US" sz="900" b="1" kern="0" spc="300" dirty="0">
+                <a:solidFill>
+                  <a:srgbClr val="43A047"/>
+                </a:solidFill>
+                <a:latin typeface="Calibri" pitchFamily="34" charset="0"/>
+                <a:ea typeface="Calibri" pitchFamily="34" charset="-122"/>
+                <a:cs typeface="Calibri" pitchFamily="34" charset="-120"/>
+              </a:rPr>
+              <a:t>RESULTS SCREEN</a:t>
+            </a:r>
+            <a:endParaRPr lang="en-US" sz="900" dirty="0"/>
+          </a:p>
+        </p:txBody>
+      </p:sp>
+      <p:sp>
+        <p:nvSpPr>
           <p:cNvPr id="9" name="Text 7"/>
           <p:cNvSpPr/>
           <p:nvPr/>
         </p:nvSpPr>
         <p:spPr>
           <a:xfrm>
-            <a:off x="2468880" y="1508760"/>
-            <a:ext cx="1920240" cy="548640"/>
+            <a:off x="4608576" y="1143000"/>
+            <a:ext cx="3840480" cy="3200400"/>
+          </a:xfrm>
+          <a:prstGeom prst="rect">
+            <a:avLst/>
+          </a:prstGeom>
+          <a:noFill/>
+          <a:ln/>
+        </p:spPr>
+        <p:txBody>
+          <a:bodyPr wrap="square" rtlCol="0" anchor="ctr"/>
+          <a:lstStyle/>
+          <a:p>
+            <a:pPr marL="342900" indent="-342900">
+              <a:buSzPct val="100000"/>
+              <a:buChar char="•"/>
+            </a:pPr>
+            <a:r>
+              <a:rPr lang="en-US" sz="1500" dirty="0">
+                <a:solidFill>
+                  <a:srgbClr val="E8EAF0"/>
+                </a:solidFill>
+                <a:latin typeface="Calibri" pitchFamily="34" charset="0"/>
+                <a:ea typeface="Calibri" pitchFamily="34" charset="-122"/>
+                <a:cs typeface="Calibri" pitchFamily="34" charset="-120"/>
+              </a:rPr>
+              <a:t>Punch counts: Jab / Cross / Hook</a:t>
+            </a:r>
+            <a:endParaRPr lang="en-US" sz="1300" dirty="0"/>
+          </a:p>
+          <a:p>
+            <a:pPr marL="342900" indent="-342900">
+              <a:buSzPct val="100000"/>
+              <a:buChar char="•"/>
+            </a:pPr>
+            <a:r>
+              <a:rPr lang="en-US" sz="1500" dirty="0">
+                <a:solidFill>
+                  <a:srgbClr val="E8EAF0"/>
+                </a:solidFill>
+                <a:latin typeface="Calibri" pitchFamily="34" charset="0"/>
+                <a:ea typeface="Calibri" pitchFamily="34" charset="-122"/>
+                <a:cs typeface="Calibri" pitchFamily="34" charset="-120"/>
+              </a:rPr>
+              <a:t>Coach feedback — 2–3 sentence summary</a:t>
+            </a:r>
+            <a:endParaRPr lang="en-US" sz="1300" dirty="0"/>
+          </a:p>
+          <a:p>
+            <a:pPr marL="342900" indent="-342900">
+              <a:buSzPct val="100000"/>
+              <a:buChar char="•"/>
+            </a:pPr>
+            <a:r>
+              <a:rPr lang="en-US" sz="1500" dirty="0">
+                <a:solidFill>
+                  <a:srgbClr val="E8EAF0"/>
+                </a:solidFill>
+                <a:latin typeface="Calibri" pitchFamily="34" charset="0"/>
+                <a:ea typeface="Calibri" pitchFamily="34" charset="-122"/>
+                <a:cs typeface="Calibri" pitchFamily="34" charset="-120"/>
+              </a:rPr>
+              <a:t>Strengths (green ✓)</a:t>
+            </a:r>
+            <a:endParaRPr lang="en-US" sz="1300" dirty="0"/>
+          </a:p>
+          <a:p>
+            <a:pPr marL="342900" indent="-342900">
+              <a:buSzPct val="100000"/>
+              <a:buChar char="•"/>
+            </a:pPr>
+            <a:r>
+              <a:rPr lang="en-US" sz="1500" dirty="0">
+                <a:solidFill>
+                  <a:srgbClr val="E8EAF0"/>
+                </a:solidFill>
+                <a:latin typeface="Calibri" pitchFamily="34" charset="0"/>
+                <a:ea typeface="Calibri" pitchFamily="34" charset="-122"/>
+                <a:cs typeface="Calibri" pitchFamily="34" charset="-120"/>
+              </a:rPr>
+              <a:t>Areas to improve (orange →)</a:t>
+            </a:r>
+            <a:endParaRPr lang="en-US" sz="1300" dirty="0"/>
+          </a:p>
+          <a:p>
+            <a:pPr marL="342900" indent="-342900">
+              <a:buSzPct val="100000"/>
+              <a:buChar char="•"/>
+            </a:pPr>
+            <a:r>
+              <a:rPr lang="en-US" sz="1500" dirty="0">
+                <a:solidFill>
+                  <a:srgbClr val="E8EAF0"/>
+                </a:solidFill>
+                <a:latin typeface="Calibri" pitchFamily="34" charset="0"/>
+                <a:ea typeface="Calibri" pitchFamily="34" charset="-122"/>
+                <a:cs typeface="Calibri" pitchFamily="34" charset="-120"/>
+              </a:rPr>
+              <a:t>Guard feedback — raised if hands dropped below chin</a:t>
+            </a:r>
+            <a:endParaRPr lang="en-US" sz="1300" dirty="0"/>
+          </a:p>
+          <a:p>
+            <a:pPr marL="342900" indent="-342900">
+              <a:buSzPct val="100000"/>
+              <a:buChar char="•"/>
+            </a:pPr>
+            <a:r>
+              <a:rPr lang="en-US" sz="1500" dirty="0">
+                <a:solidFill>
+                  <a:srgbClr val="E8EAF0"/>
+                </a:solidFill>
+                <a:latin typeface="Calibri" pitchFamily="34" charset="0"/>
+                <a:ea typeface="Calibri" pitchFamily="34" charset="-122"/>
+                <a:cs typeface="Calibri" pitchFamily="34" charset="-120"/>
+              </a:rPr>
+              <a:t>Punch timeline — collapsible, shows each detected punch with timestamp</a:t>
+            </a:r>
+            <a:endParaRPr lang="en-US" sz="1300" dirty="0"/>
+          </a:p>
+        </p:txBody>
+      </p:sp>
+      <p:sp>
+        <p:nvSpPr>
+          <p:cNvPr id="12" name="Text 10"/>
+          <p:cNvSpPr/>
+          <p:nvPr/>
+        </p:nvSpPr>
+        <p:spPr>
+          <a:xfrm>
+            <a:off x="1828800" y="4718304"/>
+            <a:ext cx="109728" cy="210312"/>
           </a:xfrm>
           <a:prstGeom prst="rect">
             <a:avLst/>
@@ -2169,69 +2593,296 @@
               <a:buNone/>
             </a:pPr>
             <a:r>
-              <a:rPr lang="en-US" sz="3800" b="1" dirty="0">
-                <a:solidFill>
-                  <a:srgbClr val="43A047"/>
+              <a:rPr lang="en-US" sz="1000" dirty="0">
+                <a:solidFill>
+                  <a:srgbClr val="4A5568"/>
+                </a:solidFill>
+              </a:rPr>
+              <a:t>·</a:t>
+            </a:r>
+            <a:endParaRPr lang="en-US" sz="1000" dirty="0"/>
+          </a:p>
+        </p:txBody>
+      </p:sp>
+      <p:sp>
+        <p:nvSpPr>
+          <p:cNvPr id="14" name="Text 12"/>
+          <p:cNvSpPr/>
+          <p:nvPr/>
+        </p:nvSpPr>
+        <p:spPr>
+          <a:xfrm>
+            <a:off x="3218688" y="4718304"/>
+            <a:ext cx="109728" cy="210312"/>
+          </a:xfrm>
+          <a:prstGeom prst="rect">
+            <a:avLst/>
+          </a:prstGeom>
+          <a:noFill/>
+          <a:ln/>
+        </p:spPr>
+        <p:txBody>
+          <a:bodyPr wrap="square" lIns="0" tIns="0" rIns="0" bIns="0" rtlCol="0" anchor="ctr"/>
+          <a:lstStyle/>
+          <a:p>
+            <a:pPr marL="0" indent="0" algn="ctr">
+              <a:buNone/>
+            </a:pPr>
+            <a:r>
+              <a:rPr lang="en-US" sz="1000" dirty="0">
+                <a:solidFill>
+                  <a:srgbClr val="4A5568"/>
+                </a:solidFill>
+              </a:rPr>
+              <a:t>·</a:t>
+            </a:r>
+            <a:endParaRPr lang="en-US" sz="1000" dirty="0"/>
+          </a:p>
+        </p:txBody>
+      </p:sp>
+      <p:sp>
+        <p:nvSpPr>
+          <p:cNvPr id="16" name="Text 14"/>
+          <p:cNvSpPr/>
+          <p:nvPr/>
+        </p:nvSpPr>
+        <p:spPr>
+          <a:xfrm>
+            <a:off x="4608576" y="4718304"/>
+            <a:ext cx="109728" cy="210312"/>
+          </a:xfrm>
+          <a:prstGeom prst="rect">
+            <a:avLst/>
+          </a:prstGeom>
+          <a:noFill/>
+          <a:ln/>
+        </p:spPr>
+        <p:txBody>
+          <a:bodyPr wrap="square" lIns="0" tIns="0" rIns="0" bIns="0" rtlCol="0" anchor="ctr"/>
+          <a:lstStyle/>
+          <a:p>
+            <a:pPr marL="0" indent="0" algn="ctr">
+              <a:buNone/>
+            </a:pPr>
+            <a:r>
+              <a:rPr lang="en-US" sz="1000" dirty="0">
+                <a:solidFill>
+                  <a:srgbClr val="4A5568"/>
+                </a:solidFill>
+              </a:rPr>
+              <a:t>·</a:t>
+            </a:r>
+            <a:endParaRPr lang="en-US" sz="1000" dirty="0"/>
+          </a:p>
+        </p:txBody>
+      </p:sp>
+      <p:sp>
+        <p:nvSpPr>
+          <p:cNvPr id="18" name="Text 16"/>
+          <p:cNvSpPr/>
+          <p:nvPr/>
+        </p:nvSpPr>
+        <p:spPr>
+          <a:xfrm>
+            <a:off x="5998464" y="4718304"/>
+            <a:ext cx="109728" cy="210312"/>
+          </a:xfrm>
+          <a:prstGeom prst="rect">
+            <a:avLst/>
+          </a:prstGeom>
+          <a:noFill/>
+          <a:ln/>
+        </p:spPr>
+        <p:txBody>
+          <a:bodyPr wrap="square" lIns="0" tIns="0" rIns="0" bIns="0" rtlCol="0" anchor="ctr"/>
+          <a:lstStyle/>
+          <a:p>
+            <a:pPr marL="0" indent="0" algn="ctr">
+              <a:buNone/>
+            </a:pPr>
+            <a:r>
+              <a:rPr lang="en-US" sz="1000" dirty="0">
+                <a:solidFill>
+                  <a:srgbClr val="4A5568"/>
+                </a:solidFill>
+              </a:rPr>
+              <a:t>·</a:t>
+            </a:r>
+            <a:endParaRPr lang="en-US" sz="1000" dirty="0"/>
+          </a:p>
+        </p:txBody>
+      </p:sp>
+      <p:sp>
+        <p:nvSpPr>
+          <p:cNvPr id="20" name="Text 18"/>
+          <p:cNvSpPr/>
+          <p:nvPr/>
+        </p:nvSpPr>
+        <p:spPr>
+          <a:xfrm>
+            <a:off x="7388352" y="4718304"/>
+            <a:ext cx="109728" cy="210312"/>
+          </a:xfrm>
+          <a:prstGeom prst="rect">
+            <a:avLst/>
+          </a:prstGeom>
+          <a:noFill/>
+          <a:ln/>
+        </p:spPr>
+        <p:txBody>
+          <a:bodyPr wrap="square" lIns="0" tIns="0" rIns="0" bIns="0" rtlCol="0" anchor="ctr"/>
+          <a:lstStyle/>
+          <a:p>
+            <a:pPr marL="0" indent="0" algn="ctr">
+              <a:buNone/>
+            </a:pPr>
+            <a:r>
+              <a:rPr lang="en-US" sz="1000" dirty="0">
+                <a:solidFill>
+                  <a:srgbClr val="4A5568"/>
+                </a:solidFill>
+              </a:rPr>
+              <a:t>·</a:t>
+            </a:r>
+            <a:endParaRPr lang="en-US" sz="1000" dirty="0"/>
+          </a:p>
+        </p:txBody>
+      </p:sp>
+    </p:spTree>
+  </p:cSld>
+  <p:clrMapOvr>
+    <a:masterClrMapping/>
+  </p:clrMapOvr>
+</p:sld>
+</file>
+
+<file path=ppt/slides/slide11.xml><?xml version="1.0" encoding="utf-8"?>
+<p:sld xmlns:a="http://schemas.openxmlformats.org/drawingml/2006/main" xmlns:r="http://schemas.openxmlformats.org/officeDocument/2006/relationships" xmlns:p="http://schemas.openxmlformats.org/presentationml/2006/main">
+  <p:cSld>
+    <p:bg>
+      <p:bgPr>
+        <a:solidFill>
+          <a:srgbClr val="0A0E1A"/>
+        </a:solidFill>
+        <a:effectLst/>
+      </p:bgPr>
+    </p:bg>
+    <p:spTree>
+      <p:nvGrpSpPr>
+        <p:cNvPr id="1" name="">
+          <a:extLst>
+            <a:ext uri="{FF2B5EF4-FFF2-40B4-BE49-F238E27FC236}">
+              <a16:creationId xmlns:a16="http://schemas.microsoft.com/office/drawing/2014/main" id="{D95BC388-AA12-DDF3-1AE7-98B119BDAEE9}"/>
+            </a:ext>
+          </a:extLst>
+        </p:cNvPr>
+        <p:cNvGrpSpPr/>
+        <p:nvPr/>
+      </p:nvGrpSpPr>
+      <p:grpSpPr>
+        <a:xfrm>
+          <a:off x="0" y="0"/>
+          <a:ext cx="0" cy="0"/>
+          <a:chOff x="0" y="0"/>
+          <a:chExt cx="0" cy="0"/>
+        </a:xfrm>
+      </p:grpSpPr>
+      <p:sp>
+        <p:nvSpPr>
+          <p:cNvPr id="2" name="Text 0">
+            <a:extLst>
+              <a:ext uri="{FF2B5EF4-FFF2-40B4-BE49-F238E27FC236}">
+                <a16:creationId xmlns:a16="http://schemas.microsoft.com/office/drawing/2014/main" id="{79324F7A-ADFB-F197-344C-AD5C7AC0D8C3}"/>
+              </a:ext>
+            </a:extLst>
+          </p:cNvPr>
+          <p:cNvSpPr/>
+          <p:nvPr/>
+        </p:nvSpPr>
+        <p:spPr>
+          <a:xfrm>
+            <a:off x="457200" y="320040"/>
+            <a:ext cx="8229600" cy="502920"/>
+          </a:xfrm>
+          <a:prstGeom prst="rect">
+            <a:avLst/>
+          </a:prstGeom>
+          <a:noFill/>
+          <a:ln/>
+        </p:spPr>
+        <p:txBody>
+          <a:bodyPr wrap="square" lIns="0" tIns="0" rIns="0" bIns="0" rtlCol="0" anchor="ctr"/>
+          <a:lstStyle/>
+          <a:p>
+            <a:r>
+              <a:rPr lang="en-US" sz="2800" b="1" dirty="0">
+                <a:solidFill>
+                  <a:srgbClr val="FFFFFF"/>
                 </a:solidFill>
                 <a:latin typeface="Trebuchet MS" pitchFamily="34" charset="0"/>
                 <a:ea typeface="Trebuchet MS" pitchFamily="34" charset="-122"/>
                 <a:cs typeface="Trebuchet MS" pitchFamily="34" charset="-120"/>
               </a:rPr>
-              <a:t>30+</a:t>
-            </a:r>
-            <a:endParaRPr lang="en-US" sz="3800" dirty="0"/>
-          </a:p>
-        </p:txBody>
-      </p:sp>
-      <p:sp>
-        <p:nvSpPr>
-          <p:cNvPr id="10" name="Text 8"/>
-          <p:cNvSpPr/>
-          <p:nvPr/>
-        </p:nvSpPr>
-        <p:spPr>
-          <a:xfrm>
-            <a:off x="2468880" y="2057400"/>
-            <a:ext cx="1920240" cy="274320"/>
-          </a:xfrm>
-          <a:prstGeom prst="rect">
-            <a:avLst/>
-          </a:prstGeom>
-          <a:noFill/>
-          <a:ln/>
-        </p:spPr>
-        <p:txBody>
-          <a:bodyPr wrap="square" lIns="0" tIns="0" rIns="0" bIns="0" rtlCol="0" anchor="ctr"/>
-          <a:lstStyle/>
-          <a:p>
-            <a:pPr marL="0" indent="0" algn="ctr">
-              <a:buNone/>
-            </a:pPr>
-            <a:r>
-              <a:rPr lang="en-US" sz="1100" dirty="0">
-                <a:solidFill>
-                  <a:srgbClr val="8892A4"/>
-                </a:solidFill>
-                <a:latin typeface="Calibri" pitchFamily="34" charset="0"/>
-                <a:ea typeface="Calibri" pitchFamily="34" charset="-122"/>
-                <a:cs typeface="Calibri" pitchFamily="34" charset="-120"/>
-              </a:rPr>
-              <a:t>FPS on S23</a:t>
-            </a:r>
-            <a:endParaRPr lang="en-US" sz="1100" dirty="0"/>
-          </a:p>
-        </p:txBody>
-      </p:sp>
-      <p:sp>
-        <p:nvSpPr>
-          <p:cNvPr id="11" name="Shape 9"/>
-          <p:cNvSpPr/>
-          <p:nvPr/>
-        </p:nvSpPr>
-        <p:spPr>
-          <a:xfrm>
-            <a:off x="4572000" y="1463040"/>
-            <a:ext cx="1920240" cy="914400"/>
+              <a:t>Technical Issues</a:t>
+            </a:r>
+            <a:endParaRPr lang="en-US" sz="2800" dirty="0"/>
+          </a:p>
+        </p:txBody>
+      </p:sp>
+      <p:sp>
+        <p:nvSpPr>
+          <p:cNvPr id="3" name="Shape 1">
+            <a:extLst>
+              <a:ext uri="{FF2B5EF4-FFF2-40B4-BE49-F238E27FC236}">
+                <a16:creationId xmlns:a16="http://schemas.microsoft.com/office/drawing/2014/main" id="{21C1D73B-2EC7-B952-7920-DA6EB3370CB7}"/>
+              </a:ext>
+            </a:extLst>
+          </p:cNvPr>
+          <p:cNvSpPr/>
+          <p:nvPr/>
+        </p:nvSpPr>
+        <p:spPr>
+          <a:xfrm>
+            <a:off x="457200" y="850392"/>
+            <a:ext cx="1097280" cy="36576"/>
+          </a:xfrm>
+          <a:prstGeom prst="rect">
+            <a:avLst/>
+          </a:prstGeom>
+          <a:solidFill>
+            <a:srgbClr val="E53935"/>
+          </a:solidFill>
+          <a:ln w="12700">
+            <a:solidFill>
+              <a:srgbClr val="E53935"/>
+            </a:solidFill>
+            <a:prstDash val="solid"/>
+          </a:ln>
+        </p:spPr>
+        <p:txBody>
+          <a:bodyPr/>
+          <a:lstStyle/>
+          <a:p>
+            <a:endParaRPr lang="en-KR"/>
+          </a:p>
+        </p:txBody>
+      </p:sp>
+      <p:sp>
+        <p:nvSpPr>
+          <p:cNvPr id="4" name="Shape 2">
+            <a:extLst>
+              <a:ext uri="{FF2B5EF4-FFF2-40B4-BE49-F238E27FC236}">
+                <a16:creationId xmlns:a16="http://schemas.microsoft.com/office/drawing/2014/main" id="{2643CE60-33A7-5942-3B4E-217363E6CABC}"/>
+              </a:ext>
+            </a:extLst>
+          </p:cNvPr>
+          <p:cNvSpPr/>
+          <p:nvPr/>
+        </p:nvSpPr>
+        <p:spPr>
+          <a:xfrm>
+            <a:off x="365760" y="1051560"/>
+            <a:ext cx="3931920" cy="3749040"/>
           </a:xfrm>
           <a:prstGeom prst="rect">
             <a:avLst/>
@@ -2263,14 +2914,20 @@
       </p:sp>
       <p:sp>
         <p:nvSpPr>
-          <p:cNvPr id="12" name="Text 10"/>
-          <p:cNvSpPr/>
-          <p:nvPr/>
-        </p:nvSpPr>
-        <p:spPr>
-          <a:xfrm>
-            <a:off x="4572000" y="1508760"/>
-            <a:ext cx="1920240" cy="548640"/>
+          <p:cNvPr id="5" name="Text 3">
+            <a:extLst>
+              <a:ext uri="{FF2B5EF4-FFF2-40B4-BE49-F238E27FC236}">
+                <a16:creationId xmlns:a16="http://schemas.microsoft.com/office/drawing/2014/main" id="{A839A5CE-379F-D822-BC3F-EDCC09E83AE9}"/>
+              </a:ext>
+            </a:extLst>
+          </p:cNvPr>
+          <p:cNvSpPr/>
+          <p:nvPr/>
+        </p:nvSpPr>
+        <p:spPr>
+          <a:xfrm>
+            <a:off x="502920" y="1143000"/>
+            <a:ext cx="3657600" cy="228600"/>
           </a:xfrm>
           <a:prstGeom prst="rect">
             <a:avLst/>
@@ -2282,73 +2939,75 @@
           <a:bodyPr wrap="square" lIns="0" tIns="0" rIns="0" bIns="0" rtlCol="0" anchor="ctr"/>
           <a:lstStyle/>
           <a:p>
-            <a:pPr marL="0" indent="0" algn="ctr">
-              <a:buNone/>
-            </a:pPr>
-            <a:r>
-              <a:rPr lang="en-US" sz="3800" b="1" dirty="0">
+            <a:pPr marL="0" indent="0" algn="l">
+              <a:buNone/>
+            </a:pPr>
+            <a:r>
+              <a:rPr lang="en-US" sz="900" b="1" kern="0" spc="300" dirty="0">
                 <a:solidFill>
                   <a:srgbClr val="1565C0"/>
                 </a:solidFill>
-                <a:latin typeface="Trebuchet MS" pitchFamily="34" charset="0"/>
-                <a:ea typeface="Trebuchet MS" pitchFamily="34" charset="-122"/>
-                <a:cs typeface="Trebuchet MS" pitchFamily="34" charset="-120"/>
-              </a:rPr>
-              <a:t>INT8</a:t>
-            </a:r>
-            <a:endParaRPr lang="en-US" sz="3800" dirty="0"/>
-          </a:p>
-        </p:txBody>
-      </p:sp>
-      <p:sp>
-        <p:nvSpPr>
-          <p:cNvPr id="13" name="Text 11"/>
-          <p:cNvSpPr/>
-          <p:nvPr/>
-        </p:nvSpPr>
-        <p:spPr>
-          <a:xfrm>
-            <a:off x="4572000" y="2057400"/>
-            <a:ext cx="1920240" cy="274320"/>
-          </a:xfrm>
-          <a:prstGeom prst="rect">
-            <a:avLst/>
-          </a:prstGeom>
-          <a:noFill/>
-          <a:ln/>
-        </p:spPr>
-        <p:txBody>
-          <a:bodyPr wrap="square" lIns="0" tIns="0" rIns="0" bIns="0" rtlCol="0" anchor="ctr"/>
-          <a:lstStyle/>
-          <a:p>
-            <a:pPr marL="0" indent="0" algn="ctr">
-              <a:buNone/>
-            </a:pPr>
-            <a:r>
-              <a:rPr lang="en-US" sz="1100" dirty="0">
-                <a:solidFill>
-                  <a:srgbClr val="8892A4"/>
-                </a:solidFill>
-                <a:latin typeface="Calibri" pitchFamily="34" charset="0"/>
-                <a:ea typeface="Calibri" pitchFamily="34" charset="-122"/>
-                <a:cs typeface="Calibri" pitchFamily="34" charset="-120"/>
-              </a:rPr>
-              <a:t>Quantization</a:t>
-            </a:r>
-            <a:endParaRPr lang="en-US" sz="1100" dirty="0"/>
-          </a:p>
-        </p:txBody>
-      </p:sp>
-      <p:sp>
-        <p:nvSpPr>
-          <p:cNvPr id="14" name="Shape 12"/>
-          <p:cNvSpPr/>
-          <p:nvPr/>
-        </p:nvSpPr>
-        <p:spPr>
-          <a:xfrm>
-            <a:off x="6675120" y="1463040"/>
-            <a:ext cx="2011680" cy="914400"/>
+                <a:latin typeface="Calibri" pitchFamily="34" charset="0"/>
+                <a:ea typeface="Calibri" pitchFamily="34" charset="-122"/>
+                <a:cs typeface="Calibri" pitchFamily="34" charset="-120"/>
+              </a:rPr>
+              <a:t>BOXING PUNCH TYPES</a:t>
+            </a:r>
+            <a:endParaRPr lang="en-US" sz="900" dirty="0"/>
+          </a:p>
+        </p:txBody>
+      </p:sp>
+      <p:sp>
+        <p:nvSpPr>
+          <p:cNvPr id="6" name="Text 4">
+            <a:extLst>
+              <a:ext uri="{FF2B5EF4-FFF2-40B4-BE49-F238E27FC236}">
+                <a16:creationId xmlns:a16="http://schemas.microsoft.com/office/drawing/2014/main" id="{7E3B5ABA-0B7B-DBB9-E181-6F7348A65639}"/>
+              </a:ext>
+            </a:extLst>
+          </p:cNvPr>
+          <p:cNvSpPr/>
+          <p:nvPr/>
+        </p:nvSpPr>
+        <p:spPr>
+          <a:xfrm>
+            <a:off x="502920" y="1371600"/>
+            <a:ext cx="3566160" cy="3200400"/>
+          </a:xfrm>
+          <a:prstGeom prst="rect">
+            <a:avLst/>
+          </a:prstGeom>
+          <a:noFill/>
+          <a:ln/>
+        </p:spPr>
+        <p:txBody>
+          <a:bodyPr wrap="square" rtlCol="0" anchor="ctr"/>
+          <a:lstStyle/>
+          <a:p>
+            <a:pPr marL="342900" indent="-342900">
+              <a:buSzPct val="100000"/>
+              <a:buChar char="•"/>
+            </a:pPr>
+            <a:endParaRPr lang="en-US" sz="1300" dirty="0"/>
+          </a:p>
+        </p:txBody>
+      </p:sp>
+      <p:sp>
+        <p:nvSpPr>
+          <p:cNvPr id="7" name="Shape 5">
+            <a:extLst>
+              <a:ext uri="{FF2B5EF4-FFF2-40B4-BE49-F238E27FC236}">
+                <a16:creationId xmlns:a16="http://schemas.microsoft.com/office/drawing/2014/main" id="{2D01FC1A-4018-A57E-C48E-34835C7EDFE9}"/>
+              </a:ext>
+            </a:extLst>
+          </p:cNvPr>
+          <p:cNvSpPr/>
+          <p:nvPr/>
+        </p:nvSpPr>
+        <p:spPr>
+          <a:xfrm>
+            <a:off x="4526280" y="1051560"/>
+            <a:ext cx="4206240" cy="3749040"/>
           </a:xfrm>
           <a:prstGeom prst="rect">
             <a:avLst/>
@@ -2374,20 +3033,26 @@
           <a:bodyPr/>
           <a:lstStyle/>
           <a:p>
-            <a:endParaRPr lang="en-KR"/>
-          </a:p>
-        </p:txBody>
-      </p:sp>
-      <p:sp>
-        <p:nvSpPr>
-          <p:cNvPr id="15" name="Text 13"/>
-          <p:cNvSpPr/>
-          <p:nvPr/>
-        </p:nvSpPr>
-        <p:spPr>
-          <a:xfrm>
-            <a:off x="6675120" y="1508760"/>
-            <a:ext cx="2011680" cy="548640"/>
+            <a:endParaRPr lang="en-KR" dirty="0"/>
+          </a:p>
+        </p:txBody>
+      </p:sp>
+      <p:sp>
+        <p:nvSpPr>
+          <p:cNvPr id="8" name="Text 6">
+            <a:extLst>
+              <a:ext uri="{FF2B5EF4-FFF2-40B4-BE49-F238E27FC236}">
+                <a16:creationId xmlns:a16="http://schemas.microsoft.com/office/drawing/2014/main" id="{8C75311D-2ED0-FAEB-30A5-68E75EAEA193}"/>
+              </a:ext>
+            </a:extLst>
+          </p:cNvPr>
+          <p:cNvSpPr/>
+          <p:nvPr/>
+        </p:nvSpPr>
+        <p:spPr>
+          <a:xfrm>
+            <a:off x="4663440" y="1143000"/>
+            <a:ext cx="3657600" cy="228600"/>
           </a:xfrm>
           <a:prstGeom prst="rect">
             <a:avLst/>
@@ -2399,34 +3064,162 @@
           <a:bodyPr wrap="square" lIns="0" tIns="0" rIns="0" bIns="0" rtlCol="0" anchor="ctr"/>
           <a:lstStyle/>
           <a:p>
+            <a:pPr marL="0" indent="0" algn="l">
+              <a:buNone/>
+            </a:pPr>
+            <a:r>
+              <a:rPr lang="en-US" sz="900" b="1" kern="0" spc="300" dirty="0">
+                <a:solidFill>
+                  <a:srgbClr val="43A047"/>
+                </a:solidFill>
+                <a:latin typeface="Calibri" pitchFamily="34" charset="0"/>
+                <a:ea typeface="Calibri" pitchFamily="34" charset="-122"/>
+                <a:cs typeface="Calibri" pitchFamily="34" charset="-120"/>
+              </a:rPr>
+              <a:t>POSSIBLE REASONS FOR UPPERCUT FAILURES</a:t>
+            </a:r>
+            <a:endParaRPr lang="en-US" sz="900" dirty="0"/>
+          </a:p>
+        </p:txBody>
+      </p:sp>
+      <p:sp>
+        <p:nvSpPr>
+          <p:cNvPr id="9" name="Text 7">
+            <a:extLst>
+              <a:ext uri="{FF2B5EF4-FFF2-40B4-BE49-F238E27FC236}">
+                <a16:creationId xmlns:a16="http://schemas.microsoft.com/office/drawing/2014/main" id="{7D64883E-94F1-4654-849C-FD8A9F2A8BBF}"/>
+              </a:ext>
+            </a:extLst>
+          </p:cNvPr>
+          <p:cNvSpPr/>
+          <p:nvPr/>
+        </p:nvSpPr>
+        <p:spPr>
+          <a:xfrm>
+            <a:off x="4608576" y="1093124"/>
+            <a:ext cx="3840480" cy="3200400"/>
+          </a:xfrm>
+          <a:prstGeom prst="rect">
+            <a:avLst/>
+          </a:prstGeom>
+          <a:noFill/>
+          <a:ln/>
+        </p:spPr>
+        <p:txBody>
+          <a:bodyPr wrap="square" rtlCol="0" anchor="ctr"/>
+          <a:lstStyle/>
+          <a:p>
+            <a:pPr marL="342900" indent="-342900">
+              <a:buSzPct val="100000"/>
+              <a:buChar char="•"/>
+            </a:pPr>
+            <a:r>
+              <a:rPr lang="en-US" sz="1500" dirty="0">
+                <a:solidFill>
+                  <a:srgbClr val="E8EAF0"/>
+                </a:solidFill>
+                <a:latin typeface="Calibri" pitchFamily="34" charset="0"/>
+                <a:ea typeface="Calibri" pitchFamily="34" charset="-122"/>
+                <a:cs typeface="Calibri" pitchFamily="34" charset="-120"/>
+              </a:rPr>
+              <a:t>Upward movement isn’t unique to uppercut</a:t>
+            </a:r>
+            <a:endParaRPr lang="en-US" sz="1300" dirty="0"/>
+          </a:p>
+          <a:p>
+            <a:pPr marL="342900" indent="-342900">
+              <a:buSzPct val="100000"/>
+              <a:buChar char="•"/>
+            </a:pPr>
+            <a:r>
+              <a:rPr lang="en-US" sz="1500" dirty="0">
+                <a:solidFill>
+                  <a:srgbClr val="E8EAF0"/>
+                </a:solidFill>
+                <a:latin typeface="Calibri" pitchFamily="34" charset="0"/>
+                <a:ea typeface="Calibri" pitchFamily="34" charset="-122"/>
+                <a:cs typeface="Calibri" pitchFamily="34" charset="-120"/>
+              </a:rPr>
+              <a:t>Uppercuts are often thrown at short range and can complete very quickly</a:t>
+            </a:r>
+          </a:p>
+          <a:p>
+            <a:pPr marL="342900" indent="-342900">
+              <a:buSzPct val="100000"/>
+              <a:buChar char="•"/>
+            </a:pPr>
+            <a:r>
+              <a:rPr lang="en-US" sz="1500" dirty="0">
+                <a:solidFill>
+                  <a:srgbClr val="E8EAF0"/>
+                </a:solidFill>
+                <a:latin typeface="Calibri" pitchFamily="34" charset="0"/>
+                <a:cs typeface="Calibri" pitchFamily="34" charset="-120"/>
+              </a:rPr>
+              <a:t>The upward arc is very short</a:t>
+            </a:r>
+            <a:endParaRPr lang="en-US" sz="1300" dirty="0"/>
+          </a:p>
+        </p:txBody>
+      </p:sp>
+      <p:sp>
+        <p:nvSpPr>
+          <p:cNvPr id="12" name="Text 10">
+            <a:extLst>
+              <a:ext uri="{FF2B5EF4-FFF2-40B4-BE49-F238E27FC236}">
+                <a16:creationId xmlns:a16="http://schemas.microsoft.com/office/drawing/2014/main" id="{5A9E6013-C51F-7DD3-BCD6-A4BCF0A38561}"/>
+              </a:ext>
+            </a:extLst>
+          </p:cNvPr>
+          <p:cNvSpPr/>
+          <p:nvPr/>
+        </p:nvSpPr>
+        <p:spPr>
+          <a:xfrm>
+            <a:off x="1828800" y="4718304"/>
+            <a:ext cx="109728" cy="210312"/>
+          </a:xfrm>
+          <a:prstGeom prst="rect">
+            <a:avLst/>
+          </a:prstGeom>
+          <a:noFill/>
+          <a:ln/>
+        </p:spPr>
+        <p:txBody>
+          <a:bodyPr wrap="square" lIns="0" tIns="0" rIns="0" bIns="0" rtlCol="0" anchor="ctr"/>
+          <a:lstStyle/>
+          <a:p>
             <a:pPr marL="0" indent="0" algn="ctr">
               <a:buNone/>
             </a:pPr>
             <a:r>
-              <a:rPr lang="en-US" sz="3800" b="1" dirty="0">
-                <a:solidFill>
-                  <a:srgbClr val="FFB300"/>
-                </a:solidFill>
-                <a:latin typeface="Trebuchet MS" pitchFamily="34" charset="0"/>
-                <a:ea typeface="Trebuchet MS" pitchFamily="34" charset="-122"/>
-                <a:cs typeface="Trebuchet MS" pitchFamily="34" charset="-120"/>
-              </a:rPr>
-              <a:t>&lt;5ms</a:t>
-            </a:r>
-            <a:endParaRPr lang="en-US" sz="3800" dirty="0"/>
-          </a:p>
-        </p:txBody>
-      </p:sp>
-      <p:sp>
-        <p:nvSpPr>
-          <p:cNvPr id="16" name="Text 14"/>
-          <p:cNvSpPr/>
-          <p:nvPr/>
-        </p:nvSpPr>
-        <p:spPr>
-          <a:xfrm>
-            <a:off x="6675120" y="2057400"/>
-            <a:ext cx="2011680" cy="274320"/>
+              <a:rPr lang="en-US" sz="1000" dirty="0">
+                <a:solidFill>
+                  <a:srgbClr val="4A5568"/>
+                </a:solidFill>
+              </a:rPr>
+              <a:t>·</a:t>
+            </a:r>
+            <a:endParaRPr lang="en-US" sz="1000" dirty="0"/>
+          </a:p>
+        </p:txBody>
+      </p:sp>
+      <p:sp>
+        <p:nvSpPr>
+          <p:cNvPr id="14" name="Text 12">
+            <a:extLst>
+              <a:ext uri="{FF2B5EF4-FFF2-40B4-BE49-F238E27FC236}">
+                <a16:creationId xmlns:a16="http://schemas.microsoft.com/office/drawing/2014/main" id="{558C466A-60F3-2727-8620-E393DABD56E9}"/>
+              </a:ext>
+            </a:extLst>
+          </p:cNvPr>
+          <p:cNvSpPr/>
+          <p:nvPr/>
+        </p:nvSpPr>
+        <p:spPr>
+          <a:xfrm>
+            <a:off x="3218688" y="4718304"/>
+            <a:ext cx="109728" cy="210312"/>
           </a:xfrm>
           <a:prstGeom prst="rect">
             <a:avLst/>
@@ -2442,69 +3235,33 @@
               <a:buNone/>
             </a:pPr>
             <a:r>
-              <a:rPr lang="en-US" sz="1100" dirty="0">
-                <a:solidFill>
-                  <a:srgbClr val="8892A4"/>
-                </a:solidFill>
-                <a:latin typeface="Calibri" pitchFamily="34" charset="0"/>
-                <a:ea typeface="Calibri" pitchFamily="34" charset="-122"/>
-                <a:cs typeface="Calibri" pitchFamily="34" charset="-120"/>
-              </a:rPr>
-              <a:t>Inference Latency</a:t>
-            </a:r>
-            <a:endParaRPr lang="en-US" sz="1100" dirty="0"/>
-          </a:p>
-        </p:txBody>
-      </p:sp>
-      <p:sp>
-        <p:nvSpPr>
-          <p:cNvPr id="17" name="Shape 15"/>
-          <p:cNvSpPr/>
-          <p:nvPr/>
-        </p:nvSpPr>
-        <p:spPr>
-          <a:xfrm>
-            <a:off x="365760" y="2606040"/>
-            <a:ext cx="8412480" cy="1828800"/>
-          </a:xfrm>
-          <a:prstGeom prst="rect">
-            <a:avLst/>
-          </a:prstGeom>
-          <a:solidFill>
-            <a:srgbClr val="1C2236"/>
-          </a:solidFill>
-          <a:ln w="12700">
-            <a:solidFill>
-              <a:srgbClr val="252D42"/>
-            </a:solidFill>
-            <a:prstDash val="solid"/>
-          </a:ln>
-          <a:effectLst>
-            <a:outerShdw blurRad="101600" dist="25400" dir="8100000" algn="bl" rotWithShape="0">
-              <a:srgbClr val="000000">
-                <a:alpha val="25000"/>
-              </a:srgbClr>
-            </a:outerShdw>
-          </a:effectLst>
-        </p:spPr>
-        <p:txBody>
-          <a:bodyPr/>
-          <a:lstStyle/>
-          <a:p>
-            <a:endParaRPr lang="en-KR"/>
-          </a:p>
-        </p:txBody>
-      </p:sp>
-      <p:sp>
-        <p:nvSpPr>
-          <p:cNvPr id="18" name="Text 16"/>
-          <p:cNvSpPr/>
-          <p:nvPr/>
-        </p:nvSpPr>
-        <p:spPr>
-          <a:xfrm>
-            <a:off x="502920" y="2670048"/>
-            <a:ext cx="3657600" cy="228600"/>
+              <a:rPr lang="en-US" sz="1000" dirty="0">
+                <a:solidFill>
+                  <a:srgbClr val="4A5568"/>
+                </a:solidFill>
+              </a:rPr>
+              <a:t>·</a:t>
+            </a:r>
+            <a:endParaRPr lang="en-US" sz="1000" dirty="0"/>
+          </a:p>
+        </p:txBody>
+      </p:sp>
+      <p:sp>
+        <p:nvSpPr>
+          <p:cNvPr id="16" name="Text 14">
+            <a:extLst>
+              <a:ext uri="{FF2B5EF4-FFF2-40B4-BE49-F238E27FC236}">
+                <a16:creationId xmlns:a16="http://schemas.microsoft.com/office/drawing/2014/main" id="{8115929F-07E7-780E-8927-54779DC4645B}"/>
+              </a:ext>
+            </a:extLst>
+          </p:cNvPr>
+          <p:cNvSpPr/>
+          <p:nvPr/>
+        </p:nvSpPr>
+        <p:spPr>
+          <a:xfrm>
+            <a:off x="4608576" y="4718304"/>
+            <a:ext cx="109728" cy="210312"/>
           </a:xfrm>
           <a:prstGeom prst="rect">
             <a:avLst/>
@@ -2516,34 +3273,37 @@
           <a:bodyPr wrap="square" lIns="0" tIns="0" rIns="0" bIns="0" rtlCol="0" anchor="ctr"/>
           <a:lstStyle/>
           <a:p>
-            <a:pPr marL="0" indent="0" algn="l">
-              <a:buNone/>
-            </a:pPr>
-            <a:r>
-              <a:rPr lang="en-US" sz="900" b="1" kern="0" spc="300" dirty="0">
-                <a:solidFill>
-                  <a:srgbClr val="8892A4"/>
-                </a:solidFill>
-                <a:latin typeface="Calibri" pitchFamily="34" charset="0"/>
-                <a:ea typeface="Calibri" pitchFamily="34" charset="-122"/>
-                <a:cs typeface="Calibri" pitchFamily="34" charset="-120"/>
-              </a:rPr>
-              <a:t>BEFORE vs AFTER QUANTIZATION (1D-CNN Classifier)</a:t>
-            </a:r>
-            <a:endParaRPr lang="en-US" sz="900" dirty="0"/>
-          </a:p>
-        </p:txBody>
-      </p:sp>
-      <p:sp>
-        <p:nvSpPr>
-          <p:cNvPr id="19" name="Text 17"/>
-          <p:cNvSpPr/>
-          <p:nvPr/>
-        </p:nvSpPr>
-        <p:spPr>
-          <a:xfrm>
-            <a:off x="502920" y="2834640"/>
-            <a:ext cx="1737360" cy="256032"/>
+            <a:pPr marL="0" indent="0" algn="ctr">
+              <a:buNone/>
+            </a:pPr>
+            <a:r>
+              <a:rPr lang="en-US" sz="1000" dirty="0">
+                <a:solidFill>
+                  <a:srgbClr val="4A5568"/>
+                </a:solidFill>
+              </a:rPr>
+              <a:t>·</a:t>
+            </a:r>
+            <a:endParaRPr lang="en-US" sz="1000" dirty="0"/>
+          </a:p>
+        </p:txBody>
+      </p:sp>
+      <p:sp>
+        <p:nvSpPr>
+          <p:cNvPr id="18" name="Text 16">
+            <a:extLst>
+              <a:ext uri="{FF2B5EF4-FFF2-40B4-BE49-F238E27FC236}">
+                <a16:creationId xmlns:a16="http://schemas.microsoft.com/office/drawing/2014/main" id="{53942A59-F4EF-78A0-11C5-CEC19AF107A6}"/>
+              </a:ext>
+            </a:extLst>
+          </p:cNvPr>
+          <p:cNvSpPr/>
+          <p:nvPr/>
+        </p:nvSpPr>
+        <p:spPr>
+          <a:xfrm>
+            <a:off x="5998464" y="4718304"/>
+            <a:ext cx="109728" cy="210312"/>
           </a:xfrm>
           <a:prstGeom prst="rect">
             <a:avLst/>
@@ -2555,34 +3315,37 @@
           <a:bodyPr wrap="square" lIns="0" tIns="0" rIns="0" bIns="0" rtlCol="0" anchor="ctr"/>
           <a:lstStyle/>
           <a:p>
-            <a:pPr marL="0" indent="0">
-              <a:buNone/>
-            </a:pPr>
-            <a:r>
-              <a:rPr lang="en-US" sz="1100" b="1" dirty="0">
-                <a:solidFill>
-                  <a:srgbClr val="8892A4"/>
-                </a:solidFill>
-                <a:latin typeface="Calibri" pitchFamily="34" charset="0"/>
-                <a:ea typeface="Calibri" pitchFamily="34" charset="-122"/>
-                <a:cs typeface="Calibri" pitchFamily="34" charset="-120"/>
-              </a:rPr>
-              <a:t>Metric</a:t>
-            </a:r>
-            <a:endParaRPr lang="en-US" sz="1100" dirty="0"/>
-          </a:p>
-        </p:txBody>
-      </p:sp>
-      <p:sp>
-        <p:nvSpPr>
-          <p:cNvPr id="20" name="Text 18"/>
-          <p:cNvSpPr/>
-          <p:nvPr/>
-        </p:nvSpPr>
-        <p:spPr>
-          <a:xfrm>
-            <a:off x="2377440" y="2834640"/>
-            <a:ext cx="2103120" cy="256032"/>
+            <a:pPr marL="0" indent="0" algn="ctr">
+              <a:buNone/>
+            </a:pPr>
+            <a:r>
+              <a:rPr lang="en-US" sz="1000" dirty="0">
+                <a:solidFill>
+                  <a:srgbClr val="4A5568"/>
+                </a:solidFill>
+              </a:rPr>
+              <a:t>·</a:t>
+            </a:r>
+            <a:endParaRPr lang="en-US" sz="1000" dirty="0"/>
+          </a:p>
+        </p:txBody>
+      </p:sp>
+      <p:sp>
+        <p:nvSpPr>
+          <p:cNvPr id="20" name="Text 18">
+            <a:extLst>
+              <a:ext uri="{FF2B5EF4-FFF2-40B4-BE49-F238E27FC236}">
+                <a16:creationId xmlns:a16="http://schemas.microsoft.com/office/drawing/2014/main" id="{3047386E-993B-B81C-C7CA-D2DA449D466C}"/>
+              </a:ext>
+            </a:extLst>
+          </p:cNvPr>
+          <p:cNvSpPr/>
+          <p:nvPr/>
+        </p:nvSpPr>
+        <p:spPr>
+          <a:xfrm>
+            <a:off x="7388352" y="4718304"/>
+            <a:ext cx="109728" cy="210312"/>
           </a:xfrm>
           <a:prstGeom prst="rect">
             <a:avLst/>
@@ -2594,640 +3357,57 @@
           <a:bodyPr wrap="square" lIns="0" tIns="0" rIns="0" bIns="0" rtlCol="0" anchor="ctr"/>
           <a:lstStyle/>
           <a:p>
-            <a:pPr marL="0" indent="0">
-              <a:buNone/>
-            </a:pPr>
-            <a:r>
-              <a:rPr lang="en-US" sz="1100" b="1" dirty="0">
-                <a:solidFill>
-                  <a:srgbClr val="8892A4"/>
-                </a:solidFill>
-                <a:latin typeface="Calibri" pitchFamily="34" charset="0"/>
-                <a:ea typeface="Calibri" pitchFamily="34" charset="-122"/>
-                <a:cs typeface="Calibri" pitchFamily="34" charset="-120"/>
-              </a:rPr>
-              <a:t>Float32 (Keras)</a:t>
-            </a:r>
-            <a:endParaRPr lang="en-US" sz="1100" dirty="0"/>
-          </a:p>
-        </p:txBody>
-      </p:sp>
-      <p:sp>
-        <p:nvSpPr>
-          <p:cNvPr id="21" name="Text 19"/>
-          <p:cNvSpPr/>
-          <p:nvPr/>
-        </p:nvSpPr>
-        <p:spPr>
-          <a:xfrm>
-            <a:off x="4663440" y="2834640"/>
-            <a:ext cx="2103120" cy="256032"/>
-          </a:xfrm>
-          <a:prstGeom prst="rect">
-            <a:avLst/>
-          </a:prstGeom>
-          <a:noFill/>
-          <a:ln/>
-        </p:spPr>
-        <p:txBody>
-          <a:bodyPr wrap="square" lIns="0" tIns="0" rIns="0" bIns="0" rtlCol="0" anchor="ctr"/>
-          <a:lstStyle/>
-          <a:p>
-            <a:pPr marL="0" indent="0">
-              <a:buNone/>
-            </a:pPr>
-            <a:r>
-              <a:rPr lang="en-US" sz="1100" b="1" dirty="0">
-                <a:solidFill>
-                  <a:srgbClr val="8892A4"/>
-                </a:solidFill>
-                <a:latin typeface="Calibri" pitchFamily="34" charset="0"/>
-                <a:ea typeface="Calibri" pitchFamily="34" charset="-122"/>
-                <a:cs typeface="Calibri" pitchFamily="34" charset="-120"/>
-              </a:rPr>
-              <a:t>INT8 (TFLite)</a:t>
-            </a:r>
-            <a:endParaRPr lang="en-US" sz="1100" dirty="0"/>
-          </a:p>
-        </p:txBody>
-      </p:sp>
-      <p:sp>
-        <p:nvSpPr>
-          <p:cNvPr id="22" name="Text 20"/>
-          <p:cNvSpPr/>
-          <p:nvPr/>
-        </p:nvSpPr>
-        <p:spPr>
-          <a:xfrm>
-            <a:off x="6949440" y="2834640"/>
-            <a:ext cx="1645920" cy="256032"/>
-          </a:xfrm>
-          <a:prstGeom prst="rect">
-            <a:avLst/>
-          </a:prstGeom>
-          <a:noFill/>
-          <a:ln/>
-        </p:spPr>
-        <p:txBody>
-          <a:bodyPr wrap="square" lIns="0" tIns="0" rIns="0" bIns="0" rtlCol="0" anchor="ctr"/>
-          <a:lstStyle/>
-          <a:p>
-            <a:pPr marL="0" indent="0">
-              <a:buNone/>
-            </a:pPr>
-            <a:r>
-              <a:rPr lang="en-US" sz="1100" b="1" dirty="0">
-                <a:solidFill>
-                  <a:srgbClr val="8892A4"/>
-                </a:solidFill>
-                <a:latin typeface="Calibri" pitchFamily="34" charset="0"/>
-                <a:ea typeface="Calibri" pitchFamily="34" charset="-122"/>
-                <a:cs typeface="Calibri" pitchFamily="34" charset="-120"/>
-              </a:rPr>
-              <a:t>Change</a:t>
-            </a:r>
-            <a:endParaRPr lang="en-US" sz="1100" dirty="0"/>
-          </a:p>
-        </p:txBody>
-      </p:sp>
-      <p:sp>
-        <p:nvSpPr>
-          <p:cNvPr id="23" name="Shape 21"/>
-          <p:cNvSpPr/>
-          <p:nvPr/>
-        </p:nvSpPr>
-        <p:spPr>
-          <a:xfrm>
-            <a:off x="502920" y="3108960"/>
-            <a:ext cx="8138160" cy="0"/>
-          </a:xfrm>
-          <a:prstGeom prst="line">
-            <a:avLst/>
-          </a:prstGeom>
-          <a:noFill/>
-          <a:ln w="12700">
-            <a:solidFill>
-              <a:srgbClr val="4A5568"/>
-            </a:solidFill>
-            <a:prstDash val="solid"/>
-          </a:ln>
-        </p:spPr>
-        <p:txBody>
-          <a:bodyPr/>
-          <a:lstStyle/>
-          <a:p>
-            <a:endParaRPr lang="en-KR"/>
-          </a:p>
-        </p:txBody>
-      </p:sp>
-      <p:sp>
-        <p:nvSpPr>
-          <p:cNvPr id="24" name="Text 22"/>
-          <p:cNvSpPr/>
-          <p:nvPr/>
-        </p:nvSpPr>
-        <p:spPr>
-          <a:xfrm>
-            <a:off x="502920" y="3200400"/>
-            <a:ext cx="1737360" cy="274320"/>
-          </a:xfrm>
-          <a:prstGeom prst="rect">
-            <a:avLst/>
-          </a:prstGeom>
-          <a:noFill/>
-          <a:ln/>
-        </p:spPr>
-        <p:txBody>
-          <a:bodyPr wrap="square" lIns="0" tIns="0" rIns="0" bIns="0" rtlCol="0" anchor="ctr"/>
-          <a:lstStyle/>
-          <a:p>
-            <a:pPr marL="0" indent="0">
-              <a:buNone/>
-            </a:pPr>
-            <a:r>
-              <a:rPr lang="en-US" sz="1200" dirty="0">
-                <a:solidFill>
-                  <a:srgbClr val="E8EAF0"/>
-                </a:solidFill>
-                <a:latin typeface="Calibri" pitchFamily="34" charset="0"/>
-                <a:ea typeface="Calibri" pitchFamily="34" charset="-122"/>
-                <a:cs typeface="Calibri" pitchFamily="34" charset="-120"/>
-              </a:rPr>
-              <a:t>Val Accuracy</a:t>
-            </a:r>
-            <a:endParaRPr lang="en-US" sz="1200" dirty="0"/>
-          </a:p>
-        </p:txBody>
-      </p:sp>
-      <p:sp>
-        <p:nvSpPr>
-          <p:cNvPr id="25" name="Text 23"/>
-          <p:cNvSpPr/>
-          <p:nvPr/>
-        </p:nvSpPr>
-        <p:spPr>
-          <a:xfrm>
-            <a:off x="2377440" y="3200400"/>
-            <a:ext cx="2103120" cy="274320"/>
-          </a:xfrm>
-          <a:prstGeom prst="rect">
-            <a:avLst/>
-          </a:prstGeom>
-          <a:noFill/>
-          <a:ln/>
-        </p:spPr>
-        <p:txBody>
-          <a:bodyPr wrap="square" lIns="0" tIns="0" rIns="0" bIns="0" rtlCol="0" anchor="ctr"/>
-          <a:lstStyle/>
-          <a:p>
-            <a:pPr marL="0" indent="0">
-              <a:buNone/>
-            </a:pPr>
-            <a:r>
-              <a:rPr lang="en-US" sz="1200" dirty="0">
-                <a:solidFill>
-                  <a:srgbClr val="E8EAF0"/>
-                </a:solidFill>
-                <a:latin typeface="Calibri" pitchFamily="34" charset="0"/>
-                <a:ea typeface="Calibri" pitchFamily="34" charset="-122"/>
-                <a:cs typeface="Calibri" pitchFamily="34" charset="-120"/>
-              </a:rPr>
-              <a:t>100.0%</a:t>
-            </a:r>
-            <a:endParaRPr lang="en-US" sz="1200" dirty="0"/>
-          </a:p>
-        </p:txBody>
-      </p:sp>
-      <p:sp>
-        <p:nvSpPr>
-          <p:cNvPr id="26" name="Text 24"/>
-          <p:cNvSpPr/>
-          <p:nvPr/>
-        </p:nvSpPr>
-        <p:spPr>
-          <a:xfrm>
-            <a:off x="4663440" y="3200400"/>
-            <a:ext cx="2103120" cy="274320"/>
-          </a:xfrm>
-          <a:prstGeom prst="rect">
-            <a:avLst/>
-          </a:prstGeom>
-          <a:noFill/>
-          <a:ln/>
-        </p:spPr>
-        <p:txBody>
-          <a:bodyPr wrap="square" lIns="0" tIns="0" rIns="0" bIns="0" rtlCol="0" anchor="ctr"/>
-          <a:lstStyle/>
-          <a:p>
-            <a:pPr marL="0" indent="0">
-              <a:buNone/>
-            </a:pPr>
-            <a:r>
-              <a:rPr lang="en-US" sz="1200" dirty="0">
-                <a:solidFill>
-                  <a:srgbClr val="E8EAF0"/>
-                </a:solidFill>
-                <a:latin typeface="Calibri" pitchFamily="34" charset="0"/>
-                <a:ea typeface="Calibri" pitchFamily="34" charset="-122"/>
-                <a:cs typeface="Calibri" pitchFamily="34" charset="-120"/>
-              </a:rPr>
-              <a:t>99.7%</a:t>
-            </a:r>
-            <a:endParaRPr lang="en-US" sz="1200" dirty="0"/>
-          </a:p>
-        </p:txBody>
-      </p:sp>
-      <p:sp>
-        <p:nvSpPr>
-          <p:cNvPr id="27" name="Text 25"/>
-          <p:cNvSpPr/>
-          <p:nvPr/>
-        </p:nvSpPr>
-        <p:spPr>
-          <a:xfrm>
-            <a:off x="6949440" y="3200400"/>
-            <a:ext cx="1645920" cy="274320"/>
-          </a:xfrm>
-          <a:prstGeom prst="rect">
-            <a:avLst/>
-          </a:prstGeom>
-          <a:noFill/>
-          <a:ln/>
-        </p:spPr>
-        <p:txBody>
-          <a:bodyPr wrap="square" lIns="0" tIns="0" rIns="0" bIns="0" rtlCol="0" anchor="ctr"/>
-          <a:lstStyle/>
-          <a:p>
-            <a:pPr marL="0" indent="0">
-              <a:buNone/>
-            </a:pPr>
-            <a:r>
-              <a:rPr lang="en-US" sz="1200" b="1" dirty="0">
-                <a:solidFill>
-                  <a:srgbClr val="E53935"/>
-                </a:solidFill>
-                <a:latin typeface="Calibri" pitchFamily="34" charset="0"/>
-                <a:ea typeface="Calibri" pitchFamily="34" charset="-122"/>
-                <a:cs typeface="Calibri" pitchFamily="34" charset="-120"/>
-              </a:rPr>
-              <a:t>−0.3%</a:t>
-            </a:r>
-            <a:endParaRPr lang="en-US" sz="1200" dirty="0"/>
-          </a:p>
-        </p:txBody>
-      </p:sp>
-      <p:sp>
-        <p:nvSpPr>
-          <p:cNvPr id="28" name="Text 26"/>
-          <p:cNvSpPr/>
-          <p:nvPr/>
-        </p:nvSpPr>
-        <p:spPr>
-          <a:xfrm>
-            <a:off x="502920" y="3547872"/>
-            <a:ext cx="1737360" cy="274320"/>
-          </a:xfrm>
-          <a:prstGeom prst="rect">
-            <a:avLst/>
-          </a:prstGeom>
-          <a:noFill/>
-          <a:ln/>
-        </p:spPr>
-        <p:txBody>
-          <a:bodyPr wrap="square" lIns="0" tIns="0" rIns="0" bIns="0" rtlCol="0" anchor="ctr"/>
-          <a:lstStyle/>
-          <a:p>
-            <a:pPr marL="0" indent="0">
-              <a:buNone/>
-            </a:pPr>
-            <a:r>
-              <a:rPr lang="en-US" sz="1200" dirty="0">
-                <a:solidFill>
-                  <a:srgbClr val="E8EAF0"/>
-                </a:solidFill>
-                <a:latin typeface="Calibri" pitchFamily="34" charset="0"/>
-                <a:ea typeface="Calibri" pitchFamily="34" charset="-122"/>
-                <a:cs typeface="Calibri" pitchFamily="34" charset="-120"/>
-              </a:rPr>
-              <a:t>Model Size</a:t>
-            </a:r>
-            <a:endParaRPr lang="en-US" sz="1200" dirty="0"/>
-          </a:p>
-        </p:txBody>
-      </p:sp>
-      <p:sp>
-        <p:nvSpPr>
-          <p:cNvPr id="29" name="Text 27"/>
-          <p:cNvSpPr/>
-          <p:nvPr/>
-        </p:nvSpPr>
-        <p:spPr>
-          <a:xfrm>
-            <a:off x="2377440" y="3547872"/>
-            <a:ext cx="2103120" cy="274320"/>
-          </a:xfrm>
-          <a:prstGeom prst="rect">
-            <a:avLst/>
-          </a:prstGeom>
-          <a:noFill/>
-          <a:ln/>
-        </p:spPr>
-        <p:txBody>
-          <a:bodyPr wrap="square" lIns="0" tIns="0" rIns="0" bIns="0" rtlCol="0" anchor="ctr"/>
-          <a:lstStyle/>
-          <a:p>
-            <a:pPr marL="0" indent="0">
-              <a:buNone/>
-            </a:pPr>
-            <a:r>
-              <a:rPr lang="en-US" sz="1200" dirty="0">
-                <a:solidFill>
-                  <a:srgbClr val="E8EAF0"/>
-                </a:solidFill>
-                <a:latin typeface="Calibri" pitchFamily="34" charset="0"/>
-                <a:ea typeface="Calibri" pitchFamily="34" charset="-122"/>
-                <a:cs typeface="Calibri" pitchFamily="34" charset="-120"/>
-              </a:rPr>
-              <a:t>~400KB</a:t>
-            </a:r>
-            <a:endParaRPr lang="en-US" sz="1200" dirty="0"/>
-          </a:p>
-        </p:txBody>
-      </p:sp>
-      <p:sp>
-        <p:nvSpPr>
-          <p:cNvPr id="30" name="Text 28"/>
-          <p:cNvSpPr/>
-          <p:nvPr/>
-        </p:nvSpPr>
-        <p:spPr>
-          <a:xfrm>
-            <a:off x="4663440" y="3547872"/>
-            <a:ext cx="2103120" cy="274320"/>
-          </a:xfrm>
-          <a:prstGeom prst="rect">
-            <a:avLst/>
-          </a:prstGeom>
-          <a:noFill/>
-          <a:ln/>
-        </p:spPr>
-        <p:txBody>
-          <a:bodyPr wrap="square" lIns="0" tIns="0" rIns="0" bIns="0" rtlCol="0" anchor="ctr"/>
-          <a:lstStyle/>
-          <a:p>
-            <a:pPr marL="0" indent="0">
-              <a:buNone/>
-            </a:pPr>
-            <a:r>
-              <a:rPr lang="en-US" sz="1200" dirty="0">
-                <a:solidFill>
-                  <a:srgbClr val="E8EAF0"/>
-                </a:solidFill>
-                <a:latin typeface="Calibri" pitchFamily="34" charset="0"/>
-                <a:ea typeface="Calibri" pitchFamily="34" charset="-122"/>
-                <a:cs typeface="Calibri" pitchFamily="34" charset="-120"/>
-              </a:rPr>
-              <a:t>~110KB</a:t>
-            </a:r>
-            <a:endParaRPr lang="en-US" sz="1200" dirty="0"/>
-          </a:p>
-        </p:txBody>
-      </p:sp>
-      <p:sp>
-        <p:nvSpPr>
-          <p:cNvPr id="31" name="Text 29"/>
-          <p:cNvSpPr/>
-          <p:nvPr/>
-        </p:nvSpPr>
-        <p:spPr>
-          <a:xfrm>
-            <a:off x="6949440" y="3547872"/>
-            <a:ext cx="1645920" cy="274320"/>
-          </a:xfrm>
-          <a:prstGeom prst="rect">
-            <a:avLst/>
-          </a:prstGeom>
-          <a:noFill/>
-          <a:ln/>
-        </p:spPr>
-        <p:txBody>
-          <a:bodyPr wrap="square" lIns="0" tIns="0" rIns="0" bIns="0" rtlCol="0" anchor="ctr"/>
-          <a:lstStyle/>
-          <a:p>
-            <a:pPr marL="0" indent="0">
-              <a:buNone/>
-            </a:pPr>
-            <a:r>
-              <a:rPr lang="en-US" sz="1200" b="1" dirty="0">
-                <a:solidFill>
-                  <a:srgbClr val="43A047"/>
-                </a:solidFill>
-                <a:latin typeface="Calibri" pitchFamily="34" charset="0"/>
-                <a:ea typeface="Calibri" pitchFamily="34" charset="-122"/>
-                <a:cs typeface="Calibri" pitchFamily="34" charset="-120"/>
-              </a:rPr>
-              <a:t>−73%</a:t>
-            </a:r>
-            <a:endParaRPr lang="en-US" sz="1200" dirty="0"/>
-          </a:p>
-        </p:txBody>
-      </p:sp>
-      <p:sp>
-        <p:nvSpPr>
-          <p:cNvPr id="32" name="Text 30"/>
-          <p:cNvSpPr/>
-          <p:nvPr/>
-        </p:nvSpPr>
-        <p:spPr>
-          <a:xfrm>
-            <a:off x="502920" y="3895344"/>
-            <a:ext cx="1737360" cy="274320"/>
-          </a:xfrm>
-          <a:prstGeom prst="rect">
-            <a:avLst/>
-          </a:prstGeom>
-          <a:noFill/>
-          <a:ln/>
-        </p:spPr>
-        <p:txBody>
-          <a:bodyPr wrap="square" lIns="0" tIns="0" rIns="0" bIns="0" rtlCol="0" anchor="ctr"/>
-          <a:lstStyle/>
-          <a:p>
-            <a:pPr marL="0" indent="0">
-              <a:buNone/>
-            </a:pPr>
-            <a:r>
-              <a:rPr lang="en-US" sz="1200" dirty="0">
-                <a:solidFill>
-                  <a:srgbClr val="E8EAF0"/>
-                </a:solidFill>
-                <a:latin typeface="Calibri" pitchFamily="34" charset="0"/>
-                <a:ea typeface="Calibri" pitchFamily="34" charset="-122"/>
-                <a:cs typeface="Calibri" pitchFamily="34" charset="-120"/>
-              </a:rPr>
-              <a:t>Inference Speed</a:t>
-            </a:r>
-            <a:endParaRPr lang="en-US" sz="1200" dirty="0"/>
-          </a:p>
-        </p:txBody>
-      </p:sp>
-      <p:sp>
-        <p:nvSpPr>
-          <p:cNvPr id="33" name="Text 31"/>
-          <p:cNvSpPr/>
-          <p:nvPr/>
-        </p:nvSpPr>
-        <p:spPr>
-          <a:xfrm>
-            <a:off x="2377440" y="3895344"/>
-            <a:ext cx="2103120" cy="274320"/>
-          </a:xfrm>
-          <a:prstGeom prst="rect">
-            <a:avLst/>
-          </a:prstGeom>
-          <a:noFill/>
-          <a:ln/>
-        </p:spPr>
-        <p:txBody>
-          <a:bodyPr wrap="square" lIns="0" tIns="0" rIns="0" bIns="0" rtlCol="0" anchor="ctr"/>
-          <a:lstStyle/>
-          <a:p>
-            <a:pPr marL="0" indent="0">
-              <a:buNone/>
-            </a:pPr>
-            <a:r>
-              <a:rPr lang="en-US" sz="1200" dirty="0">
-                <a:solidFill>
-                  <a:srgbClr val="E8EAF0"/>
-                </a:solidFill>
-                <a:latin typeface="Calibri" pitchFamily="34" charset="0"/>
-                <a:ea typeface="Calibri" pitchFamily="34" charset="-122"/>
-                <a:cs typeface="Calibri" pitchFamily="34" charset="-120"/>
-              </a:rPr>
-              <a:t>~3ms</a:t>
-            </a:r>
-            <a:endParaRPr lang="en-US" sz="1200" dirty="0"/>
-          </a:p>
-        </p:txBody>
-      </p:sp>
-      <p:sp>
-        <p:nvSpPr>
-          <p:cNvPr id="34" name="Text 32"/>
-          <p:cNvSpPr/>
-          <p:nvPr/>
-        </p:nvSpPr>
-        <p:spPr>
-          <a:xfrm>
-            <a:off x="4663440" y="3895344"/>
-            <a:ext cx="2103120" cy="274320"/>
-          </a:xfrm>
-          <a:prstGeom prst="rect">
-            <a:avLst/>
-          </a:prstGeom>
-          <a:noFill/>
-          <a:ln/>
-        </p:spPr>
-        <p:txBody>
-          <a:bodyPr wrap="square" lIns="0" tIns="0" rIns="0" bIns="0" rtlCol="0" anchor="ctr"/>
-          <a:lstStyle/>
-          <a:p>
-            <a:pPr marL="0" indent="0">
-              <a:buNone/>
-            </a:pPr>
-            <a:r>
-              <a:rPr lang="en-US" sz="1200" dirty="0">
-                <a:solidFill>
-                  <a:srgbClr val="E8EAF0"/>
-                </a:solidFill>
-                <a:latin typeface="Calibri" pitchFamily="34" charset="0"/>
-                <a:ea typeface="Calibri" pitchFamily="34" charset="-122"/>
-                <a:cs typeface="Calibri" pitchFamily="34" charset="-120"/>
-              </a:rPr>
-              <a:t>~1ms</a:t>
-            </a:r>
-            <a:endParaRPr lang="en-US" sz="1200" dirty="0"/>
-          </a:p>
-        </p:txBody>
-      </p:sp>
-      <p:sp>
-        <p:nvSpPr>
-          <p:cNvPr id="35" name="Text 33"/>
-          <p:cNvSpPr/>
-          <p:nvPr/>
-        </p:nvSpPr>
-        <p:spPr>
-          <a:xfrm>
-            <a:off x="6949440" y="3895344"/>
-            <a:ext cx="1645920" cy="274320"/>
-          </a:xfrm>
-          <a:prstGeom prst="rect">
-            <a:avLst/>
-          </a:prstGeom>
-          <a:noFill/>
-          <a:ln/>
-        </p:spPr>
-        <p:txBody>
-          <a:bodyPr wrap="square" lIns="0" tIns="0" rIns="0" bIns="0" rtlCol="0" anchor="ctr"/>
-          <a:lstStyle/>
-          <a:p>
-            <a:pPr marL="0" indent="0">
-              <a:buNone/>
-            </a:pPr>
-            <a:r>
-              <a:rPr lang="en-US" sz="1200" b="1" dirty="0">
-                <a:solidFill>
-                  <a:srgbClr val="00ACC1"/>
-                </a:solidFill>
-                <a:latin typeface="Calibri" pitchFamily="34" charset="0"/>
-                <a:ea typeface="Calibri" pitchFamily="34" charset="-122"/>
-                <a:cs typeface="Calibri" pitchFamily="34" charset="-120"/>
-              </a:rPr>
-              <a:t>3× faster</a:t>
-            </a:r>
-            <a:endParaRPr lang="en-US" sz="1200" dirty="0"/>
-          </a:p>
-        </p:txBody>
-      </p:sp>
-      <p:sp>
-        <p:nvSpPr>
-          <p:cNvPr id="36" name="Text 34"/>
-          <p:cNvSpPr/>
-          <p:nvPr/>
-        </p:nvSpPr>
-        <p:spPr>
-          <a:xfrm>
-            <a:off x="365760" y="4572000"/>
-            <a:ext cx="8412480" cy="365760"/>
-          </a:xfrm>
-          <a:prstGeom prst="rect">
-            <a:avLst/>
-          </a:prstGeom>
-          <a:noFill/>
-          <a:ln/>
-        </p:spPr>
-        <p:txBody>
-          <a:bodyPr wrap="square" lIns="0" tIns="0" rIns="0" bIns="0" rtlCol="0" anchor="ctr"/>
-          <a:lstStyle/>
-          <a:p>
-            <a:pPr marL="0" indent="0">
-              <a:buNone/>
-            </a:pPr>
-            <a:r>
-              <a:rPr lang="en-US" sz="1000" i="1" dirty="0">
+            <a:pPr marL="0" indent="0" algn="ctr">
+              <a:buNone/>
+            </a:pPr>
+            <a:r>
+              <a:rPr lang="en-US" sz="1000" dirty="0">
                 <a:solidFill>
                   <a:srgbClr val="4A5568"/>
                 </a:solidFill>
-                <a:latin typeface="Calibri" pitchFamily="34" charset="0"/>
-                <a:ea typeface="Calibri" pitchFamily="34" charset="-122"/>
-                <a:cs typeface="Calibri" pitchFamily="34" charset="-120"/>
-              </a:rPr>
-              <a:t>Note: The 1D-CNN classifier achieved 100% val accuracy but failed in real-world deployment due to data quality issues (see Slide 5–6). The TFLite optimization pipeline is preserved for the thesis report.</a:t>
+              </a:rPr>
+              <a:t>·</a:t>
             </a:r>
             <a:endParaRPr lang="en-US" sz="1000" dirty="0"/>
           </a:p>
         </p:txBody>
       </p:sp>
+      <p:pic>
+        <p:nvPicPr>
+          <p:cNvPr id="11" name="Picture 10">
+            <a:extLst>
+              <a:ext uri="{FF2B5EF4-FFF2-40B4-BE49-F238E27FC236}">
+                <a16:creationId xmlns:a16="http://schemas.microsoft.com/office/drawing/2014/main" id="{09B3EE72-1FC4-1789-1616-BD3978B6916B}"/>
+              </a:ext>
+            </a:extLst>
+          </p:cNvPr>
+          <p:cNvPicPr>
+            <a:picLocks noChangeAspect="1"/>
+          </p:cNvPicPr>
+          <p:nvPr/>
+        </p:nvPicPr>
+        <p:blipFill>
+          <a:blip r:embed="rId3"/>
+          <a:stretch>
+            <a:fillRect/>
+          </a:stretch>
+        </p:blipFill>
+        <p:spPr>
+          <a:xfrm>
+            <a:off x="419430" y="1387435"/>
+            <a:ext cx="3824579" cy="3330869"/>
+          </a:xfrm>
+          <a:prstGeom prst="rect">
+            <a:avLst/>
+          </a:prstGeom>
+        </p:spPr>
+      </p:pic>
     </p:spTree>
+    <p:extLst>
+      <p:ext uri="{BB962C8B-B14F-4D97-AF65-F5344CB8AC3E}">
+        <p14:creationId xmlns:p14="http://schemas.microsoft.com/office/powerpoint/2010/main" val="3847908393"/>
+      </p:ext>
+    </p:extLst>
   </p:cSld>
   <p:clrMapOvr>
     <a:masterClrMapping/>
@@ -3235,7 +3415,7 @@
 </p:sld>
 </file>
 
-<file path=ppt/slides/slide11.xml><?xml version="1.0" encoding="utf-8"?>
+<file path=ppt/slides/slide12.xml><?xml version="1.0" encoding="utf-8"?>
 <p:sld xmlns:a="http://schemas.openxmlformats.org/drawingml/2006/main" xmlns:r="http://schemas.openxmlformats.org/officeDocument/2006/relationships" xmlns:p="http://schemas.openxmlformats.org/presentationml/2006/main">
   <p:cSld name="Slide 11">
     <p:bg>
@@ -3417,7 +3597,7 @@
         </p:nvSpPr>
         <p:spPr>
           <a:xfrm>
-            <a:off x="502920" y="1371600"/>
+            <a:off x="502920" y="1187524"/>
             <a:ext cx="3657600" cy="2921508"/>
           </a:xfrm>
           <a:prstGeom prst="rect">
@@ -3443,7 +3623,7 @@
                 <a:ea typeface="Calibri" pitchFamily="34" charset="-122"/>
                 <a:cs typeface="Calibri" pitchFamily="34" charset="-120"/>
               </a:rPr>
-              <a:t>Monocular camera cannot capture depth (z-axis) — makes uppercut indistinguishable from idle</a:t>
+              <a:t>Monocular camera cannot capture depth (z-axis)</a:t>
             </a:r>
             <a:endParaRPr lang="en-US" sz="1300" dirty="0"/>
           </a:p>
@@ -3479,7 +3659,7 @@
                 <a:ea typeface="Calibri" pitchFamily="34" charset="-122"/>
                 <a:cs typeface="Calibri" pitchFamily="34" charset="-120"/>
               </a:rPr>
-              <a:t>~1–2s analysis latency after session ends</a:t>
+              <a:t>No combo detection (e.g., jab-cross sequence)</a:t>
             </a:r>
             <a:endParaRPr lang="en-US" sz="1300" dirty="0"/>
           </a:p>
@@ -3497,25 +3677,7 @@
                 <a:ea typeface="Calibri" pitchFamily="34" charset="-122"/>
                 <a:cs typeface="Calibri" pitchFamily="34" charset="-120"/>
               </a:rPr>
-              <a:t>No combo detection (e.g., jab-cross sequence)</a:t>
-            </a:r>
-            <a:endParaRPr lang="en-US" sz="1300" dirty="0"/>
-          </a:p>
-          <a:p>
-            <a:pPr marL="342900" indent="-342900">
-              <a:buSzPct val="100000"/>
-              <a:buChar char="•"/>
-            </a:pPr>
-            <a:r>
-              <a:rPr lang="en-US" sz="1500" dirty="0">
-                <a:solidFill>
-                  <a:srgbClr val="E8EAF0"/>
-                </a:solidFill>
-                <a:latin typeface="Calibri" pitchFamily="34" charset="0"/>
-                <a:ea typeface="Calibri" pitchFamily="34" charset="-122"/>
-                <a:cs typeface="Calibri" pitchFamily="34" charset="-120"/>
-              </a:rPr>
-              <a:t>Uppercut excluded due to depth limitation</a:t>
+              <a:t>Uppercut excluded due to technical limitation</a:t>
             </a:r>
             <a:endParaRPr lang="en-US" sz="1300" dirty="0"/>
           </a:p>
@@ -3556,7 +3718,7 @@
           <a:bodyPr/>
           <a:lstStyle/>
           <a:p>
-            <a:endParaRPr lang="en-KR"/>
+            <a:endParaRPr lang="en-KR" dirty="0"/>
           </a:p>
         </p:txBody>
       </p:sp>
@@ -3607,7 +3769,7 @@
         </p:nvSpPr>
         <p:spPr>
           <a:xfrm>
-            <a:off x="4800600" y="1371600"/>
+            <a:off x="4800600" y="1232154"/>
             <a:ext cx="3749040" cy="3200400"/>
           </a:xfrm>
           <a:prstGeom prst="rect">
@@ -3719,9 +3881,9 @@
 </p:sld>
 </file>
 
-<file path=ppt/slides/slide12.xml><?xml version="1.0" encoding="utf-8"?>
+<file path=ppt/slides/slide13.xml><?xml version="1.0" encoding="utf-8"?>
 <p:sld xmlns:a="http://schemas.openxmlformats.org/drawingml/2006/main" xmlns:r="http://schemas.openxmlformats.org/officeDocument/2006/relationships" xmlns:p="http://schemas.openxmlformats.org/presentationml/2006/main">
-  <p:cSld name="Slide 12">
+  <p:cSld>
     <p:bg>
       <p:bgPr>
         <a:solidFill>
@@ -3732,7 +3894,13 @@
     </p:bg>
     <p:spTree>
       <p:nvGrpSpPr>
-        <p:cNvPr id="1" name=""/>
+        <p:cNvPr id="1" name="">
+          <a:extLst>
+            <a:ext uri="{FF2B5EF4-FFF2-40B4-BE49-F238E27FC236}">
+              <a16:creationId xmlns:a16="http://schemas.microsoft.com/office/drawing/2014/main" id="{B26CA9CA-2BFB-E568-B8B0-29D829FDE706}"/>
+            </a:ext>
+          </a:extLst>
+        </p:cNvPr>
         <p:cNvGrpSpPr/>
         <p:nvPr/>
       </p:nvGrpSpPr>
@@ -3746,14 +3914,65 @@
       </p:grpSpPr>
       <p:sp>
         <p:nvSpPr>
-          <p:cNvPr id="2" name="Shape 0"/>
-          <p:cNvSpPr/>
-          <p:nvPr/>
-        </p:nvSpPr>
-        <p:spPr>
-          <a:xfrm>
-            <a:off x="0" y="0"/>
-            <a:ext cx="73152" cy="5143500"/>
+          <p:cNvPr id="2" name="Text 0">
+            <a:extLst>
+              <a:ext uri="{FF2B5EF4-FFF2-40B4-BE49-F238E27FC236}">
+                <a16:creationId xmlns:a16="http://schemas.microsoft.com/office/drawing/2014/main" id="{97D9E85B-7A57-5058-73EB-2571518D9ECA}"/>
+              </a:ext>
+            </a:extLst>
+          </p:cNvPr>
+          <p:cNvSpPr/>
+          <p:nvPr/>
+        </p:nvSpPr>
+        <p:spPr>
+          <a:xfrm>
+            <a:off x="457200" y="320040"/>
+            <a:ext cx="8229600" cy="502920"/>
+          </a:xfrm>
+          <a:prstGeom prst="rect">
+            <a:avLst/>
+          </a:prstGeom>
+          <a:noFill/>
+          <a:ln/>
+        </p:spPr>
+        <p:txBody>
+          <a:bodyPr wrap="square" lIns="0" tIns="0" rIns="0" bIns="0" rtlCol="0" anchor="ctr"/>
+          <a:lstStyle/>
+          <a:p>
+            <a:pPr marL="0" indent="0" algn="l">
+              <a:buNone/>
+            </a:pPr>
+            <a:r>
+              <a:rPr lang="en-US" sz="2800" b="1" dirty="0">
+                <a:solidFill>
+                  <a:srgbClr val="FFFFFF"/>
+                </a:solidFill>
+                <a:latin typeface="Trebuchet MS" pitchFamily="34" charset="0"/>
+                <a:ea typeface="Trebuchet MS" pitchFamily="34" charset="-122"/>
+                <a:cs typeface="Trebuchet MS" pitchFamily="34" charset="-120"/>
+              </a:rPr>
+              <a:t>Demo</a:t>
+            </a:r>
+            <a:endParaRPr lang="en-US" sz="2800" dirty="0"/>
+          </a:p>
+        </p:txBody>
+      </p:sp>
+      <p:sp>
+        <p:nvSpPr>
+          <p:cNvPr id="3" name="Shape 1">
+            <a:extLst>
+              <a:ext uri="{FF2B5EF4-FFF2-40B4-BE49-F238E27FC236}">
+                <a16:creationId xmlns:a16="http://schemas.microsoft.com/office/drawing/2014/main" id="{87544AFE-5A95-B297-6710-735378A79070}"/>
+              </a:ext>
+            </a:extLst>
+          </p:cNvPr>
+          <p:cNvSpPr/>
+          <p:nvPr/>
+        </p:nvSpPr>
+        <p:spPr>
+          <a:xfrm>
+            <a:off x="457200" y="850392"/>
+            <a:ext cx="1097280" cy="36576"/>
           </a:xfrm>
           <a:prstGeom prst="rect">
             <a:avLst/>
@@ -3778,14 +3997,77 @@
       </p:sp>
       <p:sp>
         <p:nvSpPr>
-          <p:cNvPr id="3" name="Text 1"/>
-          <p:cNvSpPr/>
-          <p:nvPr/>
-        </p:nvSpPr>
-        <p:spPr>
-          <a:xfrm>
-            <a:off x="457200" y="640080"/>
-            <a:ext cx="8229600" cy="320040"/>
+          <p:cNvPr id="4" name="Shape 2">
+            <a:extLst>
+              <a:ext uri="{FF2B5EF4-FFF2-40B4-BE49-F238E27FC236}">
+                <a16:creationId xmlns:a16="http://schemas.microsoft.com/office/drawing/2014/main" id="{E60F86F2-0953-5EBD-11C6-9D0D3FD9F8F9}"/>
+              </a:ext>
+            </a:extLst>
+          </p:cNvPr>
+          <p:cNvSpPr/>
+          <p:nvPr/>
+        </p:nvSpPr>
+        <p:spPr>
+          <a:xfrm>
+            <a:off x="365760" y="1034468"/>
+            <a:ext cx="4023360" cy="3749040"/>
+          </a:xfrm>
+          <a:prstGeom prst="rect">
+            <a:avLst/>
+          </a:prstGeom>
+          <a:solidFill>
+            <a:srgbClr val="1C2236"/>
+          </a:solidFill>
+          <a:ln w="12700">
+            <a:solidFill>
+              <a:srgbClr val="252D42"/>
+            </a:solidFill>
+            <a:prstDash val="solid"/>
+          </a:ln>
+          <a:effectLst>
+            <a:outerShdw blurRad="101600" dist="25400" dir="8100000" algn="bl" rotWithShape="0">
+              <a:srgbClr val="000000">
+                <a:alpha val="25000"/>
+              </a:srgbClr>
+            </a:outerShdw>
+          </a:effectLst>
+        </p:spPr>
+        <p:txBody>
+          <a:bodyPr/>
+          <a:lstStyle/>
+          <a:p>
+            <a:endParaRPr lang="en-KR" dirty="0"/>
+          </a:p>
+          <a:p>
+            <a:endParaRPr lang="en-KR" dirty="0"/>
+          </a:p>
+          <a:p>
+            <a:endParaRPr lang="en-KR" dirty="0"/>
+          </a:p>
+          <a:p>
+            <a:endParaRPr lang="en-KR" dirty="0"/>
+          </a:p>
+          <a:p>
+            <a:endParaRPr lang="en-KR" dirty="0"/>
+          </a:p>
+        </p:txBody>
+      </p:sp>
+      <p:sp>
+        <p:nvSpPr>
+          <p:cNvPr id="5" name="Text 3">
+            <a:extLst>
+              <a:ext uri="{FF2B5EF4-FFF2-40B4-BE49-F238E27FC236}">
+                <a16:creationId xmlns:a16="http://schemas.microsoft.com/office/drawing/2014/main" id="{14A6D3EA-4A72-DF3B-7E7E-6F7402787411}"/>
+              </a:ext>
+            </a:extLst>
+          </p:cNvPr>
+          <p:cNvSpPr/>
+          <p:nvPr/>
+        </p:nvSpPr>
+        <p:spPr>
+          <a:xfrm>
+            <a:off x="731520" y="1098476"/>
+            <a:ext cx="3657600" cy="228600"/>
           </a:xfrm>
           <a:prstGeom prst="rect">
             <a:avLst/>
@@ -3797,34 +4079,134 @@
           <a:bodyPr wrap="square" lIns="0" tIns="0" rIns="0" bIns="0" rtlCol="0" anchor="ctr"/>
           <a:lstStyle/>
           <a:p>
-            <a:pPr marL="0" indent="0">
-              <a:buNone/>
-            </a:pPr>
-            <a:r>
-              <a:rPr lang="en-US" sz="1100" b="1" kern="0" spc="400" dirty="0">
-                <a:solidFill>
-                  <a:srgbClr val="E53935"/>
-                </a:solidFill>
-                <a:latin typeface="Calibri" pitchFamily="34" charset="0"/>
-                <a:ea typeface="Calibri" pitchFamily="34" charset="-122"/>
-                <a:cs typeface="Calibri" pitchFamily="34" charset="-120"/>
-              </a:rPr>
-              <a:t>CONCLUSION</a:t>
-            </a:r>
-            <a:endParaRPr lang="en-US" sz="1100" dirty="0"/>
-          </a:p>
-        </p:txBody>
-      </p:sp>
-      <p:sp>
-        <p:nvSpPr>
-          <p:cNvPr id="4" name="Text 2"/>
-          <p:cNvSpPr/>
-          <p:nvPr/>
-        </p:nvSpPr>
-        <p:spPr>
-          <a:xfrm>
-            <a:off x="457200" y="1005840"/>
-            <a:ext cx="7315200" cy="548640"/>
+            <a:r>
+              <a:rPr lang="en-US" sz="900" b="1" kern="0" spc="300" dirty="0">
+                <a:solidFill>
+                  <a:srgbClr val="43A047"/>
+                </a:solidFill>
+                <a:latin typeface="Calibri" pitchFamily="34" charset="0"/>
+                <a:ea typeface="Calibri" pitchFamily="34" charset="-122"/>
+                <a:cs typeface="Calibri" pitchFamily="34" charset="-120"/>
+              </a:rPr>
+              <a:t>ANDROID EMULATOR SCREEN CAPTURE</a:t>
+            </a:r>
+            <a:endParaRPr lang="en-US" sz="900" dirty="0"/>
+          </a:p>
+        </p:txBody>
+      </p:sp>
+      <p:sp>
+        <p:nvSpPr>
+          <p:cNvPr id="6" name="Text 4">
+            <a:extLst>
+              <a:ext uri="{FF2B5EF4-FFF2-40B4-BE49-F238E27FC236}">
+                <a16:creationId xmlns:a16="http://schemas.microsoft.com/office/drawing/2014/main" id="{3F0F962F-2618-FC32-6B60-553A82351757}"/>
+              </a:ext>
+            </a:extLst>
+          </p:cNvPr>
+          <p:cNvSpPr/>
+          <p:nvPr/>
+        </p:nvSpPr>
+        <p:spPr>
+          <a:xfrm>
+            <a:off x="502920" y="1187524"/>
+            <a:ext cx="3657600" cy="2921508"/>
+          </a:xfrm>
+          <a:prstGeom prst="rect">
+            <a:avLst/>
+          </a:prstGeom>
+          <a:noFill/>
+          <a:ln/>
+        </p:spPr>
+        <p:txBody>
+          <a:bodyPr wrap="square" rtlCol="0" anchor="ctr"/>
+          <a:lstStyle/>
+          <a:p>
+            <a:pPr>
+              <a:buSzPct val="100000"/>
+            </a:pPr>
+            <a:endParaRPr lang="en-US" sz="1300" dirty="0"/>
+          </a:p>
+        </p:txBody>
+      </p:sp>
+      <p:sp>
+        <p:nvSpPr>
+          <p:cNvPr id="7" name="Shape 5">
+            <a:extLst>
+              <a:ext uri="{FF2B5EF4-FFF2-40B4-BE49-F238E27FC236}">
+                <a16:creationId xmlns:a16="http://schemas.microsoft.com/office/drawing/2014/main" id="{7D9B9FB2-71ED-0C4C-FB6C-E7D94FD169E8}"/>
+              </a:ext>
+            </a:extLst>
+          </p:cNvPr>
+          <p:cNvSpPr/>
+          <p:nvPr/>
+        </p:nvSpPr>
+        <p:spPr>
+          <a:xfrm>
+            <a:off x="4663440" y="1051560"/>
+            <a:ext cx="4069080" cy="3749040"/>
+          </a:xfrm>
+          <a:prstGeom prst="rect">
+            <a:avLst/>
+          </a:prstGeom>
+          <a:solidFill>
+            <a:srgbClr val="1C2236"/>
+          </a:solidFill>
+          <a:ln w="12700">
+            <a:solidFill>
+              <a:srgbClr val="252D42"/>
+            </a:solidFill>
+            <a:prstDash val="solid"/>
+          </a:ln>
+          <a:effectLst>
+            <a:outerShdw blurRad="101600" dist="25400" dir="8100000" algn="bl" rotWithShape="0">
+              <a:srgbClr val="000000">
+                <a:alpha val="25000"/>
+              </a:srgbClr>
+            </a:outerShdw>
+          </a:effectLst>
+        </p:spPr>
+        <p:txBody>
+          <a:bodyPr/>
+          <a:lstStyle/>
+          <a:p>
+            <a:endParaRPr lang="en-US" dirty="0"/>
+          </a:p>
+          <a:p>
+            <a:endParaRPr lang="en-US" dirty="0"/>
+          </a:p>
+          <a:p>
+            <a:endParaRPr lang="en-US" dirty="0"/>
+          </a:p>
+          <a:p>
+            <a:endParaRPr lang="en-US" dirty="0"/>
+          </a:p>
+          <a:p>
+            <a:r>
+              <a:rPr lang="en-US" dirty="0">
+                <a:hlinkClick r:id="rId3"/>
+              </a:rPr>
+              <a:t>https://drive.google.com/file/d/1o1zmVS6h81l7k__KkR0bFJWW5xLQHLdO/view?usp=sharing</a:t>
+            </a:r>
+            <a:endParaRPr lang="en-US" dirty="0"/>
+          </a:p>
+        </p:txBody>
+      </p:sp>
+      <p:sp>
+        <p:nvSpPr>
+          <p:cNvPr id="8" name="Text 6">
+            <a:extLst>
+              <a:ext uri="{FF2B5EF4-FFF2-40B4-BE49-F238E27FC236}">
+                <a16:creationId xmlns:a16="http://schemas.microsoft.com/office/drawing/2014/main" id="{5EDA6F56-1472-FC69-F89E-885B886F4215}"/>
+              </a:ext>
+            </a:extLst>
+          </p:cNvPr>
+          <p:cNvSpPr/>
+          <p:nvPr/>
+        </p:nvSpPr>
+        <p:spPr>
+          <a:xfrm>
+            <a:off x="4800600" y="1143000"/>
+            <a:ext cx="3657600" cy="228600"/>
           </a:xfrm>
           <a:prstGeom prst="rect">
             <a:avLst/>
@@ -3836,34 +4218,181 @@
           <a:bodyPr wrap="square" lIns="0" tIns="0" rIns="0" bIns="0" rtlCol="0" anchor="ctr"/>
           <a:lstStyle/>
           <a:p>
-            <a:pPr marL="0" indent="0">
-              <a:buNone/>
-            </a:pPr>
-            <a:r>
-              <a:rPr lang="en-US" sz="3400" b="1" dirty="0">
-                <a:solidFill>
-                  <a:srgbClr val="FFFFFF"/>
-                </a:solidFill>
-                <a:latin typeface="Trebuchet MS" pitchFamily="34" charset="0"/>
-                <a:ea typeface="Trebuchet MS" pitchFamily="34" charset="-122"/>
-                <a:cs typeface="Trebuchet MS" pitchFamily="34" charset="-120"/>
-              </a:rPr>
-              <a:t>What We Built &amp; Learned</a:t>
-            </a:r>
-            <a:endParaRPr lang="en-US" sz="3400" dirty="0"/>
-          </a:p>
-        </p:txBody>
-      </p:sp>
-      <p:sp>
-        <p:nvSpPr>
-          <p:cNvPr id="5" name="Text 3"/>
-          <p:cNvSpPr/>
-          <p:nvPr/>
-        </p:nvSpPr>
-        <p:spPr>
-          <a:xfrm>
-            <a:off x="457200" y="1737360"/>
-            <a:ext cx="320040" cy="411480"/>
+            <a:pPr marL="0" indent="0" algn="l">
+              <a:buNone/>
+            </a:pPr>
+            <a:endParaRPr lang="en-US" sz="900" dirty="0"/>
+          </a:p>
+        </p:txBody>
+      </p:sp>
+      <p:sp>
+        <p:nvSpPr>
+          <p:cNvPr id="9" name="Text 7">
+            <a:extLst>
+              <a:ext uri="{FF2B5EF4-FFF2-40B4-BE49-F238E27FC236}">
+                <a16:creationId xmlns:a16="http://schemas.microsoft.com/office/drawing/2014/main" id="{6C54F381-88CD-3D6F-C760-792C201473BC}"/>
+              </a:ext>
+            </a:extLst>
+          </p:cNvPr>
+          <p:cNvSpPr/>
+          <p:nvPr/>
+        </p:nvSpPr>
+        <p:spPr>
+          <a:xfrm>
+            <a:off x="4800600" y="1232154"/>
+            <a:ext cx="3749040" cy="3200400"/>
+          </a:xfrm>
+          <a:prstGeom prst="rect">
+            <a:avLst/>
+          </a:prstGeom>
+          <a:noFill/>
+          <a:ln/>
+        </p:spPr>
+        <p:txBody>
+          <a:bodyPr wrap="square" rtlCol="0" anchor="ctr"/>
+          <a:lstStyle/>
+          <a:p>
+            <a:pPr marL="342900" indent="-342900">
+              <a:buSzPct val="100000"/>
+              <a:buChar char="•"/>
+            </a:pPr>
+            <a:endParaRPr lang="en-US" sz="1300" dirty="0"/>
+          </a:p>
+        </p:txBody>
+      </p:sp>
+      <p:pic>
+        <p:nvPicPr>
+          <p:cNvPr id="11" name="Picture 10">
+            <a:extLst>
+              <a:ext uri="{FF2B5EF4-FFF2-40B4-BE49-F238E27FC236}">
+                <a16:creationId xmlns:a16="http://schemas.microsoft.com/office/drawing/2014/main" id="{87218C6D-C88F-0764-C04C-125B8877B0FE}"/>
+              </a:ext>
+            </a:extLst>
+          </p:cNvPr>
+          <p:cNvPicPr>
+            <a:picLocks noChangeAspect="1"/>
+          </p:cNvPicPr>
+          <p:nvPr/>
+        </p:nvPicPr>
+        <p:blipFill>
+          <a:blip r:embed="rId4"/>
+          <a:stretch>
+            <a:fillRect/>
+          </a:stretch>
+        </p:blipFill>
+        <p:spPr>
+          <a:xfrm>
+            <a:off x="1161703" y="1327076"/>
+            <a:ext cx="2431473" cy="3456432"/>
+          </a:xfrm>
+          <a:prstGeom prst="rect">
+            <a:avLst/>
+          </a:prstGeom>
+        </p:spPr>
+      </p:pic>
+      <p:sp>
+        <p:nvSpPr>
+          <p:cNvPr id="14" name="TextBox 13">
+            <a:extLst>
+              <a:ext uri="{FF2B5EF4-FFF2-40B4-BE49-F238E27FC236}">
+                <a16:creationId xmlns:a16="http://schemas.microsoft.com/office/drawing/2014/main" id="{F2912D7C-7A03-5CD0-0A36-8D8AF3F2301C}"/>
+              </a:ext>
+            </a:extLst>
+          </p:cNvPr>
+          <p:cNvSpPr txBox="1"/>
+          <p:nvPr/>
+        </p:nvSpPr>
+        <p:spPr>
+          <a:xfrm>
+            <a:off x="5276503" y="1117854"/>
+            <a:ext cx="3730337" cy="228600"/>
+          </a:xfrm>
+          <a:prstGeom prst="rect">
+            <a:avLst/>
+          </a:prstGeom>
+          <a:noFill/>
+        </p:spPr>
+        <p:txBody>
+          <a:bodyPr wrap="square">
+            <a:spAutoFit/>
+          </a:bodyPr>
+          <a:lstStyle/>
+          <a:p>
+            <a:r>
+              <a:rPr lang="en-US" sz="900" b="1" kern="0" spc="300" dirty="0">
+                <a:solidFill>
+                  <a:srgbClr val="43A047"/>
+                </a:solidFill>
+                <a:latin typeface="Calibri" pitchFamily="34" charset="0"/>
+                <a:ea typeface="Calibri" pitchFamily="34" charset="-122"/>
+                <a:cs typeface="Calibri" pitchFamily="34" charset="-120"/>
+              </a:rPr>
+              <a:t>DEMO SHADOWBOX RECORDING</a:t>
+            </a:r>
+            <a:endParaRPr lang="en-US" sz="900" dirty="0"/>
+          </a:p>
+        </p:txBody>
+      </p:sp>
+    </p:spTree>
+    <p:extLst>
+      <p:ext uri="{BB962C8B-B14F-4D97-AF65-F5344CB8AC3E}">
+        <p14:creationId xmlns:p14="http://schemas.microsoft.com/office/powerpoint/2010/main" val="1280854144"/>
+      </p:ext>
+    </p:extLst>
+  </p:cSld>
+  <p:clrMapOvr>
+    <a:masterClrMapping/>
+  </p:clrMapOvr>
+</p:sld>
+</file>
+
+<file path=ppt/slides/slide14.xml><?xml version="1.0" encoding="utf-8"?>
+<p:sld xmlns:a="http://schemas.openxmlformats.org/drawingml/2006/main" xmlns:r="http://schemas.openxmlformats.org/officeDocument/2006/relationships" xmlns:p="http://schemas.openxmlformats.org/presentationml/2006/main">
+  <p:cSld>
+    <p:bg>
+      <p:bgPr>
+        <a:solidFill>
+          <a:srgbClr val="0A0E1A"/>
+        </a:solidFill>
+        <a:effectLst/>
+      </p:bgPr>
+    </p:bg>
+    <p:spTree>
+      <p:nvGrpSpPr>
+        <p:cNvPr id="1" name="">
+          <a:extLst>
+            <a:ext uri="{FF2B5EF4-FFF2-40B4-BE49-F238E27FC236}">
+              <a16:creationId xmlns:a16="http://schemas.microsoft.com/office/drawing/2014/main" id="{459A9866-3CF9-B5C8-96F0-3F269169226E}"/>
+            </a:ext>
+          </a:extLst>
+        </p:cNvPr>
+        <p:cNvGrpSpPr/>
+        <p:nvPr/>
+      </p:nvGrpSpPr>
+      <p:grpSpPr>
+        <a:xfrm>
+          <a:off x="0" y="0"/>
+          <a:ext cx="0" cy="0"/>
+          <a:chOff x="0" y="0"/>
+          <a:chExt cx="0" cy="0"/>
+        </a:xfrm>
+      </p:grpSpPr>
+      <p:sp>
+        <p:nvSpPr>
+          <p:cNvPr id="2" name="Text 0">
+            <a:extLst>
+              <a:ext uri="{FF2B5EF4-FFF2-40B4-BE49-F238E27FC236}">
+                <a16:creationId xmlns:a16="http://schemas.microsoft.com/office/drawing/2014/main" id="{CD795106-A1FF-3BF7-C355-04FC5E95AE6D}"/>
+              </a:ext>
+            </a:extLst>
+          </p:cNvPr>
+          <p:cNvSpPr/>
+          <p:nvPr/>
+        </p:nvSpPr>
+        <p:spPr>
+          <a:xfrm>
+            <a:off x="457200" y="320040"/>
+            <a:ext cx="8229600" cy="502920"/>
           </a:xfrm>
           <a:prstGeom prst="rect">
             <a:avLst/>
@@ -3875,34 +4404,63 @@
           <a:bodyPr wrap="square" lIns="0" tIns="0" rIns="0" bIns="0" rtlCol="0" anchor="ctr"/>
           <a:lstStyle/>
           <a:p>
-            <a:pPr marL="0" indent="0">
-              <a:buNone/>
-            </a:pPr>
-            <a:r>
-              <a:rPr lang="en-US" sz="1600" b="1" dirty="0">
-                <a:solidFill>
-                  <a:srgbClr val="43A047"/>
-                </a:solidFill>
-                <a:latin typeface="Calibri" pitchFamily="34" charset="0"/>
-                <a:ea typeface="Calibri" pitchFamily="34" charset="-122"/>
-                <a:cs typeface="Calibri" pitchFamily="34" charset="-120"/>
-              </a:rPr>
-              <a:t>✓</a:t>
-            </a:r>
-            <a:endParaRPr lang="en-US" sz="1600" dirty="0"/>
-          </a:p>
-        </p:txBody>
-      </p:sp>
-      <p:sp>
-        <p:nvSpPr>
-          <p:cNvPr id="6" name="Text 4"/>
-          <p:cNvSpPr/>
-          <p:nvPr/>
-        </p:nvSpPr>
-        <p:spPr>
-          <a:xfrm>
-            <a:off x="868680" y="1737360"/>
-            <a:ext cx="7772400" cy="411480"/>
+            <a:pPr marL="0" indent="0" algn="l">
+              <a:buNone/>
+            </a:pPr>
+            <a:endParaRPr lang="en-US" sz="2800" dirty="0"/>
+          </a:p>
+        </p:txBody>
+      </p:sp>
+      <p:sp>
+        <p:nvSpPr>
+          <p:cNvPr id="6" name="Text 4">
+            <a:extLst>
+              <a:ext uri="{FF2B5EF4-FFF2-40B4-BE49-F238E27FC236}">
+                <a16:creationId xmlns:a16="http://schemas.microsoft.com/office/drawing/2014/main" id="{594A9438-6AE5-BE9C-54D0-EF8BA8A968CD}"/>
+              </a:ext>
+            </a:extLst>
+          </p:cNvPr>
+          <p:cNvSpPr/>
+          <p:nvPr/>
+        </p:nvSpPr>
+        <p:spPr>
+          <a:xfrm>
+            <a:off x="502920" y="1187524"/>
+            <a:ext cx="3657600" cy="2921508"/>
+          </a:xfrm>
+          <a:prstGeom prst="rect">
+            <a:avLst/>
+          </a:prstGeom>
+          <a:noFill/>
+          <a:ln/>
+        </p:spPr>
+        <p:txBody>
+          <a:bodyPr wrap="square" rtlCol="0" anchor="ctr"/>
+          <a:lstStyle/>
+          <a:p>
+            <a:pPr>
+              <a:buSzPct val="100000"/>
+            </a:pPr>
+            <a:endParaRPr lang="en-US" sz="1300" dirty="0"/>
+          </a:p>
+        </p:txBody>
+      </p:sp>
+      <p:sp>
+        <p:nvSpPr>
+          <p:cNvPr id="8" name="Text 6">
+            <a:extLst>
+              <a:ext uri="{FF2B5EF4-FFF2-40B4-BE49-F238E27FC236}">
+                <a16:creationId xmlns:a16="http://schemas.microsoft.com/office/drawing/2014/main" id="{40136980-2BAB-7F7D-A708-E72A7A969ACE}"/>
+              </a:ext>
+            </a:extLst>
+          </p:cNvPr>
+          <p:cNvSpPr/>
+          <p:nvPr/>
+        </p:nvSpPr>
+        <p:spPr>
+          <a:xfrm>
+            <a:off x="4800600" y="1143000"/>
+            <a:ext cx="3657600" cy="228600"/>
           </a:xfrm>
           <a:prstGeom prst="rect">
             <a:avLst/>
@@ -3914,376 +4472,114 @@
           <a:bodyPr wrap="square" lIns="0" tIns="0" rIns="0" bIns="0" rtlCol="0" anchor="ctr"/>
           <a:lstStyle/>
           <a:p>
-            <a:pPr marL="0" indent="0">
-              <a:buNone/>
-            </a:pPr>
-            <a:r>
-              <a:rPr lang="en-US" sz="1400" dirty="0">
-                <a:solidFill>
-                  <a:srgbClr val="E8EAF0"/>
-                </a:solidFill>
-                <a:latin typeface="Calibri" pitchFamily="34" charset="0"/>
-                <a:ea typeface="Calibri" pitchFamily="34" charset="-122"/>
-                <a:cs typeface="Calibri" pitchFamily="34" charset="-120"/>
-              </a:rPr>
-              <a:t>End-to-end Android app: CameraX → MoveNet → Claude API → Results screen</a:t>
-            </a:r>
-            <a:endParaRPr lang="en-US" sz="1400" dirty="0"/>
-          </a:p>
-        </p:txBody>
-      </p:sp>
-      <p:sp>
-        <p:nvSpPr>
-          <p:cNvPr id="7" name="Text 5"/>
-          <p:cNvSpPr/>
-          <p:nvPr/>
-        </p:nvSpPr>
-        <p:spPr>
-          <a:xfrm>
-            <a:off x="457200" y="2286000"/>
-            <a:ext cx="320040" cy="411480"/>
-          </a:xfrm>
-          <a:prstGeom prst="rect">
-            <a:avLst/>
-          </a:prstGeom>
-          <a:noFill/>
-          <a:ln/>
-        </p:spPr>
-        <p:txBody>
-          <a:bodyPr wrap="square" lIns="0" tIns="0" rIns="0" bIns="0" rtlCol="0" anchor="ctr"/>
-          <a:lstStyle/>
-          <a:p>
-            <a:pPr marL="0" indent="0">
-              <a:buNone/>
-            </a:pPr>
-            <a:r>
-              <a:rPr lang="en-US" sz="1600" b="1" dirty="0">
-                <a:solidFill>
-                  <a:srgbClr val="43A047"/>
-                </a:solidFill>
-                <a:latin typeface="Calibri" pitchFamily="34" charset="0"/>
-                <a:ea typeface="Calibri" pitchFamily="34" charset="-122"/>
-                <a:cs typeface="Calibri" pitchFamily="34" charset="-120"/>
-              </a:rPr>
-              <a:t>✓</a:t>
-            </a:r>
-            <a:endParaRPr lang="en-US" sz="1600" dirty="0"/>
-          </a:p>
-        </p:txBody>
-      </p:sp>
-      <p:sp>
-        <p:nvSpPr>
-          <p:cNvPr id="8" name="Text 6"/>
-          <p:cNvSpPr/>
-          <p:nvPr/>
-        </p:nvSpPr>
-        <p:spPr>
-          <a:xfrm>
-            <a:off x="868680" y="2286000"/>
-            <a:ext cx="7772400" cy="411480"/>
-          </a:xfrm>
-          <a:prstGeom prst="rect">
-            <a:avLst/>
-          </a:prstGeom>
-          <a:noFill/>
-          <a:ln/>
-        </p:spPr>
-        <p:txBody>
-          <a:bodyPr wrap="square" lIns="0" tIns="0" rIns="0" bIns="0" rtlCol="0" anchor="ctr"/>
-          <a:lstStyle/>
-          <a:p>
-            <a:pPr marL="0" indent="0">
-              <a:buNone/>
-            </a:pPr>
-            <a:r>
-              <a:rPr lang="en-US" sz="1400" dirty="0">
-                <a:solidFill>
-                  <a:srgbClr val="E8EAF0"/>
-                </a:solidFill>
-                <a:latin typeface="Calibri" pitchFamily="34" charset="0"/>
-                <a:ea typeface="Calibri" pitchFamily="34" charset="-122"/>
-                <a:cs typeface="Calibri" pitchFamily="34" charset="-120"/>
-              </a:rPr>
-              <a:t>MoveNet Lightning TFLite with INT8 quantization running at 30+ FPS on-device</a:t>
-            </a:r>
-            <a:endParaRPr lang="en-US" sz="1400" dirty="0"/>
-          </a:p>
-        </p:txBody>
-      </p:sp>
-      <p:sp>
-        <p:nvSpPr>
-          <p:cNvPr id="9" name="Text 7"/>
-          <p:cNvSpPr/>
-          <p:nvPr/>
-        </p:nvSpPr>
-        <p:spPr>
-          <a:xfrm>
-            <a:off x="457200" y="2834640"/>
-            <a:ext cx="320040" cy="411480"/>
-          </a:xfrm>
-          <a:prstGeom prst="rect">
-            <a:avLst/>
-          </a:prstGeom>
-          <a:noFill/>
-          <a:ln/>
-        </p:spPr>
-        <p:txBody>
-          <a:bodyPr wrap="square" lIns="0" tIns="0" rIns="0" bIns="0" rtlCol="0" anchor="ctr"/>
-          <a:lstStyle/>
-          <a:p>
-            <a:pPr marL="0" indent="0">
-              <a:buNone/>
-            </a:pPr>
-            <a:r>
-              <a:rPr lang="en-US" sz="1600" b="1" dirty="0">
-                <a:solidFill>
-                  <a:srgbClr val="00ACC1"/>
-                </a:solidFill>
-                <a:latin typeface="Calibri" pitchFamily="34" charset="0"/>
-                <a:ea typeface="Calibri" pitchFamily="34" charset="-122"/>
-                <a:cs typeface="Calibri" pitchFamily="34" charset="-120"/>
-              </a:rPr>
-              <a:t>✓</a:t>
-            </a:r>
-            <a:endParaRPr lang="en-US" sz="1600" dirty="0"/>
-          </a:p>
-        </p:txBody>
-      </p:sp>
-      <p:sp>
-        <p:nvSpPr>
-          <p:cNvPr id="10" name="Text 8"/>
-          <p:cNvSpPr/>
-          <p:nvPr/>
-        </p:nvSpPr>
-        <p:spPr>
-          <a:xfrm>
-            <a:off x="868680" y="2834640"/>
-            <a:ext cx="7772400" cy="411480"/>
-          </a:xfrm>
-          <a:prstGeom prst="rect">
-            <a:avLst/>
-          </a:prstGeom>
-          <a:noFill/>
-          <a:ln/>
-        </p:spPr>
-        <p:txBody>
-          <a:bodyPr wrap="square" lIns="0" tIns="0" rIns="0" bIns="0" rtlCol="0" anchor="ctr"/>
-          <a:lstStyle/>
-          <a:p>
-            <a:pPr marL="0" indent="0">
-              <a:buNone/>
-            </a:pPr>
-            <a:r>
-              <a:rPr lang="en-US" sz="1400" dirty="0">
-                <a:solidFill>
-                  <a:srgbClr val="E8EAF0"/>
-                </a:solidFill>
-                <a:latin typeface="Calibri" pitchFamily="34" charset="0"/>
-                <a:ea typeface="Calibri" pitchFamily="34" charset="-122"/>
-                <a:cs typeface="Calibri" pitchFamily="34" charset="-120"/>
-              </a:rPr>
-              <a:t>1D-CNN trained to 100% val accuracy — exposed real-world deployment challenges</a:t>
-            </a:r>
-            <a:endParaRPr lang="en-US" sz="1400" dirty="0"/>
-          </a:p>
-        </p:txBody>
-      </p:sp>
-      <p:sp>
-        <p:nvSpPr>
-          <p:cNvPr id="11" name="Text 9"/>
-          <p:cNvSpPr/>
-          <p:nvPr/>
-        </p:nvSpPr>
-        <p:spPr>
-          <a:xfrm>
-            <a:off x="457200" y="3383280"/>
-            <a:ext cx="320040" cy="411480"/>
-          </a:xfrm>
-          <a:prstGeom prst="rect">
-            <a:avLst/>
-          </a:prstGeom>
-          <a:noFill/>
-          <a:ln/>
-        </p:spPr>
-        <p:txBody>
-          <a:bodyPr wrap="square" lIns="0" tIns="0" rIns="0" bIns="0" rtlCol="0" anchor="ctr"/>
-          <a:lstStyle/>
-          <a:p>
-            <a:pPr marL="0" indent="0">
-              <a:buNone/>
-            </a:pPr>
-            <a:r>
-              <a:rPr lang="en-US" sz="1600" b="1" dirty="0">
-                <a:solidFill>
-                  <a:srgbClr val="FFB300"/>
-                </a:solidFill>
-                <a:latin typeface="Calibri" pitchFamily="34" charset="0"/>
-                <a:ea typeface="Calibri" pitchFamily="34" charset="-122"/>
-                <a:cs typeface="Calibri" pitchFamily="34" charset="-120"/>
-              </a:rPr>
-              <a:t>✓</a:t>
-            </a:r>
-            <a:endParaRPr lang="en-US" sz="1600" dirty="0"/>
-          </a:p>
-        </p:txBody>
-      </p:sp>
-      <p:sp>
-        <p:nvSpPr>
-          <p:cNvPr id="12" name="Text 10"/>
-          <p:cNvSpPr/>
-          <p:nvPr/>
-        </p:nvSpPr>
-        <p:spPr>
-          <a:xfrm>
-            <a:off x="868680" y="3383280"/>
-            <a:ext cx="7772400" cy="411480"/>
-          </a:xfrm>
-          <a:prstGeom prst="rect">
-            <a:avLst/>
-          </a:prstGeom>
-          <a:noFill/>
-          <a:ln/>
-        </p:spPr>
-        <p:txBody>
-          <a:bodyPr wrap="square" lIns="0" tIns="0" rIns="0" bIns="0" rtlCol="0" anchor="ctr"/>
-          <a:lstStyle/>
-          <a:p>
-            <a:pPr marL="0" indent="0">
-              <a:buNone/>
-            </a:pPr>
-            <a:r>
-              <a:rPr lang="en-US" sz="1400" dirty="0">
-                <a:solidFill>
-                  <a:srgbClr val="E8EAF0"/>
-                </a:solidFill>
-                <a:latin typeface="Calibri" pitchFamily="34" charset="0"/>
-                <a:ea typeface="Calibri" pitchFamily="34" charset="-122"/>
-                <a:cs typeface="Calibri" pitchFamily="34" charset="-120"/>
-              </a:rPr>
-              <a:t>LLM-based post-session analysis produces richer coaching than binary classification</a:t>
-            </a:r>
-            <a:endParaRPr lang="en-US" sz="1400" dirty="0"/>
-          </a:p>
-        </p:txBody>
-      </p:sp>
-      <p:sp>
-        <p:nvSpPr>
-          <p:cNvPr id="13" name="Text 11"/>
-          <p:cNvSpPr/>
-          <p:nvPr/>
-        </p:nvSpPr>
-        <p:spPr>
-          <a:xfrm>
-            <a:off x="457200" y="3931920"/>
-            <a:ext cx="320040" cy="411480"/>
-          </a:xfrm>
-          <a:prstGeom prst="rect">
-            <a:avLst/>
-          </a:prstGeom>
-          <a:noFill/>
-          <a:ln/>
-        </p:spPr>
-        <p:txBody>
-          <a:bodyPr wrap="square" lIns="0" tIns="0" rIns="0" bIns="0" rtlCol="0" anchor="ctr"/>
-          <a:lstStyle/>
-          <a:p>
-            <a:pPr marL="0" indent="0">
-              <a:buNone/>
-            </a:pPr>
-            <a:r>
-              <a:rPr lang="en-US" sz="1600" b="1" dirty="0">
-                <a:solidFill>
-                  <a:srgbClr val="8892A4"/>
-                </a:solidFill>
-                <a:latin typeface="Calibri" pitchFamily="34" charset="0"/>
-                <a:ea typeface="Calibri" pitchFamily="34" charset="-122"/>
-                <a:cs typeface="Calibri" pitchFamily="34" charset="-120"/>
-              </a:rPr>
-              <a:t>✓</a:t>
-            </a:r>
-            <a:endParaRPr lang="en-US" sz="1600" dirty="0"/>
-          </a:p>
-        </p:txBody>
-      </p:sp>
-      <p:sp>
-        <p:nvSpPr>
-          <p:cNvPr id="14" name="Text 12"/>
-          <p:cNvSpPr/>
-          <p:nvPr/>
-        </p:nvSpPr>
-        <p:spPr>
-          <a:xfrm>
-            <a:off x="868680" y="3931920"/>
-            <a:ext cx="7772400" cy="411480"/>
-          </a:xfrm>
-          <a:prstGeom prst="rect">
-            <a:avLst/>
-          </a:prstGeom>
-          <a:noFill/>
-          <a:ln/>
-        </p:spPr>
-        <p:txBody>
-          <a:bodyPr wrap="square" lIns="0" tIns="0" rIns="0" bIns="0" rtlCol="0" anchor="ctr"/>
-          <a:lstStyle/>
-          <a:p>
-            <a:pPr marL="0" indent="0">
-              <a:buNone/>
-            </a:pPr>
-            <a:r>
-              <a:rPr lang="en-US" sz="1400" dirty="0">
-                <a:solidFill>
-                  <a:srgbClr val="E8EAF0"/>
-                </a:solidFill>
-                <a:latin typeface="Calibri" pitchFamily="34" charset="0"/>
-                <a:ea typeface="Calibri" pitchFamily="34" charset="-122"/>
-                <a:cs typeface="Calibri" pitchFamily="34" charset="-120"/>
-              </a:rPr>
-              <a:t>Honest evaluation: depth ambiguity in monocular cameras is a fundamental limitation</a:t>
-            </a:r>
-            <a:endParaRPr lang="en-US" sz="1400" dirty="0"/>
-          </a:p>
-        </p:txBody>
-      </p:sp>
-      <p:sp>
-        <p:nvSpPr>
-          <p:cNvPr id="15" name="Text 13"/>
-          <p:cNvSpPr/>
-          <p:nvPr/>
-        </p:nvSpPr>
-        <p:spPr>
-          <a:xfrm>
-            <a:off x="457200" y="4663440"/>
-            <a:ext cx="8229600" cy="274320"/>
-          </a:xfrm>
-          <a:prstGeom prst="rect">
-            <a:avLst/>
-          </a:prstGeom>
-          <a:noFill/>
-          <a:ln/>
-        </p:spPr>
-        <p:txBody>
-          <a:bodyPr wrap="square" lIns="0" tIns="0" rIns="0" bIns="0" rtlCol="0" anchor="ctr"/>
-          <a:lstStyle/>
-          <a:p>
-            <a:pPr marL="0" indent="0">
-              <a:buNone/>
-            </a:pPr>
-            <a:r>
-              <a:rPr lang="en-US" sz="1100" i="1" dirty="0">
-                <a:solidFill>
-                  <a:srgbClr val="4A5568"/>
-                </a:solidFill>
-                <a:latin typeface="Calibri" pitchFamily="34" charset="0"/>
-                <a:ea typeface="Calibri" pitchFamily="34" charset="-122"/>
-                <a:cs typeface="Calibri" pitchFamily="34" charset="-120"/>
-              </a:rPr>
-              <a:t>Seoul National University · Mobile Computing · 2026</a:t>
-            </a:r>
-            <a:endParaRPr lang="en-US" sz="1100" dirty="0"/>
-          </a:p>
-        </p:txBody>
-      </p:sp>
+            <a:pPr marL="0" indent="0" algn="l">
+              <a:buNone/>
+            </a:pPr>
+            <a:endParaRPr lang="en-US" sz="900" dirty="0"/>
+          </a:p>
+        </p:txBody>
+      </p:sp>
+      <p:sp>
+        <p:nvSpPr>
+          <p:cNvPr id="9" name="Text 7">
+            <a:extLst>
+              <a:ext uri="{FF2B5EF4-FFF2-40B4-BE49-F238E27FC236}">
+                <a16:creationId xmlns:a16="http://schemas.microsoft.com/office/drawing/2014/main" id="{328B1D06-3292-B4A0-82E9-85B2CD346500}"/>
+              </a:ext>
+            </a:extLst>
+          </p:cNvPr>
+          <p:cNvSpPr/>
+          <p:nvPr/>
+        </p:nvSpPr>
+        <p:spPr>
+          <a:xfrm>
+            <a:off x="4800600" y="1232154"/>
+            <a:ext cx="3749040" cy="3200400"/>
+          </a:xfrm>
+          <a:prstGeom prst="rect">
+            <a:avLst/>
+          </a:prstGeom>
+          <a:noFill/>
+          <a:ln/>
+        </p:spPr>
+        <p:txBody>
+          <a:bodyPr wrap="square" rtlCol="0" anchor="ctr"/>
+          <a:lstStyle/>
+          <a:p>
+            <a:pPr marL="342900" indent="-342900">
+              <a:buSzPct val="100000"/>
+              <a:buChar char="•"/>
+            </a:pPr>
+            <a:endParaRPr lang="en-US" sz="1300" dirty="0"/>
+          </a:p>
+        </p:txBody>
+      </p:sp>
+      <p:pic>
+        <p:nvPicPr>
+          <p:cNvPr id="15" name="Picture 14">
+            <a:extLst>
+              <a:ext uri="{FF2B5EF4-FFF2-40B4-BE49-F238E27FC236}">
+                <a16:creationId xmlns:a16="http://schemas.microsoft.com/office/drawing/2014/main" id="{FA01529B-6D1F-5989-ACB4-310CE4CF9E5E}"/>
+              </a:ext>
+            </a:extLst>
+          </p:cNvPr>
+          <p:cNvPicPr>
+            <a:picLocks noChangeAspect="1"/>
+          </p:cNvPicPr>
+          <p:nvPr/>
+        </p:nvPicPr>
+        <p:blipFill>
+          <a:blip r:embed="rId3"/>
+          <a:stretch>
+            <a:fillRect/>
+          </a:stretch>
+        </p:blipFill>
+        <p:spPr>
+          <a:xfrm>
+            <a:off x="4905022" y="0"/>
+            <a:ext cx="2769182" cy="5143500"/>
+          </a:xfrm>
+          <a:prstGeom prst="rect">
+            <a:avLst/>
+          </a:prstGeom>
+        </p:spPr>
+      </p:pic>
+      <p:pic>
+        <p:nvPicPr>
+          <p:cNvPr id="17" name="Picture 16">
+            <a:extLst>
+              <a:ext uri="{FF2B5EF4-FFF2-40B4-BE49-F238E27FC236}">
+                <a16:creationId xmlns:a16="http://schemas.microsoft.com/office/drawing/2014/main" id="{8CF2A883-A1B3-079F-87FB-CE2CC9CFC68C}"/>
+              </a:ext>
+            </a:extLst>
+          </p:cNvPr>
+          <p:cNvPicPr>
+            <a:picLocks noChangeAspect="1"/>
+          </p:cNvPicPr>
+          <p:nvPr/>
+        </p:nvPicPr>
+        <p:blipFill>
+          <a:blip r:embed="rId4"/>
+          <a:stretch>
+            <a:fillRect/>
+          </a:stretch>
+        </p:blipFill>
+        <p:spPr>
+          <a:xfrm>
+            <a:off x="1377428" y="0"/>
+            <a:ext cx="2398523" cy="5143500"/>
+          </a:xfrm>
+          <a:prstGeom prst="rect">
+            <a:avLst/>
+          </a:prstGeom>
+        </p:spPr>
+      </p:pic>
     </p:spTree>
+    <p:extLst>
+      <p:ext uri="{BB962C8B-B14F-4D97-AF65-F5344CB8AC3E}">
+        <p14:creationId xmlns:p14="http://schemas.microsoft.com/office/powerpoint/2010/main" val="792865293"/>
+      </p:ext>
+    </p:extLst>
   </p:cSld>
   <p:clrMapOvr>
     <a:masterClrMapping/>
@@ -4627,7 +4923,7 @@
         </p:nvSpPr>
         <p:spPr>
           <a:xfrm>
-            <a:off x="4617720" y="1371600"/>
+            <a:off x="4663440" y="1257300"/>
             <a:ext cx="3931920" cy="2926080"/>
           </a:xfrm>
           <a:prstGeom prst="rect">
@@ -4671,9 +4967,8 @@
                 <a:ea typeface="Calibri" pitchFamily="34" charset="-122"/>
                 <a:cs typeface="Calibri" pitchFamily="34" charset="-120"/>
               </a:rPr>
-              <a:t>Run entirely on-device — no wearables, no internet required</a:t>
-            </a:r>
-            <a:endParaRPr lang="en-US" sz="1600" dirty="0"/>
+              <a:t>Run entirely on-device </a:t>
+            </a:r>
           </a:p>
           <a:p>
             <a:pPr marL="342900" indent="-342900">
@@ -4722,1328 +5017,6 @@
 </file>
 
 <file path=ppt/slides/slide3.xml><?xml version="1.0" encoding="utf-8"?>
-<p:sld xmlns:a="http://schemas.openxmlformats.org/drawingml/2006/main" xmlns:r="http://schemas.openxmlformats.org/officeDocument/2006/relationships" xmlns:p="http://schemas.openxmlformats.org/presentationml/2006/main">
-  <p:cSld name="Slide 3">
-    <p:bg>
-      <p:bgPr>
-        <a:solidFill>
-          <a:srgbClr val="0A0E1A"/>
-        </a:solidFill>
-        <a:effectLst/>
-      </p:bgPr>
-    </p:bg>
-    <p:spTree>
-      <p:nvGrpSpPr>
-        <p:cNvPr id="1" name=""/>
-        <p:cNvGrpSpPr/>
-        <p:nvPr/>
-      </p:nvGrpSpPr>
-      <p:grpSpPr>
-        <a:xfrm>
-          <a:off x="0" y="0"/>
-          <a:ext cx="0" cy="0"/>
-          <a:chOff x="0" y="0"/>
-          <a:chExt cx="0" cy="0"/>
-        </a:xfrm>
-      </p:grpSpPr>
-      <p:sp>
-        <p:nvSpPr>
-          <p:cNvPr id="2" name="Text 0"/>
-          <p:cNvSpPr/>
-          <p:nvPr/>
-        </p:nvSpPr>
-        <p:spPr>
-          <a:xfrm>
-            <a:off x="457200" y="320040"/>
-            <a:ext cx="8229600" cy="502920"/>
-          </a:xfrm>
-          <a:prstGeom prst="rect">
-            <a:avLst/>
-          </a:prstGeom>
-          <a:noFill/>
-          <a:ln/>
-        </p:spPr>
-        <p:txBody>
-          <a:bodyPr wrap="square" lIns="0" tIns="0" rIns="0" bIns="0" rtlCol="0" anchor="ctr"/>
-          <a:lstStyle/>
-          <a:p>
-            <a:pPr marL="0" indent="0" algn="l">
-              <a:buNone/>
-            </a:pPr>
-            <a:r>
-              <a:rPr lang="en-US" sz="2800" b="1" dirty="0">
-                <a:solidFill>
-                  <a:srgbClr val="FFFFFF"/>
-                </a:solidFill>
-                <a:latin typeface="Trebuchet MS" pitchFamily="34" charset="0"/>
-                <a:ea typeface="Trebuchet MS" pitchFamily="34" charset="-122"/>
-                <a:cs typeface="Trebuchet MS" pitchFamily="34" charset="-120"/>
-              </a:rPr>
-              <a:t>System Architecture</a:t>
-            </a:r>
-            <a:endParaRPr lang="en-US" sz="2800" dirty="0"/>
-          </a:p>
-        </p:txBody>
-      </p:sp>
-      <p:sp>
-        <p:nvSpPr>
-          <p:cNvPr id="3" name="Shape 1"/>
-          <p:cNvSpPr/>
-          <p:nvPr/>
-        </p:nvSpPr>
-        <p:spPr>
-          <a:xfrm>
-            <a:off x="457200" y="850392"/>
-            <a:ext cx="1097280" cy="36576"/>
-          </a:xfrm>
-          <a:prstGeom prst="rect">
-            <a:avLst/>
-          </a:prstGeom>
-          <a:solidFill>
-            <a:srgbClr val="E53935"/>
-          </a:solidFill>
-          <a:ln w="12700">
-            <a:solidFill>
-              <a:srgbClr val="E53935"/>
-            </a:solidFill>
-            <a:prstDash val="solid"/>
-          </a:ln>
-        </p:spPr>
-        <p:txBody>
-          <a:bodyPr/>
-          <a:lstStyle/>
-          <a:p>
-            <a:endParaRPr lang="en-KR"/>
-          </a:p>
-        </p:txBody>
-      </p:sp>
-      <p:sp>
-        <p:nvSpPr>
-          <p:cNvPr id="4" name="Shape 2"/>
-          <p:cNvSpPr/>
-          <p:nvPr/>
-        </p:nvSpPr>
-        <p:spPr>
-          <a:xfrm>
-            <a:off x="685800" y="1920240"/>
-            <a:ext cx="1371600" cy="1005840"/>
-          </a:xfrm>
-          <a:prstGeom prst="rect">
-            <a:avLst/>
-          </a:prstGeom>
-          <a:solidFill>
-            <a:srgbClr val="1C2236"/>
-          </a:solidFill>
-          <a:ln w="12700">
-            <a:solidFill>
-              <a:srgbClr val="252D42"/>
-            </a:solidFill>
-            <a:prstDash val="solid"/>
-          </a:ln>
-          <a:effectLst>
-            <a:outerShdw blurRad="101600" dist="25400" dir="8100000" algn="bl" rotWithShape="0">
-              <a:srgbClr val="000000">
-                <a:alpha val="25000"/>
-              </a:srgbClr>
-            </a:outerShdw>
-          </a:effectLst>
-        </p:spPr>
-        <p:txBody>
-          <a:bodyPr/>
-          <a:lstStyle/>
-          <a:p>
-            <a:endParaRPr lang="en-KR"/>
-          </a:p>
-        </p:txBody>
-      </p:sp>
-      <p:sp>
-        <p:nvSpPr>
-          <p:cNvPr id="5" name="Shape 3"/>
-          <p:cNvSpPr/>
-          <p:nvPr/>
-        </p:nvSpPr>
-        <p:spPr>
-          <a:xfrm>
-            <a:off x="685800" y="1920240"/>
-            <a:ext cx="1371600" cy="54864"/>
-          </a:xfrm>
-          <a:prstGeom prst="rect">
-            <a:avLst/>
-          </a:prstGeom>
-          <a:solidFill>
-            <a:srgbClr val="00ACC1"/>
-          </a:solidFill>
-          <a:ln w="12700">
-            <a:solidFill>
-              <a:srgbClr val="00ACC1"/>
-            </a:solidFill>
-            <a:prstDash val="solid"/>
-          </a:ln>
-        </p:spPr>
-        <p:txBody>
-          <a:bodyPr/>
-          <a:lstStyle/>
-          <a:p>
-            <a:endParaRPr lang="en-KR"/>
-          </a:p>
-        </p:txBody>
-      </p:sp>
-      <p:sp>
-        <p:nvSpPr>
-          <p:cNvPr id="6" name="Text 4"/>
-          <p:cNvSpPr/>
-          <p:nvPr/>
-        </p:nvSpPr>
-        <p:spPr>
-          <a:xfrm>
-            <a:off x="685800" y="2057400"/>
-            <a:ext cx="1371600" cy="731520"/>
-          </a:xfrm>
-          <a:prstGeom prst="rect">
-            <a:avLst/>
-          </a:prstGeom>
-          <a:noFill/>
-          <a:ln/>
-        </p:spPr>
-        <p:txBody>
-          <a:bodyPr wrap="square" lIns="0" tIns="0" rIns="0" bIns="0" rtlCol="0" anchor="ctr"/>
-          <a:lstStyle/>
-          <a:p>
-            <a:pPr marL="0" indent="0" algn="ctr">
-              <a:buNone/>
-            </a:pPr>
-            <a:r>
-              <a:rPr lang="en-US" sz="1300" b="1" dirty="0">
-                <a:solidFill>
-                  <a:srgbClr val="FFFFFF"/>
-                </a:solidFill>
-                <a:latin typeface="Calibri" pitchFamily="34" charset="0"/>
-                <a:ea typeface="Calibri" pitchFamily="34" charset="-122"/>
-                <a:cs typeface="Calibri" pitchFamily="34" charset="-120"/>
-              </a:rPr>
-              <a:t>Camera</a:t>
-            </a:r>
-            <a:endParaRPr lang="en-US" sz="1300" dirty="0"/>
-          </a:p>
-          <a:p>
-            <a:pPr marL="0" indent="0" algn="ctr">
-              <a:buNone/>
-            </a:pPr>
-            <a:r>
-              <a:rPr lang="en-US" sz="1300" b="1" dirty="0">
-                <a:solidFill>
-                  <a:srgbClr val="FFFFFF"/>
-                </a:solidFill>
-                <a:latin typeface="Calibri" pitchFamily="34" charset="0"/>
-                <a:ea typeface="Calibri" pitchFamily="34" charset="-122"/>
-                <a:cs typeface="Calibri" pitchFamily="34" charset="-120"/>
-              </a:rPr>
-              <a:t>(CameraX)</a:t>
-            </a:r>
-            <a:endParaRPr lang="en-US" sz="1300" dirty="0"/>
-          </a:p>
-        </p:txBody>
-      </p:sp>
-      <p:sp>
-        <p:nvSpPr>
-          <p:cNvPr id="7" name="Shape 5"/>
-          <p:cNvSpPr/>
-          <p:nvPr/>
-        </p:nvSpPr>
-        <p:spPr>
-          <a:xfrm>
-            <a:off x="2057400" y="2423160"/>
-            <a:ext cx="228600" cy="0"/>
-          </a:xfrm>
-          <a:prstGeom prst="line">
-            <a:avLst/>
-          </a:prstGeom>
-          <a:noFill/>
-          <a:ln w="25400">
-            <a:solidFill>
-              <a:srgbClr val="4A5568"/>
-            </a:solidFill>
-            <a:prstDash val="solid"/>
-          </a:ln>
-        </p:spPr>
-        <p:txBody>
-          <a:bodyPr/>
-          <a:lstStyle/>
-          <a:p>
-            <a:endParaRPr lang="en-KR"/>
-          </a:p>
-        </p:txBody>
-      </p:sp>
-      <p:sp>
-        <p:nvSpPr>
-          <p:cNvPr id="8" name="Text 6"/>
-          <p:cNvSpPr/>
-          <p:nvPr/>
-        </p:nvSpPr>
-        <p:spPr>
-          <a:xfrm>
-            <a:off x="2057400" y="2286000"/>
-            <a:ext cx="228600" cy="274320"/>
-          </a:xfrm>
-          <a:prstGeom prst="rect">
-            <a:avLst/>
-          </a:prstGeom>
-          <a:noFill/>
-          <a:ln/>
-        </p:spPr>
-        <p:txBody>
-          <a:bodyPr wrap="square" lIns="0" tIns="0" rIns="0" bIns="0" rtlCol="0" anchor="ctr"/>
-          <a:lstStyle/>
-          <a:p>
-            <a:pPr marL="0" indent="0" algn="ctr">
-              <a:buNone/>
-            </a:pPr>
-            <a:r>
-              <a:rPr lang="en-US" sz="1200" dirty="0">
-                <a:solidFill>
-                  <a:srgbClr val="8892A4"/>
-                </a:solidFill>
-              </a:rPr>
-              <a:t>→</a:t>
-            </a:r>
-            <a:endParaRPr lang="en-US" sz="1200" dirty="0"/>
-          </a:p>
-        </p:txBody>
-      </p:sp>
-      <p:sp>
-        <p:nvSpPr>
-          <p:cNvPr id="9" name="Shape 7"/>
-          <p:cNvSpPr/>
-          <p:nvPr/>
-        </p:nvSpPr>
-        <p:spPr>
-          <a:xfrm>
-            <a:off x="2286000" y="1920240"/>
-            <a:ext cx="1371600" cy="1005840"/>
-          </a:xfrm>
-          <a:prstGeom prst="rect">
-            <a:avLst/>
-          </a:prstGeom>
-          <a:solidFill>
-            <a:srgbClr val="1C2236"/>
-          </a:solidFill>
-          <a:ln w="12700">
-            <a:solidFill>
-              <a:srgbClr val="252D42"/>
-            </a:solidFill>
-            <a:prstDash val="solid"/>
-          </a:ln>
-          <a:effectLst>
-            <a:outerShdw blurRad="101600" dist="25400" dir="8100000" algn="bl" rotWithShape="0">
-              <a:srgbClr val="000000">
-                <a:alpha val="25000"/>
-              </a:srgbClr>
-            </a:outerShdw>
-          </a:effectLst>
-        </p:spPr>
-        <p:txBody>
-          <a:bodyPr/>
-          <a:lstStyle/>
-          <a:p>
-            <a:endParaRPr lang="en-KR"/>
-          </a:p>
-        </p:txBody>
-      </p:sp>
-      <p:sp>
-        <p:nvSpPr>
-          <p:cNvPr id="10" name="Shape 8"/>
-          <p:cNvSpPr/>
-          <p:nvPr/>
-        </p:nvSpPr>
-        <p:spPr>
-          <a:xfrm>
-            <a:off x="2286000" y="1920240"/>
-            <a:ext cx="1371600" cy="54864"/>
-          </a:xfrm>
-          <a:prstGeom prst="rect">
-            <a:avLst/>
-          </a:prstGeom>
-          <a:solidFill>
-            <a:srgbClr val="1565C0"/>
-          </a:solidFill>
-          <a:ln w="12700">
-            <a:solidFill>
-              <a:srgbClr val="1565C0"/>
-            </a:solidFill>
-            <a:prstDash val="solid"/>
-          </a:ln>
-        </p:spPr>
-        <p:txBody>
-          <a:bodyPr/>
-          <a:lstStyle/>
-          <a:p>
-            <a:endParaRPr lang="en-KR"/>
-          </a:p>
-        </p:txBody>
-      </p:sp>
-      <p:sp>
-        <p:nvSpPr>
-          <p:cNvPr id="11" name="Text 9"/>
-          <p:cNvSpPr/>
-          <p:nvPr/>
-        </p:nvSpPr>
-        <p:spPr>
-          <a:xfrm>
-            <a:off x="2286000" y="2057400"/>
-            <a:ext cx="1371600" cy="731520"/>
-          </a:xfrm>
-          <a:prstGeom prst="rect">
-            <a:avLst/>
-          </a:prstGeom>
-          <a:noFill/>
-          <a:ln/>
-        </p:spPr>
-        <p:txBody>
-          <a:bodyPr wrap="square" lIns="0" tIns="0" rIns="0" bIns="0" rtlCol="0" anchor="ctr"/>
-          <a:lstStyle/>
-          <a:p>
-            <a:pPr marL="0" indent="0" algn="ctr">
-              <a:buNone/>
-            </a:pPr>
-            <a:r>
-              <a:rPr lang="en-US" sz="1300" b="1" dirty="0">
-                <a:solidFill>
-                  <a:srgbClr val="FFFFFF"/>
-                </a:solidFill>
-                <a:latin typeface="Calibri" pitchFamily="34" charset="0"/>
-                <a:ea typeface="Calibri" pitchFamily="34" charset="-122"/>
-                <a:cs typeface="Calibri" pitchFamily="34" charset="-120"/>
-              </a:rPr>
-              <a:t>MoveNet</a:t>
-            </a:r>
-            <a:endParaRPr lang="en-US" sz="1300" dirty="0"/>
-          </a:p>
-          <a:p>
-            <a:pPr marL="0" indent="0" algn="ctr">
-              <a:buNone/>
-            </a:pPr>
-            <a:r>
-              <a:rPr lang="en-US" sz="1300" b="1" dirty="0">
-                <a:solidFill>
-                  <a:srgbClr val="FFFFFF"/>
-                </a:solidFill>
-                <a:latin typeface="Calibri" pitchFamily="34" charset="0"/>
-                <a:ea typeface="Calibri" pitchFamily="34" charset="-122"/>
-                <a:cs typeface="Calibri" pitchFamily="34" charset="-120"/>
-              </a:rPr>
-              <a:t>Lightning</a:t>
-            </a:r>
-            <a:endParaRPr lang="en-US" sz="1300" dirty="0"/>
-          </a:p>
-        </p:txBody>
-      </p:sp>
-      <p:sp>
-        <p:nvSpPr>
-          <p:cNvPr id="12" name="Shape 10"/>
-          <p:cNvSpPr/>
-          <p:nvPr/>
-        </p:nvSpPr>
-        <p:spPr>
-          <a:xfrm>
-            <a:off x="3657600" y="2423160"/>
-            <a:ext cx="228600" cy="0"/>
-          </a:xfrm>
-          <a:prstGeom prst="line">
-            <a:avLst/>
-          </a:prstGeom>
-          <a:noFill/>
-          <a:ln w="25400">
-            <a:solidFill>
-              <a:srgbClr val="4A5568"/>
-            </a:solidFill>
-            <a:prstDash val="solid"/>
-          </a:ln>
-        </p:spPr>
-        <p:txBody>
-          <a:bodyPr/>
-          <a:lstStyle/>
-          <a:p>
-            <a:endParaRPr lang="en-KR"/>
-          </a:p>
-        </p:txBody>
-      </p:sp>
-      <p:sp>
-        <p:nvSpPr>
-          <p:cNvPr id="13" name="Text 11"/>
-          <p:cNvSpPr/>
-          <p:nvPr/>
-        </p:nvSpPr>
-        <p:spPr>
-          <a:xfrm>
-            <a:off x="3657600" y="2286000"/>
-            <a:ext cx="228600" cy="274320"/>
-          </a:xfrm>
-          <a:prstGeom prst="rect">
-            <a:avLst/>
-          </a:prstGeom>
-          <a:noFill/>
-          <a:ln/>
-        </p:spPr>
-        <p:txBody>
-          <a:bodyPr wrap="square" lIns="0" tIns="0" rIns="0" bIns="0" rtlCol="0" anchor="ctr"/>
-          <a:lstStyle/>
-          <a:p>
-            <a:pPr marL="0" indent="0" algn="ctr">
-              <a:buNone/>
-            </a:pPr>
-            <a:r>
-              <a:rPr lang="en-US" sz="1200" dirty="0">
-                <a:solidFill>
-                  <a:srgbClr val="8892A4"/>
-                </a:solidFill>
-              </a:rPr>
-              <a:t>→</a:t>
-            </a:r>
-            <a:endParaRPr lang="en-US" sz="1200" dirty="0"/>
-          </a:p>
-        </p:txBody>
-      </p:sp>
-      <p:sp>
-        <p:nvSpPr>
-          <p:cNvPr id="14" name="Shape 12"/>
-          <p:cNvSpPr/>
-          <p:nvPr/>
-        </p:nvSpPr>
-        <p:spPr>
-          <a:xfrm>
-            <a:off x="3886200" y="1920240"/>
-            <a:ext cx="1371600" cy="1005840"/>
-          </a:xfrm>
-          <a:prstGeom prst="rect">
-            <a:avLst/>
-          </a:prstGeom>
-          <a:solidFill>
-            <a:srgbClr val="1C2236"/>
-          </a:solidFill>
-          <a:ln w="12700">
-            <a:solidFill>
-              <a:srgbClr val="252D42"/>
-            </a:solidFill>
-            <a:prstDash val="solid"/>
-          </a:ln>
-          <a:effectLst>
-            <a:outerShdw blurRad="101600" dist="25400" dir="8100000" algn="bl" rotWithShape="0">
-              <a:srgbClr val="000000">
-                <a:alpha val="25000"/>
-              </a:srgbClr>
-            </a:outerShdw>
-          </a:effectLst>
-        </p:spPr>
-        <p:txBody>
-          <a:bodyPr/>
-          <a:lstStyle/>
-          <a:p>
-            <a:endParaRPr lang="en-KR"/>
-          </a:p>
-        </p:txBody>
-      </p:sp>
-      <p:sp>
-        <p:nvSpPr>
-          <p:cNvPr id="15" name="Shape 13"/>
-          <p:cNvSpPr/>
-          <p:nvPr/>
-        </p:nvSpPr>
-        <p:spPr>
-          <a:xfrm>
-            <a:off x="3886200" y="1920240"/>
-            <a:ext cx="1371600" cy="54864"/>
-          </a:xfrm>
-          <a:prstGeom prst="rect">
-            <a:avLst/>
-          </a:prstGeom>
-          <a:solidFill>
-            <a:srgbClr val="1976D2"/>
-          </a:solidFill>
-          <a:ln w="12700">
-            <a:solidFill>
-              <a:srgbClr val="1976D2"/>
-            </a:solidFill>
-            <a:prstDash val="solid"/>
-          </a:ln>
-        </p:spPr>
-        <p:txBody>
-          <a:bodyPr/>
-          <a:lstStyle/>
-          <a:p>
-            <a:endParaRPr lang="en-KR"/>
-          </a:p>
-        </p:txBody>
-      </p:sp>
-      <p:sp>
-        <p:nvSpPr>
-          <p:cNvPr id="16" name="Text 14"/>
-          <p:cNvSpPr/>
-          <p:nvPr/>
-        </p:nvSpPr>
-        <p:spPr>
-          <a:xfrm>
-            <a:off x="3886200" y="2057400"/>
-            <a:ext cx="1371600" cy="731520"/>
-          </a:xfrm>
-          <a:prstGeom prst="rect">
-            <a:avLst/>
-          </a:prstGeom>
-          <a:noFill/>
-          <a:ln/>
-        </p:spPr>
-        <p:txBody>
-          <a:bodyPr wrap="square" lIns="0" tIns="0" rIns="0" bIns="0" rtlCol="0" anchor="ctr"/>
-          <a:lstStyle/>
-          <a:p>
-            <a:pPr marL="0" indent="0" algn="ctr">
-              <a:buNone/>
-            </a:pPr>
-            <a:r>
-              <a:rPr lang="en-US" sz="1300" b="1" dirty="0">
-                <a:solidFill>
-                  <a:srgbClr val="FFFFFF"/>
-                </a:solidFill>
-                <a:latin typeface="Calibri" pitchFamily="34" charset="0"/>
-                <a:ea typeface="Calibri" pitchFamily="34" charset="-122"/>
-                <a:cs typeface="Calibri" pitchFamily="34" charset="-120"/>
-              </a:rPr>
-              <a:t>Keypoint</a:t>
-            </a:r>
-            <a:endParaRPr lang="en-US" sz="1300" dirty="0"/>
-          </a:p>
-          <a:p>
-            <a:pPr marL="0" indent="0" algn="ctr">
-              <a:buNone/>
-            </a:pPr>
-            <a:r>
-              <a:rPr lang="en-US" sz="1300" b="1" dirty="0">
-                <a:solidFill>
-                  <a:srgbClr val="FFFFFF"/>
-                </a:solidFill>
-                <a:latin typeface="Calibri" pitchFamily="34" charset="0"/>
-                <a:ea typeface="Calibri" pitchFamily="34" charset="-122"/>
-                <a:cs typeface="Calibri" pitchFamily="34" charset="-120"/>
-              </a:rPr>
-              <a:t>Buffer</a:t>
-            </a:r>
-            <a:endParaRPr lang="en-US" sz="1300" dirty="0"/>
-          </a:p>
-        </p:txBody>
-      </p:sp>
-      <p:sp>
-        <p:nvSpPr>
-          <p:cNvPr id="17" name="Shape 15"/>
-          <p:cNvSpPr/>
-          <p:nvPr/>
-        </p:nvSpPr>
-        <p:spPr>
-          <a:xfrm>
-            <a:off x="5257800" y="2423160"/>
-            <a:ext cx="228600" cy="0"/>
-          </a:xfrm>
-          <a:prstGeom prst="line">
-            <a:avLst/>
-          </a:prstGeom>
-          <a:noFill/>
-          <a:ln w="25400">
-            <a:solidFill>
-              <a:srgbClr val="4A5568"/>
-            </a:solidFill>
-            <a:prstDash val="solid"/>
-          </a:ln>
-        </p:spPr>
-        <p:txBody>
-          <a:bodyPr/>
-          <a:lstStyle/>
-          <a:p>
-            <a:endParaRPr lang="en-KR"/>
-          </a:p>
-        </p:txBody>
-      </p:sp>
-      <p:sp>
-        <p:nvSpPr>
-          <p:cNvPr id="18" name="Text 16"/>
-          <p:cNvSpPr/>
-          <p:nvPr/>
-        </p:nvSpPr>
-        <p:spPr>
-          <a:xfrm>
-            <a:off x="5257800" y="2286000"/>
-            <a:ext cx="228600" cy="274320"/>
-          </a:xfrm>
-          <a:prstGeom prst="rect">
-            <a:avLst/>
-          </a:prstGeom>
-          <a:noFill/>
-          <a:ln/>
-        </p:spPr>
-        <p:txBody>
-          <a:bodyPr wrap="square" lIns="0" tIns="0" rIns="0" bIns="0" rtlCol="0" anchor="ctr"/>
-          <a:lstStyle/>
-          <a:p>
-            <a:pPr marL="0" indent="0" algn="ctr">
-              <a:buNone/>
-            </a:pPr>
-            <a:r>
-              <a:rPr lang="en-US" sz="1200" dirty="0">
-                <a:solidFill>
-                  <a:srgbClr val="8892A4"/>
-                </a:solidFill>
-              </a:rPr>
-              <a:t>→</a:t>
-            </a:r>
-            <a:endParaRPr lang="en-US" sz="1200" dirty="0"/>
-          </a:p>
-        </p:txBody>
-      </p:sp>
-      <p:sp>
-        <p:nvSpPr>
-          <p:cNvPr id="19" name="Shape 17"/>
-          <p:cNvSpPr/>
-          <p:nvPr/>
-        </p:nvSpPr>
-        <p:spPr>
-          <a:xfrm>
-            <a:off x="5486400" y="1920240"/>
-            <a:ext cx="1371600" cy="1005840"/>
-          </a:xfrm>
-          <a:prstGeom prst="rect">
-            <a:avLst/>
-          </a:prstGeom>
-          <a:solidFill>
-            <a:srgbClr val="1C2236"/>
-          </a:solidFill>
-          <a:ln w="12700">
-            <a:solidFill>
-              <a:srgbClr val="252D42"/>
-            </a:solidFill>
-            <a:prstDash val="solid"/>
-          </a:ln>
-          <a:effectLst>
-            <a:outerShdw blurRad="101600" dist="25400" dir="8100000" algn="bl" rotWithShape="0">
-              <a:srgbClr val="000000">
-                <a:alpha val="25000"/>
-              </a:srgbClr>
-            </a:outerShdw>
-          </a:effectLst>
-        </p:spPr>
-        <p:txBody>
-          <a:bodyPr/>
-          <a:lstStyle/>
-          <a:p>
-            <a:endParaRPr lang="en-KR"/>
-          </a:p>
-        </p:txBody>
-      </p:sp>
-      <p:sp>
-        <p:nvSpPr>
-          <p:cNvPr id="20" name="Shape 18"/>
-          <p:cNvSpPr/>
-          <p:nvPr/>
-        </p:nvSpPr>
-        <p:spPr>
-          <a:xfrm>
-            <a:off x="5486400" y="1920240"/>
-            <a:ext cx="1371600" cy="54864"/>
-          </a:xfrm>
-          <a:prstGeom prst="rect">
-            <a:avLst/>
-          </a:prstGeom>
-          <a:solidFill>
-            <a:srgbClr val="FFB300"/>
-          </a:solidFill>
-          <a:ln w="12700">
-            <a:solidFill>
-              <a:srgbClr val="FFB300"/>
-            </a:solidFill>
-            <a:prstDash val="solid"/>
-          </a:ln>
-        </p:spPr>
-        <p:txBody>
-          <a:bodyPr/>
-          <a:lstStyle/>
-          <a:p>
-            <a:endParaRPr lang="en-KR"/>
-          </a:p>
-        </p:txBody>
-      </p:sp>
-      <p:sp>
-        <p:nvSpPr>
-          <p:cNvPr id="21" name="Text 19"/>
-          <p:cNvSpPr/>
-          <p:nvPr/>
-        </p:nvSpPr>
-        <p:spPr>
-          <a:xfrm>
-            <a:off x="5486400" y="2057400"/>
-            <a:ext cx="1371600" cy="731520"/>
-          </a:xfrm>
-          <a:prstGeom prst="rect">
-            <a:avLst/>
-          </a:prstGeom>
-          <a:noFill/>
-          <a:ln/>
-        </p:spPr>
-        <p:txBody>
-          <a:bodyPr wrap="square" lIns="0" tIns="0" rIns="0" bIns="0" rtlCol="0" anchor="ctr"/>
-          <a:lstStyle/>
-          <a:p>
-            <a:pPr marL="0" indent="0" algn="ctr">
-              <a:buNone/>
-            </a:pPr>
-            <a:r>
-              <a:rPr lang="en-US" sz="1300" b="1" dirty="0">
-                <a:solidFill>
-                  <a:srgbClr val="FFFFFF"/>
-                </a:solidFill>
-                <a:latin typeface="Calibri" pitchFamily="34" charset="0"/>
-                <a:ea typeface="Calibri" pitchFamily="34" charset="-122"/>
-                <a:cs typeface="Calibri" pitchFamily="34" charset="-120"/>
-              </a:rPr>
-              <a:t>Claude</a:t>
-            </a:r>
-            <a:endParaRPr lang="en-US" sz="1300" dirty="0"/>
-          </a:p>
-          <a:p>
-            <a:pPr marL="0" indent="0" algn="ctr">
-              <a:buNone/>
-            </a:pPr>
-            <a:r>
-              <a:rPr lang="en-US" sz="1300" b="1" dirty="0">
-                <a:solidFill>
-                  <a:srgbClr val="FFFFFF"/>
-                </a:solidFill>
-                <a:latin typeface="Calibri" pitchFamily="34" charset="0"/>
-                <a:ea typeface="Calibri" pitchFamily="34" charset="-122"/>
-                <a:cs typeface="Calibri" pitchFamily="34" charset="-120"/>
-              </a:rPr>
-              <a:t>Haiku API</a:t>
-            </a:r>
-            <a:endParaRPr lang="en-US" sz="1300" dirty="0"/>
-          </a:p>
-        </p:txBody>
-      </p:sp>
-      <p:sp>
-        <p:nvSpPr>
-          <p:cNvPr id="22" name="Shape 20"/>
-          <p:cNvSpPr/>
-          <p:nvPr/>
-        </p:nvSpPr>
-        <p:spPr>
-          <a:xfrm>
-            <a:off x="6858000" y="2423160"/>
-            <a:ext cx="228600" cy="0"/>
-          </a:xfrm>
-          <a:prstGeom prst="line">
-            <a:avLst/>
-          </a:prstGeom>
-          <a:noFill/>
-          <a:ln w="25400">
-            <a:solidFill>
-              <a:srgbClr val="4A5568"/>
-            </a:solidFill>
-            <a:prstDash val="solid"/>
-          </a:ln>
-        </p:spPr>
-        <p:txBody>
-          <a:bodyPr/>
-          <a:lstStyle/>
-          <a:p>
-            <a:endParaRPr lang="en-KR"/>
-          </a:p>
-        </p:txBody>
-      </p:sp>
-      <p:sp>
-        <p:nvSpPr>
-          <p:cNvPr id="23" name="Text 21"/>
-          <p:cNvSpPr/>
-          <p:nvPr/>
-        </p:nvSpPr>
-        <p:spPr>
-          <a:xfrm>
-            <a:off x="6858000" y="2286000"/>
-            <a:ext cx="228600" cy="274320"/>
-          </a:xfrm>
-          <a:prstGeom prst="rect">
-            <a:avLst/>
-          </a:prstGeom>
-          <a:noFill/>
-          <a:ln/>
-        </p:spPr>
-        <p:txBody>
-          <a:bodyPr wrap="square" lIns="0" tIns="0" rIns="0" bIns="0" rtlCol="0" anchor="ctr"/>
-          <a:lstStyle/>
-          <a:p>
-            <a:pPr marL="0" indent="0" algn="ctr">
-              <a:buNone/>
-            </a:pPr>
-            <a:r>
-              <a:rPr lang="en-US" sz="1200" dirty="0">
-                <a:solidFill>
-                  <a:srgbClr val="8892A4"/>
-                </a:solidFill>
-              </a:rPr>
-              <a:t>→</a:t>
-            </a:r>
-            <a:endParaRPr lang="en-US" sz="1200" dirty="0"/>
-          </a:p>
-        </p:txBody>
-      </p:sp>
-      <p:sp>
-        <p:nvSpPr>
-          <p:cNvPr id="24" name="Shape 22"/>
-          <p:cNvSpPr/>
-          <p:nvPr/>
-        </p:nvSpPr>
-        <p:spPr>
-          <a:xfrm>
-            <a:off x="7086600" y="1920240"/>
-            <a:ext cx="1371600" cy="1005840"/>
-          </a:xfrm>
-          <a:prstGeom prst="rect">
-            <a:avLst/>
-          </a:prstGeom>
-          <a:solidFill>
-            <a:srgbClr val="1C2236"/>
-          </a:solidFill>
-          <a:ln w="12700">
-            <a:solidFill>
-              <a:srgbClr val="252D42"/>
-            </a:solidFill>
-            <a:prstDash val="solid"/>
-          </a:ln>
-          <a:effectLst>
-            <a:outerShdw blurRad="101600" dist="25400" dir="8100000" algn="bl" rotWithShape="0">
-              <a:srgbClr val="000000">
-                <a:alpha val="25000"/>
-              </a:srgbClr>
-            </a:outerShdw>
-          </a:effectLst>
-        </p:spPr>
-        <p:txBody>
-          <a:bodyPr/>
-          <a:lstStyle/>
-          <a:p>
-            <a:endParaRPr lang="en-KR"/>
-          </a:p>
-        </p:txBody>
-      </p:sp>
-      <p:sp>
-        <p:nvSpPr>
-          <p:cNvPr id="25" name="Shape 23"/>
-          <p:cNvSpPr/>
-          <p:nvPr/>
-        </p:nvSpPr>
-        <p:spPr>
-          <a:xfrm>
-            <a:off x="7086600" y="1920240"/>
-            <a:ext cx="1371600" cy="54864"/>
-          </a:xfrm>
-          <a:prstGeom prst="rect">
-            <a:avLst/>
-          </a:prstGeom>
-          <a:solidFill>
-            <a:srgbClr val="43A047"/>
-          </a:solidFill>
-          <a:ln w="12700">
-            <a:solidFill>
-              <a:srgbClr val="43A047"/>
-            </a:solidFill>
-            <a:prstDash val="solid"/>
-          </a:ln>
-        </p:spPr>
-        <p:txBody>
-          <a:bodyPr/>
-          <a:lstStyle/>
-          <a:p>
-            <a:endParaRPr lang="en-KR"/>
-          </a:p>
-        </p:txBody>
-      </p:sp>
-      <p:sp>
-        <p:nvSpPr>
-          <p:cNvPr id="26" name="Text 24"/>
-          <p:cNvSpPr/>
-          <p:nvPr/>
-        </p:nvSpPr>
-        <p:spPr>
-          <a:xfrm>
-            <a:off x="7086600" y="2057400"/>
-            <a:ext cx="1371600" cy="731520"/>
-          </a:xfrm>
-          <a:prstGeom prst="rect">
-            <a:avLst/>
-          </a:prstGeom>
-          <a:noFill/>
-          <a:ln/>
-        </p:spPr>
-        <p:txBody>
-          <a:bodyPr wrap="square" lIns="0" tIns="0" rIns="0" bIns="0" rtlCol="0" anchor="ctr"/>
-          <a:lstStyle/>
-          <a:p>
-            <a:pPr marL="0" indent="0" algn="ctr">
-              <a:buNone/>
-            </a:pPr>
-            <a:r>
-              <a:rPr lang="en-US" sz="1300" b="1" dirty="0">
-                <a:solidFill>
-                  <a:srgbClr val="FFFFFF"/>
-                </a:solidFill>
-                <a:latin typeface="Calibri" pitchFamily="34" charset="0"/>
-                <a:ea typeface="Calibri" pitchFamily="34" charset="-122"/>
-                <a:cs typeface="Calibri" pitchFamily="34" charset="-120"/>
-              </a:rPr>
-              <a:t>Results</a:t>
-            </a:r>
-            <a:endParaRPr lang="en-US" sz="1300" dirty="0"/>
-          </a:p>
-          <a:p>
-            <a:pPr marL="0" indent="0" algn="ctr">
-              <a:buNone/>
-            </a:pPr>
-            <a:r>
-              <a:rPr lang="en-US" sz="1300" b="1" dirty="0">
-                <a:solidFill>
-                  <a:srgbClr val="FFFFFF"/>
-                </a:solidFill>
-                <a:latin typeface="Calibri" pitchFamily="34" charset="0"/>
-                <a:ea typeface="Calibri" pitchFamily="34" charset="-122"/>
-                <a:cs typeface="Calibri" pitchFamily="34" charset="-120"/>
-              </a:rPr>
-              <a:t>Screen</a:t>
-            </a:r>
-            <a:endParaRPr lang="en-US" sz="1300" dirty="0"/>
-          </a:p>
-        </p:txBody>
-      </p:sp>
-      <p:sp>
-        <p:nvSpPr>
-          <p:cNvPr id="27" name="Text 25"/>
-          <p:cNvSpPr/>
-          <p:nvPr/>
-        </p:nvSpPr>
-        <p:spPr>
-          <a:xfrm>
-            <a:off x="685800" y="3063240"/>
-            <a:ext cx="1371600" cy="548640"/>
-          </a:xfrm>
-          <a:prstGeom prst="rect">
-            <a:avLst/>
-          </a:prstGeom>
-          <a:noFill/>
-          <a:ln/>
-        </p:spPr>
-        <p:txBody>
-          <a:bodyPr wrap="square" lIns="0" tIns="0" rIns="0" bIns="0" rtlCol="0" anchor="ctr"/>
-          <a:lstStyle/>
-          <a:p>
-            <a:pPr marL="0" indent="0" algn="ctr">
-              <a:buNone/>
-            </a:pPr>
-            <a:r>
-              <a:rPr lang="en-US" sz="1000" dirty="0">
-                <a:solidFill>
-                  <a:srgbClr val="8892A4"/>
-                </a:solidFill>
-                <a:latin typeface="Calibri" pitchFamily="34" charset="0"/>
-                <a:ea typeface="Calibri" pitchFamily="34" charset="-122"/>
-                <a:cs typeface="Calibri" pitchFamily="34" charset="-120"/>
-              </a:rPr>
-              <a:t>30fps front</a:t>
-            </a:r>
-            <a:endParaRPr lang="en-US" sz="1000" dirty="0"/>
-          </a:p>
-          <a:p>
-            <a:pPr marL="0" indent="0" algn="ctr">
-              <a:buNone/>
-            </a:pPr>
-            <a:r>
-              <a:rPr lang="en-US" sz="1000" dirty="0">
-                <a:solidFill>
-                  <a:srgbClr val="8892A4"/>
-                </a:solidFill>
-                <a:latin typeface="Calibri" pitchFamily="34" charset="0"/>
-                <a:ea typeface="Calibri" pitchFamily="34" charset="-122"/>
-                <a:cs typeface="Calibri" pitchFamily="34" charset="-120"/>
-              </a:rPr>
-              <a:t>camera feed</a:t>
-            </a:r>
-            <a:endParaRPr lang="en-US" sz="1000" dirty="0"/>
-          </a:p>
-        </p:txBody>
-      </p:sp>
-      <p:sp>
-        <p:nvSpPr>
-          <p:cNvPr id="28" name="Text 26"/>
-          <p:cNvSpPr/>
-          <p:nvPr/>
-        </p:nvSpPr>
-        <p:spPr>
-          <a:xfrm>
-            <a:off x="2286000" y="3063240"/>
-            <a:ext cx="1371600" cy="548640"/>
-          </a:xfrm>
-          <a:prstGeom prst="rect">
-            <a:avLst/>
-          </a:prstGeom>
-          <a:noFill/>
-          <a:ln/>
-        </p:spPr>
-        <p:txBody>
-          <a:bodyPr wrap="square" lIns="0" tIns="0" rIns="0" bIns="0" rtlCol="0" anchor="ctr"/>
-          <a:lstStyle/>
-          <a:p>
-            <a:pPr marL="0" indent="0" algn="ctr">
-              <a:buNone/>
-            </a:pPr>
-            <a:r>
-              <a:rPr lang="en-US" sz="1000" dirty="0">
-                <a:solidFill>
-                  <a:srgbClr val="8892A4"/>
-                </a:solidFill>
-                <a:latin typeface="Calibri" pitchFamily="34" charset="0"/>
-                <a:ea typeface="Calibri" pitchFamily="34" charset="-122"/>
-                <a:cs typeface="Calibri" pitchFamily="34" charset="-120"/>
-              </a:rPr>
-              <a:t>17 keypoints</a:t>
-            </a:r>
-            <a:endParaRPr lang="en-US" sz="1000" dirty="0"/>
-          </a:p>
-          <a:p>
-            <a:pPr marL="0" indent="0" algn="ctr">
-              <a:buNone/>
-            </a:pPr>
-            <a:r>
-              <a:rPr lang="en-US" sz="1000" dirty="0">
-                <a:solidFill>
-                  <a:srgbClr val="8892A4"/>
-                </a:solidFill>
-                <a:latin typeface="Calibri" pitchFamily="34" charset="0"/>
-                <a:ea typeface="Calibri" pitchFamily="34" charset="-122"/>
-                <a:cs typeface="Calibri" pitchFamily="34" charset="-120"/>
-              </a:rPr>
-              <a:t>@ 192×192px</a:t>
-            </a:r>
-            <a:endParaRPr lang="en-US" sz="1000" dirty="0"/>
-          </a:p>
-        </p:txBody>
-      </p:sp>
-      <p:sp>
-        <p:nvSpPr>
-          <p:cNvPr id="29" name="Text 27"/>
-          <p:cNvSpPr/>
-          <p:nvPr/>
-        </p:nvSpPr>
-        <p:spPr>
-          <a:xfrm>
-            <a:off x="3886200" y="3063240"/>
-            <a:ext cx="1371600" cy="548640"/>
-          </a:xfrm>
-          <a:prstGeom prst="rect">
-            <a:avLst/>
-          </a:prstGeom>
-          <a:noFill/>
-          <a:ln/>
-        </p:spPr>
-        <p:txBody>
-          <a:bodyPr wrap="square" lIns="0" tIns="0" rIns="0" bIns="0" rtlCol="0" anchor="ctr"/>
-          <a:lstStyle/>
-          <a:p>
-            <a:pPr marL="0" indent="0" algn="ctr">
-              <a:buNone/>
-            </a:pPr>
-            <a:r>
-              <a:rPr lang="en-US" sz="1000" dirty="0">
-                <a:solidFill>
-                  <a:srgbClr val="8892A4"/>
-                </a:solidFill>
-                <a:latin typeface="Calibri" pitchFamily="34" charset="0"/>
-                <a:ea typeface="Calibri" pitchFamily="34" charset="-122"/>
-                <a:cs typeface="Calibri" pitchFamily="34" charset="-120"/>
-              </a:rPr>
-              <a:t>Sampled at</a:t>
-            </a:r>
-            <a:endParaRPr lang="en-US" sz="1000" dirty="0"/>
-          </a:p>
-          <a:p>
-            <a:pPr marL="0" indent="0" algn="ctr">
-              <a:buNone/>
-            </a:pPr>
-            <a:r>
-              <a:rPr lang="en-US" sz="1000" dirty="0">
-                <a:solidFill>
-                  <a:srgbClr val="8892A4"/>
-                </a:solidFill>
-                <a:latin typeface="Calibri" pitchFamily="34" charset="0"/>
-                <a:ea typeface="Calibri" pitchFamily="34" charset="-122"/>
-                <a:cs typeface="Calibri" pitchFamily="34" charset="-120"/>
-              </a:rPr>
-              <a:t>~3fps session</a:t>
-            </a:r>
-            <a:endParaRPr lang="en-US" sz="1000" dirty="0"/>
-          </a:p>
-        </p:txBody>
-      </p:sp>
-      <p:sp>
-        <p:nvSpPr>
-          <p:cNvPr id="30" name="Text 28"/>
-          <p:cNvSpPr/>
-          <p:nvPr/>
-        </p:nvSpPr>
-        <p:spPr>
-          <a:xfrm>
-            <a:off x="5486400" y="3063240"/>
-            <a:ext cx="1371600" cy="548640"/>
-          </a:xfrm>
-          <a:prstGeom prst="rect">
-            <a:avLst/>
-          </a:prstGeom>
-          <a:noFill/>
-          <a:ln/>
-        </p:spPr>
-        <p:txBody>
-          <a:bodyPr wrap="square" lIns="0" tIns="0" rIns="0" bIns="0" rtlCol="0" anchor="ctr"/>
-          <a:lstStyle/>
-          <a:p>
-            <a:pPr marL="0" indent="0" algn="ctr">
-              <a:buNone/>
-            </a:pPr>
-            <a:r>
-              <a:rPr lang="en-US" sz="1000" dirty="0">
-                <a:solidFill>
-                  <a:srgbClr val="8892A4"/>
-                </a:solidFill>
-                <a:latin typeface="Calibri" pitchFamily="34" charset="0"/>
-                <a:ea typeface="Calibri" pitchFamily="34" charset="-122"/>
-                <a:cs typeface="Calibri" pitchFamily="34" charset="-120"/>
-              </a:rPr>
-              <a:t>Motion features</a:t>
-            </a:r>
-            <a:endParaRPr lang="en-US" sz="1000" dirty="0"/>
-          </a:p>
-          <a:p>
-            <a:pPr marL="0" indent="0" algn="ctr">
-              <a:buNone/>
-            </a:pPr>
-            <a:r>
-              <a:rPr lang="en-US" sz="1000" dirty="0">
-                <a:solidFill>
-                  <a:srgbClr val="8892A4"/>
-                </a:solidFill>
-                <a:latin typeface="Calibri" pitchFamily="34" charset="0"/>
-                <a:ea typeface="Calibri" pitchFamily="34" charset="-122"/>
-                <a:cs typeface="Calibri" pitchFamily="34" charset="-120"/>
-              </a:rPr>
-              <a:t>→ analysis</a:t>
-            </a:r>
-            <a:endParaRPr lang="en-US" sz="1000" dirty="0"/>
-          </a:p>
-        </p:txBody>
-      </p:sp>
-      <p:sp>
-        <p:nvSpPr>
-          <p:cNvPr id="31" name="Text 29"/>
-          <p:cNvSpPr/>
-          <p:nvPr/>
-        </p:nvSpPr>
-        <p:spPr>
-          <a:xfrm>
-            <a:off x="7086600" y="3063240"/>
-            <a:ext cx="1371600" cy="548640"/>
-          </a:xfrm>
-          <a:prstGeom prst="rect">
-            <a:avLst/>
-          </a:prstGeom>
-          <a:noFill/>
-          <a:ln/>
-        </p:spPr>
-        <p:txBody>
-          <a:bodyPr wrap="square" lIns="0" tIns="0" rIns="0" bIns="0" rtlCol="0" anchor="ctr"/>
-          <a:lstStyle/>
-          <a:p>
-            <a:pPr marL="0" indent="0" algn="ctr">
-              <a:buNone/>
-            </a:pPr>
-            <a:r>
-              <a:rPr lang="en-US" sz="1000" dirty="0">
-                <a:solidFill>
-                  <a:srgbClr val="8892A4"/>
-                </a:solidFill>
-                <a:latin typeface="Calibri" pitchFamily="34" charset="0"/>
-                <a:ea typeface="Calibri" pitchFamily="34" charset="-122"/>
-                <a:cs typeface="Calibri" pitchFamily="34" charset="-120"/>
-              </a:rPr>
-              <a:t>Counts + feedback</a:t>
-            </a:r>
-            <a:endParaRPr lang="en-US" sz="1000" dirty="0"/>
-          </a:p>
-          <a:p>
-            <a:pPr marL="0" indent="0" algn="ctr">
-              <a:buNone/>
-            </a:pPr>
-            <a:r>
-              <a:rPr lang="en-US" sz="1000" dirty="0">
-                <a:solidFill>
-                  <a:srgbClr val="8892A4"/>
-                </a:solidFill>
-                <a:latin typeface="Calibri" pitchFamily="34" charset="0"/>
-                <a:ea typeface="Calibri" pitchFamily="34" charset="-122"/>
-                <a:cs typeface="Calibri" pitchFamily="34" charset="-120"/>
-              </a:rPr>
-              <a:t>+ guard tips</a:t>
-            </a:r>
-            <a:endParaRPr lang="en-US" sz="1000" dirty="0"/>
-          </a:p>
-        </p:txBody>
-      </p:sp>
-      <p:sp>
-        <p:nvSpPr>
-          <p:cNvPr id="32" name="Text 30"/>
-          <p:cNvSpPr/>
-          <p:nvPr/>
-        </p:nvSpPr>
-        <p:spPr>
-          <a:xfrm>
-            <a:off x="457200" y="4389120"/>
-            <a:ext cx="8229600" cy="274320"/>
-          </a:xfrm>
-          <a:prstGeom prst="rect">
-            <a:avLst/>
-          </a:prstGeom>
-          <a:noFill/>
-          <a:ln/>
-        </p:spPr>
-        <p:txBody>
-          <a:bodyPr wrap="square" lIns="0" tIns="0" rIns="0" bIns="0" rtlCol="0" anchor="ctr"/>
-          <a:lstStyle/>
-          <a:p>
-            <a:pPr marL="0" indent="0" algn="ctr">
-              <a:buNone/>
-            </a:pPr>
-            <a:r>
-              <a:rPr lang="en-US" sz="1100" i="1" dirty="0">
-                <a:solidFill>
-                  <a:srgbClr val="4A5568"/>
-                </a:solidFill>
-                <a:latin typeface="Calibri" pitchFamily="34" charset="0"/>
-                <a:ea typeface="Calibri" pitchFamily="34" charset="-122"/>
-                <a:cs typeface="Calibri" pitchFamily="34" charset="-120"/>
-              </a:rPr>
-              <a:t>MoveNet Lightning runs fully on-device (TFLite) · Claude API called once per session</a:t>
-            </a:r>
-            <a:endParaRPr lang="en-US" sz="1100" dirty="0"/>
-          </a:p>
-        </p:txBody>
-      </p:sp>
-    </p:spTree>
-  </p:cSld>
-  <p:clrMapOvr>
-    <a:masterClrMapping/>
-  </p:clrMapOvr>
-</p:sld>
-</file>
-
-<file path=ppt/slides/slide4.xml><?xml version="1.0" encoding="utf-8"?>
 <p:sld xmlns:a="http://schemas.openxmlformats.org/drawingml/2006/main" xmlns:r="http://schemas.openxmlformats.org/officeDocument/2006/relationships" xmlns:p="http://schemas.openxmlformats.org/presentationml/2006/main">
   <p:cSld name="Slide 4">
     <p:bg>
@@ -6991,7 +5964,7 @@
                 <a:ea typeface="Calibri" pitchFamily="34" charset="-122"/>
                 <a:cs typeface="Calibri" pitchFamily="34" charset="-120"/>
               </a:rPr>
-              <a:t>Upward drive (removed — depth issue)</a:t>
+              <a:t>Upward drive (removed)</a:t>
             </a:r>
             <a:endParaRPr lang="en-US" sz="1100" dirty="0"/>
           </a:p>
@@ -7187,7 +6160,23 @@
                 <a:ea typeface="Calibri" pitchFamily="34" charset="-122"/>
                 <a:cs typeface="Calibri" pitchFamily="34" charset="-120"/>
               </a:rPr>
-              <a:t>Custom walk-up-and-go recorder (record_data.py)</a:t>
+              <a:t>Custom walk-up-and-go recorder</a:t>
+            </a:r>
+          </a:p>
+          <a:p>
+            <a:pPr>
+              <a:buSzPct val="100000"/>
+            </a:pPr>
+            <a:r>
+              <a:rPr lang="en-US" sz="1500" dirty="0">
+                <a:solidFill>
+                  <a:srgbClr val="E8EAF0"/>
+                </a:solidFill>
+                <a:latin typeface="Calibri" pitchFamily="34" charset="0"/>
+                <a:ea typeface="Calibri" pitchFamily="34" charset="-122"/>
+                <a:cs typeface="Calibri" pitchFamily="34" charset="-120"/>
+              </a:rPr>
+              <a:t>        (using python)</a:t>
             </a:r>
             <a:endParaRPr lang="en-US" sz="1300" dirty="0"/>
           </a:p>
@@ -7273,7 +6262,7 @@
 </p:sld>
 </file>
 
-<file path=ppt/slides/slide5.xml><?xml version="1.0" encoding="utf-8"?>
+<file path=ppt/slides/slide4.xml><?xml version="1.0" encoding="utf-8"?>
 <p:sld xmlns:a="http://schemas.openxmlformats.org/drawingml/2006/main" xmlns:r="http://schemas.openxmlformats.org/officeDocument/2006/relationships" xmlns:p="http://schemas.openxmlformats.org/presentationml/2006/main">
   <p:cSld name="Slide 5">
     <p:bg>
@@ -7745,7 +6734,7 @@
             <a:pPr marL="0" indent="0">
               <a:buNone/>
             </a:pPr>
-            <a:endParaRPr lang="en-US" sz="1300" b="1" dirty="0">
+            <a:endParaRPr lang="en-US" sz="1400" b="1" dirty="0">
               <a:solidFill>
                 <a:srgbClr val="E53935"/>
               </a:solidFill>
@@ -7760,7 +6749,7 @@
               <a:buChar char="•"/>
             </a:pPr>
             <a:r>
-              <a:rPr lang="en-US" sz="1300" b="1" dirty="0">
+              <a:rPr lang="en-US" sz="1400" b="1" dirty="0">
                 <a:solidFill>
                   <a:srgbClr val="E53935"/>
                 </a:solidFill>
@@ -7771,7 +6760,7 @@
               <a:t>Mixed dataset: </a:t>
             </a:r>
             <a:r>
-              <a:rPr lang="en-US" sz="1300" dirty="0">
+              <a:rPr lang="en-US" sz="1400" dirty="0">
                 <a:solidFill>
                   <a:srgbClr val="E8EAF0"/>
                 </a:solidFill>
@@ -7788,7 +6777,7 @@
               <a:buChar char="•"/>
             </a:pPr>
             <a:r>
-              <a:rPr lang="en-US" sz="1300" b="1" dirty="0">
+              <a:rPr lang="en-US" sz="1400" b="1" dirty="0">
                 <a:solidFill>
                   <a:srgbClr val="E53935"/>
                 </a:solidFill>
@@ -7799,7 +6788,7 @@
               <a:t>Too little data: </a:t>
             </a:r>
             <a:r>
-              <a:rPr lang="en-US" sz="1300" dirty="0">
+              <a:rPr lang="en-US" sz="1400" dirty="0">
                 <a:solidFill>
                   <a:srgbClr val="E8EAF0"/>
                 </a:solidFill>
@@ -7816,7 +6805,7 @@
               <a:buChar char="•"/>
             </a:pPr>
             <a:r>
-              <a:rPr lang="en-US" sz="1300" b="1" dirty="0">
+              <a:rPr lang="en-US" sz="1400" b="1" dirty="0">
                 <a:solidFill>
                   <a:srgbClr val="E53935"/>
                 </a:solidFill>
@@ -7827,7 +6816,7 @@
               <a:t>Uncontrolled recording environment</a:t>
             </a:r>
             <a:r>
-              <a:rPr kumimoji="0" lang="en-US" sz="1300" b="1" i="0" u="none" strike="noStrike" kern="1200" cap="none" spc="0" normalizeH="0" baseline="0" noProof="0" dirty="0">
+              <a:rPr kumimoji="0" lang="en-US" sz="1400" b="1" i="0" u="none" strike="noStrike" kern="1200" cap="none" spc="0" normalizeH="0" baseline="0" noProof="0" dirty="0">
                 <a:ln>
                   <a:noFill/>
                 </a:ln>
@@ -7844,7 +6833,7 @@
               <a:t>:</a:t>
             </a:r>
             <a:r>
-              <a:rPr kumimoji="0" lang="en-US" sz="1300" b="1" i="0" u="none" strike="noStrike" kern="1200" cap="none" spc="0" normalizeH="0" baseline="0" noProof="0" dirty="0">
+              <a:rPr kumimoji="0" lang="en-US" sz="1400" b="1" i="0" u="none" strike="noStrike" kern="1200" cap="none" spc="0" normalizeH="0" baseline="0" noProof="0" dirty="0">
                 <a:ln>
                   <a:noFill/>
                 </a:ln>
@@ -7861,7 +6850,7 @@
               <a:t> </a:t>
             </a:r>
             <a:r>
-              <a:rPr lang="en-US" sz="1300" dirty="0">
+              <a:rPr lang="en-US" sz="1400" dirty="0">
                 <a:solidFill>
                   <a:schemeClr val="bg1"/>
                 </a:solidFill>
@@ -7872,7 +6861,7 @@
             </a:r>
           </a:p>
           <a:p>
-            <a:endParaRPr lang="en-US" sz="1300" dirty="0">
+            <a:endParaRPr lang="en-US" sz="1400" dirty="0">
               <a:solidFill>
                 <a:schemeClr val="bg1"/>
               </a:solidFill>
@@ -7884,7 +6873,7 @@
             <a:pPr marL="0" indent="0">
               <a:buNone/>
             </a:pPr>
-            <a:endParaRPr lang="en-US" sz="1300" dirty="0">
+            <a:endParaRPr lang="en-US" sz="1400" dirty="0">
               <a:solidFill>
                 <a:srgbClr val="FF0000"/>
               </a:solidFill>
@@ -7900,7 +6889,7 @@
 </p:sld>
 </file>
 
-<file path=ppt/slides/slide6.xml><?xml version="1.0" encoding="utf-8"?>
+<file path=ppt/slides/slide5.xml><?xml version="1.0" encoding="utf-8"?>
 <p:sld xmlns:a="http://schemas.openxmlformats.org/drawingml/2006/main" xmlns:r="http://schemas.openxmlformats.org/officeDocument/2006/relationships" xmlns:p="http://schemas.openxmlformats.org/presentationml/2006/main">
   <p:cSld name="Slide 6">
     <p:bg>
@@ -8912,7 +7901,7 @@
 </p:sld>
 </file>
 
-<file path=ppt/slides/slide7.xml><?xml version="1.0" encoding="utf-8"?>
+<file path=ppt/slides/slide6.xml><?xml version="1.0" encoding="utf-8"?>
 <p:sld xmlns:a="http://schemas.openxmlformats.org/drawingml/2006/main" xmlns:r="http://schemas.openxmlformats.org/officeDocument/2006/relationships" xmlns:p="http://schemas.openxmlformats.org/presentationml/2006/main">
   <p:cSld name="Slide 7">
     <p:bg>
@@ -9414,7 +8403,7 @@
                 <a:ea typeface="Calibri" pitchFamily="34" charset="-122"/>
                 <a:cs typeface="Calibri" pitchFamily="34" charset="-120"/>
               </a:rPr>
-              <a:t>2D pose distinguish jab vs idle reliably — both show minimal x/y wrist displacement. LLM can reason about context. can't</a:t>
+              <a:t>2D pose distinguish jab vs idle reliably — both show minimal x/y wrist displacement. LLM can reason about context.</a:t>
             </a:r>
             <a:endParaRPr lang="en-US" sz="1200" dirty="0"/>
           </a:p>
@@ -9804,7 +8793,2368 @@
 </p:sld>
 </file>
 
+<file path=ppt/slides/slide7.xml><?xml version="1.0" encoding="utf-8"?>
+<p:sld xmlns:a="http://schemas.openxmlformats.org/drawingml/2006/main" xmlns:r="http://schemas.openxmlformats.org/officeDocument/2006/relationships" xmlns:p="http://schemas.openxmlformats.org/presentationml/2006/main">
+  <p:cSld>
+    <p:bg>
+      <p:bgPr>
+        <a:solidFill>
+          <a:srgbClr val="0A0E1A"/>
+        </a:solidFill>
+        <a:effectLst/>
+      </p:bgPr>
+    </p:bg>
+    <p:spTree>
+      <p:nvGrpSpPr>
+        <p:cNvPr id="1" name=""/>
+        <p:cNvGrpSpPr/>
+        <p:nvPr/>
+      </p:nvGrpSpPr>
+      <p:grpSpPr>
+        <a:xfrm>
+          <a:off x="0" y="0"/>
+          <a:ext cx="0" cy="0"/>
+          <a:chOff x="0" y="0"/>
+          <a:chExt cx="0" cy="0"/>
+        </a:xfrm>
+      </p:grpSpPr>
+      <p:sp>
+        <p:nvSpPr>
+          <p:cNvPr id="2" name="Text 0"/>
+          <p:cNvSpPr/>
+          <p:nvPr/>
+        </p:nvSpPr>
+        <p:spPr>
+          <a:xfrm>
+            <a:off x="457200" y="320040"/>
+            <a:ext cx="8229600" cy="502920"/>
+          </a:xfrm>
+          <a:prstGeom prst="rect">
+            <a:avLst/>
+          </a:prstGeom>
+          <a:noFill/>
+          <a:ln/>
+        </p:spPr>
+        <p:txBody>
+          <a:bodyPr wrap="square" lIns="0" tIns="0" rIns="0" bIns="0" rtlCol="0" anchor="ctr"/>
+          <a:lstStyle/>
+          <a:p>
+            <a:pPr marL="0" indent="0" algn="l">
+              <a:buNone/>
+            </a:pPr>
+            <a:r>
+              <a:rPr lang="en-US" sz="2800" b="1" dirty="0">
+                <a:solidFill>
+                  <a:srgbClr val="FFFFFF"/>
+                </a:solidFill>
+                <a:latin typeface="Trebuchet MS" pitchFamily="34" charset="0"/>
+                <a:ea typeface="Trebuchet MS" pitchFamily="34" charset="-122"/>
+                <a:cs typeface="Trebuchet MS" pitchFamily="34" charset="-120"/>
+              </a:rPr>
+              <a:t>System Architecture</a:t>
+            </a:r>
+            <a:endParaRPr lang="en-US" sz="2800" dirty="0"/>
+          </a:p>
+        </p:txBody>
+      </p:sp>
+      <p:sp>
+        <p:nvSpPr>
+          <p:cNvPr id="3" name="Shape 1"/>
+          <p:cNvSpPr/>
+          <p:nvPr/>
+        </p:nvSpPr>
+        <p:spPr>
+          <a:xfrm>
+            <a:off x="457200" y="850392"/>
+            <a:ext cx="1097280" cy="36576"/>
+          </a:xfrm>
+          <a:prstGeom prst="rect">
+            <a:avLst/>
+          </a:prstGeom>
+          <a:solidFill>
+            <a:srgbClr val="E53935"/>
+          </a:solidFill>
+          <a:ln w="12700">
+            <a:solidFill>
+              <a:srgbClr val="E53935"/>
+            </a:solidFill>
+            <a:prstDash val="solid"/>
+          </a:ln>
+        </p:spPr>
+        <p:txBody>
+          <a:bodyPr/>
+          <a:lstStyle/>
+          <a:p>
+            <a:endParaRPr lang="en-KR"/>
+          </a:p>
+        </p:txBody>
+      </p:sp>
+      <p:sp>
+        <p:nvSpPr>
+          <p:cNvPr id="4" name="Shape 2"/>
+          <p:cNvSpPr/>
+          <p:nvPr/>
+        </p:nvSpPr>
+        <p:spPr>
+          <a:xfrm>
+            <a:off x="466344" y="1920240"/>
+            <a:ext cx="1078992" cy="1005840"/>
+          </a:xfrm>
+          <a:prstGeom prst="rect">
+            <a:avLst/>
+          </a:prstGeom>
+          <a:solidFill>
+            <a:srgbClr val="1C2236"/>
+          </a:solidFill>
+          <a:ln w="12700">
+            <a:solidFill>
+              <a:srgbClr val="252D42"/>
+            </a:solidFill>
+            <a:prstDash val="solid"/>
+          </a:ln>
+          <a:effectLst>
+            <a:outerShdw blurRad="101600" dist="25400" dir="8100000" algn="bl" rotWithShape="0">
+              <a:srgbClr val="000000">
+                <a:alpha val="25000"/>
+              </a:srgbClr>
+            </a:outerShdw>
+          </a:effectLst>
+        </p:spPr>
+        <p:txBody>
+          <a:bodyPr/>
+          <a:lstStyle/>
+          <a:p>
+            <a:endParaRPr lang="en-KR"/>
+          </a:p>
+        </p:txBody>
+      </p:sp>
+      <p:sp>
+        <p:nvSpPr>
+          <p:cNvPr id="5" name="Shape 3"/>
+          <p:cNvSpPr/>
+          <p:nvPr/>
+        </p:nvSpPr>
+        <p:spPr>
+          <a:xfrm>
+            <a:off x="466344" y="1920240"/>
+            <a:ext cx="1078992" cy="54864"/>
+          </a:xfrm>
+          <a:prstGeom prst="rect">
+            <a:avLst/>
+          </a:prstGeom>
+          <a:solidFill>
+            <a:srgbClr val="00ACC1"/>
+          </a:solidFill>
+          <a:ln w="12700">
+            <a:solidFill>
+              <a:srgbClr val="00ACC1"/>
+            </a:solidFill>
+            <a:prstDash val="solid"/>
+          </a:ln>
+        </p:spPr>
+        <p:txBody>
+          <a:bodyPr/>
+          <a:lstStyle/>
+          <a:p>
+            <a:endParaRPr lang="en-KR"/>
+          </a:p>
+        </p:txBody>
+      </p:sp>
+      <p:sp>
+        <p:nvSpPr>
+          <p:cNvPr id="6" name="Text 4"/>
+          <p:cNvSpPr/>
+          <p:nvPr/>
+        </p:nvSpPr>
+        <p:spPr>
+          <a:xfrm>
+            <a:off x="466344" y="2057400"/>
+            <a:ext cx="1078992" cy="731520"/>
+          </a:xfrm>
+          <a:prstGeom prst="rect">
+            <a:avLst/>
+          </a:prstGeom>
+          <a:noFill/>
+          <a:ln/>
+        </p:spPr>
+        <p:txBody>
+          <a:bodyPr wrap="square" lIns="0" tIns="0" rIns="0" bIns="0" rtlCol="0" anchor="ctr"/>
+          <a:lstStyle/>
+          <a:p>
+            <a:pPr marL="0" indent="0" algn="ctr">
+              <a:buNone/>
+            </a:pPr>
+            <a:r>
+              <a:rPr lang="en-US" sz="1300" b="1" dirty="0">
+                <a:solidFill>
+                  <a:srgbClr val="FFFFFF"/>
+                </a:solidFill>
+                <a:latin typeface="Calibri" pitchFamily="34" charset="0"/>
+                <a:ea typeface="Calibri" pitchFamily="34" charset="-122"/>
+                <a:cs typeface="Calibri" pitchFamily="34" charset="-120"/>
+              </a:rPr>
+              <a:t>Camera</a:t>
+            </a:r>
+            <a:endParaRPr lang="en-US" sz="1300" dirty="0"/>
+          </a:p>
+          <a:p>
+            <a:pPr marL="0" indent="0" algn="ctr">
+              <a:buNone/>
+            </a:pPr>
+            <a:r>
+              <a:rPr lang="en-US" sz="1300" b="1" dirty="0">
+                <a:solidFill>
+                  <a:srgbClr val="FFFFFF"/>
+                </a:solidFill>
+                <a:latin typeface="Calibri" pitchFamily="34" charset="0"/>
+                <a:ea typeface="Calibri" pitchFamily="34" charset="-122"/>
+                <a:cs typeface="Calibri" pitchFamily="34" charset="-120"/>
+              </a:rPr>
+              <a:t>(CameraX)</a:t>
+            </a:r>
+            <a:endParaRPr lang="en-US" sz="1300" dirty="0"/>
+          </a:p>
+        </p:txBody>
+      </p:sp>
+      <p:sp>
+        <p:nvSpPr>
+          <p:cNvPr id="7" name="Shape 5"/>
+          <p:cNvSpPr/>
+          <p:nvPr/>
+        </p:nvSpPr>
+        <p:spPr>
+          <a:xfrm>
+            <a:off x="1545336" y="2423160"/>
+            <a:ext cx="109728" cy="0"/>
+          </a:xfrm>
+          <a:prstGeom prst="line">
+            <a:avLst/>
+          </a:prstGeom>
+          <a:noFill/>
+          <a:ln w="25400">
+            <a:solidFill>
+              <a:srgbClr val="4A5568"/>
+            </a:solidFill>
+            <a:prstDash val="solid"/>
+          </a:ln>
+        </p:spPr>
+        <p:txBody>
+          <a:bodyPr/>
+          <a:lstStyle/>
+          <a:p>
+            <a:endParaRPr lang="en-KR"/>
+          </a:p>
+        </p:txBody>
+      </p:sp>
+      <p:sp>
+        <p:nvSpPr>
+          <p:cNvPr id="8" name="Text 6"/>
+          <p:cNvSpPr/>
+          <p:nvPr/>
+        </p:nvSpPr>
+        <p:spPr>
+          <a:xfrm>
+            <a:off x="1545336" y="2286000"/>
+            <a:ext cx="109728" cy="274320"/>
+          </a:xfrm>
+          <a:prstGeom prst="rect">
+            <a:avLst/>
+          </a:prstGeom>
+          <a:noFill/>
+          <a:ln/>
+        </p:spPr>
+        <p:txBody>
+          <a:bodyPr wrap="square" lIns="0" tIns="0" rIns="0" bIns="0" rtlCol="0" anchor="ctr"/>
+          <a:lstStyle/>
+          <a:p>
+            <a:pPr marL="0" indent="0" algn="ctr">
+              <a:buNone/>
+            </a:pPr>
+            <a:r>
+              <a:rPr lang="en-US" sz="1200" dirty="0">
+                <a:solidFill>
+                  <a:srgbClr val="8892A4"/>
+                </a:solidFill>
+              </a:rPr>
+              <a:t>→</a:t>
+            </a:r>
+            <a:endParaRPr lang="en-US" sz="1200" dirty="0"/>
+          </a:p>
+        </p:txBody>
+      </p:sp>
+      <p:sp>
+        <p:nvSpPr>
+          <p:cNvPr id="9" name="Shape 7"/>
+          <p:cNvSpPr/>
+          <p:nvPr/>
+        </p:nvSpPr>
+        <p:spPr>
+          <a:xfrm>
+            <a:off x="1655064" y="1920240"/>
+            <a:ext cx="1078992" cy="1005840"/>
+          </a:xfrm>
+          <a:prstGeom prst="rect">
+            <a:avLst/>
+          </a:prstGeom>
+          <a:solidFill>
+            <a:srgbClr val="1C2236"/>
+          </a:solidFill>
+          <a:ln w="12700">
+            <a:solidFill>
+              <a:srgbClr val="252D42"/>
+            </a:solidFill>
+            <a:prstDash val="solid"/>
+          </a:ln>
+          <a:effectLst>
+            <a:outerShdw blurRad="101600" dist="25400" dir="8100000" algn="bl" rotWithShape="0">
+              <a:srgbClr val="000000">
+                <a:alpha val="25000"/>
+              </a:srgbClr>
+            </a:outerShdw>
+          </a:effectLst>
+        </p:spPr>
+        <p:txBody>
+          <a:bodyPr/>
+          <a:lstStyle/>
+          <a:p>
+            <a:endParaRPr lang="en-KR"/>
+          </a:p>
+        </p:txBody>
+      </p:sp>
+      <p:sp>
+        <p:nvSpPr>
+          <p:cNvPr id="10" name="Shape 8"/>
+          <p:cNvSpPr/>
+          <p:nvPr/>
+        </p:nvSpPr>
+        <p:spPr>
+          <a:xfrm>
+            <a:off x="1655064" y="1920240"/>
+            <a:ext cx="1078992" cy="54864"/>
+          </a:xfrm>
+          <a:prstGeom prst="rect">
+            <a:avLst/>
+          </a:prstGeom>
+          <a:solidFill>
+            <a:srgbClr val="00ACC1"/>
+          </a:solidFill>
+          <a:ln w="12700">
+            <a:solidFill>
+              <a:srgbClr val="00ACC1"/>
+            </a:solidFill>
+            <a:prstDash val="solid"/>
+          </a:ln>
+        </p:spPr>
+        <p:txBody>
+          <a:bodyPr/>
+          <a:lstStyle/>
+          <a:p>
+            <a:endParaRPr lang="en-KR"/>
+          </a:p>
+        </p:txBody>
+      </p:sp>
+      <p:sp>
+        <p:nvSpPr>
+          <p:cNvPr id="11" name="Text 9"/>
+          <p:cNvSpPr/>
+          <p:nvPr/>
+        </p:nvSpPr>
+        <p:spPr>
+          <a:xfrm>
+            <a:off x="1655064" y="2057400"/>
+            <a:ext cx="1078992" cy="731520"/>
+          </a:xfrm>
+          <a:prstGeom prst="rect">
+            <a:avLst/>
+          </a:prstGeom>
+          <a:noFill/>
+          <a:ln/>
+        </p:spPr>
+        <p:txBody>
+          <a:bodyPr wrap="square" lIns="0" tIns="0" rIns="0" bIns="0" rtlCol="0" anchor="ctr"/>
+          <a:lstStyle/>
+          <a:p>
+            <a:pPr marL="0" indent="0" algn="ctr">
+              <a:buNone/>
+            </a:pPr>
+            <a:r>
+              <a:rPr lang="en-US" sz="1300" b="1" dirty="0">
+                <a:solidFill>
+                  <a:srgbClr val="FFFFFF"/>
+                </a:solidFill>
+                <a:latin typeface="Calibri" pitchFamily="34" charset="0"/>
+                <a:ea typeface="Calibri" pitchFamily="34" charset="-122"/>
+                <a:cs typeface="Calibri" pitchFamily="34" charset="-120"/>
+              </a:rPr>
+              <a:t>Frame</a:t>
+            </a:r>
+            <a:endParaRPr lang="en-US" sz="1300" dirty="0"/>
+          </a:p>
+          <a:p>
+            <a:pPr marL="0" indent="0" algn="ctr">
+              <a:buNone/>
+            </a:pPr>
+            <a:r>
+              <a:rPr lang="en-US" sz="1300" b="1" dirty="0">
+                <a:solidFill>
+                  <a:srgbClr val="FFFFFF"/>
+                </a:solidFill>
+                <a:latin typeface="Calibri" pitchFamily="34" charset="0"/>
+                <a:ea typeface="Calibri" pitchFamily="34" charset="-122"/>
+                <a:cs typeface="Calibri" pitchFamily="34" charset="-120"/>
+              </a:rPr>
+              <a:t>Sampler</a:t>
+            </a:r>
+            <a:endParaRPr lang="en-US" sz="1300" dirty="0"/>
+          </a:p>
+        </p:txBody>
+      </p:sp>
+      <p:sp>
+        <p:nvSpPr>
+          <p:cNvPr id="12" name="Shape 10"/>
+          <p:cNvSpPr/>
+          <p:nvPr/>
+        </p:nvSpPr>
+        <p:spPr>
+          <a:xfrm>
+            <a:off x="2734056" y="2423160"/>
+            <a:ext cx="109728" cy="0"/>
+          </a:xfrm>
+          <a:prstGeom prst="line">
+            <a:avLst/>
+          </a:prstGeom>
+          <a:noFill/>
+          <a:ln w="25400">
+            <a:solidFill>
+              <a:srgbClr val="4A5568"/>
+            </a:solidFill>
+            <a:prstDash val="solid"/>
+          </a:ln>
+        </p:spPr>
+        <p:txBody>
+          <a:bodyPr/>
+          <a:lstStyle/>
+          <a:p>
+            <a:endParaRPr lang="en-KR"/>
+          </a:p>
+        </p:txBody>
+      </p:sp>
+      <p:sp>
+        <p:nvSpPr>
+          <p:cNvPr id="13" name="Text 11"/>
+          <p:cNvSpPr/>
+          <p:nvPr/>
+        </p:nvSpPr>
+        <p:spPr>
+          <a:xfrm>
+            <a:off x="2734056" y="2286000"/>
+            <a:ext cx="109728" cy="274320"/>
+          </a:xfrm>
+          <a:prstGeom prst="rect">
+            <a:avLst/>
+          </a:prstGeom>
+          <a:noFill/>
+          <a:ln/>
+        </p:spPr>
+        <p:txBody>
+          <a:bodyPr wrap="square" lIns="0" tIns="0" rIns="0" bIns="0" rtlCol="0" anchor="ctr"/>
+          <a:lstStyle/>
+          <a:p>
+            <a:pPr marL="0" indent="0" algn="ctr">
+              <a:buNone/>
+            </a:pPr>
+            <a:r>
+              <a:rPr lang="en-US" sz="1200" dirty="0">
+                <a:solidFill>
+                  <a:srgbClr val="8892A4"/>
+                </a:solidFill>
+              </a:rPr>
+              <a:t>→</a:t>
+            </a:r>
+            <a:endParaRPr lang="en-US" sz="1200" dirty="0"/>
+          </a:p>
+        </p:txBody>
+      </p:sp>
+      <p:sp>
+        <p:nvSpPr>
+          <p:cNvPr id="14" name="Shape 12"/>
+          <p:cNvSpPr/>
+          <p:nvPr/>
+        </p:nvSpPr>
+        <p:spPr>
+          <a:xfrm>
+            <a:off x="2843784" y="1920240"/>
+            <a:ext cx="1078992" cy="1005840"/>
+          </a:xfrm>
+          <a:prstGeom prst="rect">
+            <a:avLst/>
+          </a:prstGeom>
+          <a:solidFill>
+            <a:srgbClr val="1C2236"/>
+          </a:solidFill>
+          <a:ln w="12700">
+            <a:solidFill>
+              <a:srgbClr val="252D42"/>
+            </a:solidFill>
+            <a:prstDash val="solid"/>
+          </a:ln>
+          <a:effectLst>
+            <a:outerShdw blurRad="101600" dist="25400" dir="8100000" algn="bl" rotWithShape="0">
+              <a:srgbClr val="000000">
+                <a:alpha val="25000"/>
+              </a:srgbClr>
+            </a:outerShdw>
+          </a:effectLst>
+        </p:spPr>
+        <p:txBody>
+          <a:bodyPr/>
+          <a:lstStyle/>
+          <a:p>
+            <a:endParaRPr lang="en-KR"/>
+          </a:p>
+        </p:txBody>
+      </p:sp>
+      <p:sp>
+        <p:nvSpPr>
+          <p:cNvPr id="15" name="Shape 13"/>
+          <p:cNvSpPr/>
+          <p:nvPr/>
+        </p:nvSpPr>
+        <p:spPr>
+          <a:xfrm>
+            <a:off x="2843784" y="1920240"/>
+            <a:ext cx="1078992" cy="54864"/>
+          </a:xfrm>
+          <a:prstGeom prst="rect">
+            <a:avLst/>
+          </a:prstGeom>
+          <a:solidFill>
+            <a:srgbClr val="1565C0"/>
+          </a:solidFill>
+          <a:ln w="12700">
+            <a:solidFill>
+              <a:srgbClr val="1565C0"/>
+            </a:solidFill>
+            <a:prstDash val="solid"/>
+          </a:ln>
+        </p:spPr>
+        <p:txBody>
+          <a:bodyPr/>
+          <a:lstStyle/>
+          <a:p>
+            <a:endParaRPr lang="en-KR"/>
+          </a:p>
+        </p:txBody>
+      </p:sp>
+      <p:sp>
+        <p:nvSpPr>
+          <p:cNvPr id="16" name="Text 14"/>
+          <p:cNvSpPr/>
+          <p:nvPr/>
+        </p:nvSpPr>
+        <p:spPr>
+          <a:xfrm>
+            <a:off x="2843784" y="2057400"/>
+            <a:ext cx="1078992" cy="731520"/>
+          </a:xfrm>
+          <a:prstGeom prst="rect">
+            <a:avLst/>
+          </a:prstGeom>
+          <a:noFill/>
+          <a:ln/>
+        </p:spPr>
+        <p:txBody>
+          <a:bodyPr wrap="square" lIns="0" tIns="0" rIns="0" bIns="0" rtlCol="0" anchor="ctr"/>
+          <a:lstStyle/>
+          <a:p>
+            <a:pPr marL="0" indent="0" algn="ctr">
+              <a:buNone/>
+            </a:pPr>
+            <a:r>
+              <a:rPr lang="en-US" sz="1300" b="1" dirty="0">
+                <a:solidFill>
+                  <a:srgbClr val="FFFFFF"/>
+                </a:solidFill>
+                <a:latin typeface="Calibri" pitchFamily="34" charset="0"/>
+                <a:ea typeface="Calibri" pitchFamily="34" charset="-122"/>
+                <a:cs typeface="Calibri" pitchFamily="34" charset="-120"/>
+              </a:rPr>
+              <a:t>MoveNet</a:t>
+            </a:r>
+            <a:endParaRPr lang="en-US" sz="1300" dirty="0"/>
+          </a:p>
+          <a:p>
+            <a:pPr marL="0" indent="0" algn="ctr">
+              <a:buNone/>
+            </a:pPr>
+            <a:r>
+              <a:rPr lang="en-US" sz="1300" b="1" dirty="0">
+                <a:solidFill>
+                  <a:srgbClr val="FFFFFF"/>
+                </a:solidFill>
+                <a:latin typeface="Calibri" pitchFamily="34" charset="0"/>
+                <a:ea typeface="Calibri" pitchFamily="34" charset="-122"/>
+                <a:cs typeface="Calibri" pitchFamily="34" charset="-120"/>
+              </a:rPr>
+              <a:t>Lightning</a:t>
+            </a:r>
+            <a:endParaRPr lang="en-US" sz="1300" dirty="0"/>
+          </a:p>
+        </p:txBody>
+      </p:sp>
+      <p:sp>
+        <p:nvSpPr>
+          <p:cNvPr id="17" name="Shape 15"/>
+          <p:cNvSpPr/>
+          <p:nvPr/>
+        </p:nvSpPr>
+        <p:spPr>
+          <a:xfrm>
+            <a:off x="3922776" y="2423160"/>
+            <a:ext cx="109728" cy="0"/>
+          </a:xfrm>
+          <a:prstGeom prst="line">
+            <a:avLst/>
+          </a:prstGeom>
+          <a:noFill/>
+          <a:ln w="25400">
+            <a:solidFill>
+              <a:srgbClr val="4A5568"/>
+            </a:solidFill>
+            <a:prstDash val="solid"/>
+          </a:ln>
+        </p:spPr>
+        <p:txBody>
+          <a:bodyPr/>
+          <a:lstStyle/>
+          <a:p>
+            <a:endParaRPr lang="en-KR"/>
+          </a:p>
+        </p:txBody>
+      </p:sp>
+      <p:sp>
+        <p:nvSpPr>
+          <p:cNvPr id="18" name="Text 16"/>
+          <p:cNvSpPr/>
+          <p:nvPr/>
+        </p:nvSpPr>
+        <p:spPr>
+          <a:xfrm>
+            <a:off x="3922776" y="2286000"/>
+            <a:ext cx="109728" cy="274320"/>
+          </a:xfrm>
+          <a:prstGeom prst="rect">
+            <a:avLst/>
+          </a:prstGeom>
+          <a:noFill/>
+          <a:ln/>
+        </p:spPr>
+        <p:txBody>
+          <a:bodyPr wrap="square" lIns="0" tIns="0" rIns="0" bIns="0" rtlCol="0" anchor="ctr"/>
+          <a:lstStyle/>
+          <a:p>
+            <a:pPr marL="0" indent="0" algn="ctr">
+              <a:buNone/>
+            </a:pPr>
+            <a:r>
+              <a:rPr lang="en-US" sz="1200" dirty="0">
+                <a:solidFill>
+                  <a:srgbClr val="8892A4"/>
+                </a:solidFill>
+              </a:rPr>
+              <a:t>→</a:t>
+            </a:r>
+            <a:endParaRPr lang="en-US" sz="1200" dirty="0"/>
+          </a:p>
+        </p:txBody>
+      </p:sp>
+      <p:sp>
+        <p:nvSpPr>
+          <p:cNvPr id="19" name="Shape 17"/>
+          <p:cNvSpPr/>
+          <p:nvPr/>
+        </p:nvSpPr>
+        <p:spPr>
+          <a:xfrm>
+            <a:off x="4032504" y="1920240"/>
+            <a:ext cx="1078992" cy="1005840"/>
+          </a:xfrm>
+          <a:prstGeom prst="rect">
+            <a:avLst/>
+          </a:prstGeom>
+          <a:solidFill>
+            <a:srgbClr val="1C2236"/>
+          </a:solidFill>
+          <a:ln w="12700">
+            <a:solidFill>
+              <a:srgbClr val="252D42"/>
+            </a:solidFill>
+            <a:prstDash val="solid"/>
+          </a:ln>
+          <a:effectLst>
+            <a:outerShdw blurRad="101600" dist="25400" dir="8100000" algn="bl" rotWithShape="0">
+              <a:srgbClr val="000000">
+                <a:alpha val="25000"/>
+              </a:srgbClr>
+            </a:outerShdw>
+          </a:effectLst>
+        </p:spPr>
+        <p:txBody>
+          <a:bodyPr/>
+          <a:lstStyle/>
+          <a:p>
+            <a:endParaRPr lang="en-KR"/>
+          </a:p>
+        </p:txBody>
+      </p:sp>
+      <p:sp>
+        <p:nvSpPr>
+          <p:cNvPr id="20" name="Shape 18"/>
+          <p:cNvSpPr/>
+          <p:nvPr/>
+        </p:nvSpPr>
+        <p:spPr>
+          <a:xfrm>
+            <a:off x="4032504" y="1920240"/>
+            <a:ext cx="1078992" cy="54864"/>
+          </a:xfrm>
+          <a:prstGeom prst="rect">
+            <a:avLst/>
+          </a:prstGeom>
+          <a:solidFill>
+            <a:srgbClr val="1976D2"/>
+          </a:solidFill>
+          <a:ln w="12700">
+            <a:solidFill>
+              <a:srgbClr val="1976D2"/>
+            </a:solidFill>
+            <a:prstDash val="solid"/>
+          </a:ln>
+        </p:spPr>
+        <p:txBody>
+          <a:bodyPr/>
+          <a:lstStyle/>
+          <a:p>
+            <a:endParaRPr lang="en-KR"/>
+          </a:p>
+        </p:txBody>
+      </p:sp>
+      <p:sp>
+        <p:nvSpPr>
+          <p:cNvPr id="21" name="Text 19"/>
+          <p:cNvSpPr/>
+          <p:nvPr/>
+        </p:nvSpPr>
+        <p:spPr>
+          <a:xfrm>
+            <a:off x="4032504" y="2057400"/>
+            <a:ext cx="1078992" cy="731520"/>
+          </a:xfrm>
+          <a:prstGeom prst="rect">
+            <a:avLst/>
+          </a:prstGeom>
+          <a:noFill/>
+          <a:ln/>
+        </p:spPr>
+        <p:txBody>
+          <a:bodyPr wrap="square" lIns="0" tIns="0" rIns="0" bIns="0" rtlCol="0" anchor="ctr"/>
+          <a:lstStyle/>
+          <a:p>
+            <a:pPr marL="0" indent="0" algn="ctr">
+              <a:buNone/>
+            </a:pPr>
+            <a:r>
+              <a:rPr lang="en-US" sz="1300" b="1" dirty="0">
+                <a:solidFill>
+                  <a:srgbClr val="FFFFFF"/>
+                </a:solidFill>
+                <a:latin typeface="Calibri" pitchFamily="34" charset="0"/>
+                <a:ea typeface="Calibri" pitchFamily="34" charset="-122"/>
+                <a:cs typeface="Calibri" pitchFamily="34" charset="-120"/>
+              </a:rPr>
+              <a:t>Keypoint</a:t>
+            </a:r>
+            <a:endParaRPr lang="en-US" sz="1300" dirty="0"/>
+          </a:p>
+          <a:p>
+            <a:pPr marL="0" indent="0" algn="ctr">
+              <a:buNone/>
+            </a:pPr>
+            <a:r>
+              <a:rPr lang="en-US" sz="1300" b="1" dirty="0">
+                <a:solidFill>
+                  <a:srgbClr val="FFFFFF"/>
+                </a:solidFill>
+                <a:latin typeface="Calibri" pitchFamily="34" charset="0"/>
+                <a:ea typeface="Calibri" pitchFamily="34" charset="-122"/>
+                <a:cs typeface="Calibri" pitchFamily="34" charset="-120"/>
+              </a:rPr>
+              <a:t>Buffer</a:t>
+            </a:r>
+            <a:endParaRPr lang="en-US" sz="1300" dirty="0"/>
+          </a:p>
+        </p:txBody>
+      </p:sp>
+      <p:sp>
+        <p:nvSpPr>
+          <p:cNvPr id="22" name="Shape 20"/>
+          <p:cNvSpPr/>
+          <p:nvPr/>
+        </p:nvSpPr>
+        <p:spPr>
+          <a:xfrm>
+            <a:off x="5111496" y="2423160"/>
+            <a:ext cx="109728" cy="0"/>
+          </a:xfrm>
+          <a:prstGeom prst="line">
+            <a:avLst/>
+          </a:prstGeom>
+          <a:noFill/>
+          <a:ln w="25400">
+            <a:solidFill>
+              <a:srgbClr val="4A5568"/>
+            </a:solidFill>
+            <a:prstDash val="solid"/>
+          </a:ln>
+        </p:spPr>
+        <p:txBody>
+          <a:bodyPr/>
+          <a:lstStyle/>
+          <a:p>
+            <a:endParaRPr lang="en-KR"/>
+          </a:p>
+        </p:txBody>
+      </p:sp>
+      <p:sp>
+        <p:nvSpPr>
+          <p:cNvPr id="23" name="Text 21"/>
+          <p:cNvSpPr/>
+          <p:nvPr/>
+        </p:nvSpPr>
+        <p:spPr>
+          <a:xfrm>
+            <a:off x="5111496" y="2286000"/>
+            <a:ext cx="109728" cy="274320"/>
+          </a:xfrm>
+          <a:prstGeom prst="rect">
+            <a:avLst/>
+          </a:prstGeom>
+          <a:noFill/>
+          <a:ln/>
+        </p:spPr>
+        <p:txBody>
+          <a:bodyPr wrap="square" lIns="0" tIns="0" rIns="0" bIns="0" rtlCol="0" anchor="ctr"/>
+          <a:lstStyle/>
+          <a:p>
+            <a:pPr marL="0" indent="0" algn="ctr">
+              <a:buNone/>
+            </a:pPr>
+            <a:r>
+              <a:rPr lang="en-US" sz="1200" dirty="0">
+                <a:solidFill>
+                  <a:srgbClr val="8892A4"/>
+                </a:solidFill>
+              </a:rPr>
+              <a:t>→</a:t>
+            </a:r>
+            <a:endParaRPr lang="en-US" sz="1200" dirty="0"/>
+          </a:p>
+        </p:txBody>
+      </p:sp>
+      <p:sp>
+        <p:nvSpPr>
+          <p:cNvPr id="24" name="Shape 22"/>
+          <p:cNvSpPr/>
+          <p:nvPr/>
+        </p:nvSpPr>
+        <p:spPr>
+          <a:xfrm>
+            <a:off x="5221224" y="1920240"/>
+            <a:ext cx="1078992" cy="1005840"/>
+          </a:xfrm>
+          <a:prstGeom prst="rect">
+            <a:avLst/>
+          </a:prstGeom>
+          <a:solidFill>
+            <a:srgbClr val="1C2236"/>
+          </a:solidFill>
+          <a:ln w="12700">
+            <a:solidFill>
+              <a:srgbClr val="252D42"/>
+            </a:solidFill>
+            <a:prstDash val="solid"/>
+          </a:ln>
+          <a:effectLst>
+            <a:outerShdw blurRad="101600" dist="25400" dir="8100000" algn="bl" rotWithShape="0">
+              <a:srgbClr val="000000">
+                <a:alpha val="25000"/>
+              </a:srgbClr>
+            </a:outerShdw>
+          </a:effectLst>
+        </p:spPr>
+        <p:txBody>
+          <a:bodyPr/>
+          <a:lstStyle/>
+          <a:p>
+            <a:endParaRPr lang="en-KR"/>
+          </a:p>
+        </p:txBody>
+      </p:sp>
+      <p:sp>
+        <p:nvSpPr>
+          <p:cNvPr id="25" name="Shape 23"/>
+          <p:cNvSpPr/>
+          <p:nvPr/>
+        </p:nvSpPr>
+        <p:spPr>
+          <a:xfrm>
+            <a:off x="5221224" y="1920240"/>
+            <a:ext cx="1078992" cy="54864"/>
+          </a:xfrm>
+          <a:prstGeom prst="rect">
+            <a:avLst/>
+          </a:prstGeom>
+          <a:solidFill>
+            <a:srgbClr val="FFB300"/>
+          </a:solidFill>
+          <a:ln w="12700">
+            <a:solidFill>
+              <a:srgbClr val="FFB300"/>
+            </a:solidFill>
+            <a:prstDash val="solid"/>
+          </a:ln>
+        </p:spPr>
+        <p:txBody>
+          <a:bodyPr/>
+          <a:lstStyle/>
+          <a:p>
+            <a:endParaRPr lang="en-KR"/>
+          </a:p>
+        </p:txBody>
+      </p:sp>
+      <p:sp>
+        <p:nvSpPr>
+          <p:cNvPr id="26" name="Text 24"/>
+          <p:cNvSpPr/>
+          <p:nvPr/>
+        </p:nvSpPr>
+        <p:spPr>
+          <a:xfrm>
+            <a:off x="5221224" y="2057400"/>
+            <a:ext cx="1078992" cy="731520"/>
+          </a:xfrm>
+          <a:prstGeom prst="rect">
+            <a:avLst/>
+          </a:prstGeom>
+          <a:noFill/>
+          <a:ln/>
+        </p:spPr>
+        <p:txBody>
+          <a:bodyPr wrap="square" lIns="0" tIns="0" rIns="0" bIns="0" rtlCol="0" anchor="ctr"/>
+          <a:lstStyle/>
+          <a:p>
+            <a:pPr marL="0" indent="0" algn="ctr">
+              <a:buNone/>
+            </a:pPr>
+            <a:r>
+              <a:rPr lang="en-US" sz="1300" b="1" dirty="0">
+                <a:solidFill>
+                  <a:srgbClr val="FFFFFF"/>
+                </a:solidFill>
+                <a:latin typeface="Calibri" pitchFamily="34" charset="0"/>
+                <a:ea typeface="Calibri" pitchFamily="34" charset="-122"/>
+                <a:cs typeface="Calibri" pitchFamily="34" charset="-120"/>
+              </a:rPr>
+              <a:t>Feature</a:t>
+            </a:r>
+            <a:endParaRPr lang="en-US" sz="1300" dirty="0"/>
+          </a:p>
+          <a:p>
+            <a:pPr marL="0" indent="0" algn="ctr">
+              <a:buNone/>
+            </a:pPr>
+            <a:r>
+              <a:rPr lang="en-US" sz="1300" b="1" dirty="0">
+                <a:solidFill>
+                  <a:srgbClr val="FFFFFF"/>
+                </a:solidFill>
+                <a:latin typeface="Calibri" pitchFamily="34" charset="0"/>
+                <a:ea typeface="Calibri" pitchFamily="34" charset="-122"/>
+                <a:cs typeface="Calibri" pitchFamily="34" charset="-120"/>
+              </a:rPr>
+              <a:t>Extractor</a:t>
+            </a:r>
+            <a:endParaRPr lang="en-US" sz="1300" dirty="0"/>
+          </a:p>
+        </p:txBody>
+      </p:sp>
+      <p:sp>
+        <p:nvSpPr>
+          <p:cNvPr id="27" name="Shape 25"/>
+          <p:cNvSpPr/>
+          <p:nvPr/>
+        </p:nvSpPr>
+        <p:spPr>
+          <a:xfrm>
+            <a:off x="6300216" y="2423160"/>
+            <a:ext cx="109728" cy="0"/>
+          </a:xfrm>
+          <a:prstGeom prst="line">
+            <a:avLst/>
+          </a:prstGeom>
+          <a:noFill/>
+          <a:ln w="25400">
+            <a:solidFill>
+              <a:srgbClr val="4A5568"/>
+            </a:solidFill>
+            <a:prstDash val="solid"/>
+          </a:ln>
+        </p:spPr>
+        <p:txBody>
+          <a:bodyPr/>
+          <a:lstStyle/>
+          <a:p>
+            <a:endParaRPr lang="en-KR"/>
+          </a:p>
+        </p:txBody>
+      </p:sp>
+      <p:sp>
+        <p:nvSpPr>
+          <p:cNvPr id="28" name="Text 26"/>
+          <p:cNvSpPr/>
+          <p:nvPr/>
+        </p:nvSpPr>
+        <p:spPr>
+          <a:xfrm>
+            <a:off x="6300216" y="2286000"/>
+            <a:ext cx="109728" cy="274320"/>
+          </a:xfrm>
+          <a:prstGeom prst="rect">
+            <a:avLst/>
+          </a:prstGeom>
+          <a:noFill/>
+          <a:ln/>
+        </p:spPr>
+        <p:txBody>
+          <a:bodyPr wrap="square" lIns="0" tIns="0" rIns="0" bIns="0" rtlCol="0" anchor="ctr"/>
+          <a:lstStyle/>
+          <a:p>
+            <a:pPr marL="0" indent="0" algn="ctr">
+              <a:buNone/>
+            </a:pPr>
+            <a:r>
+              <a:rPr lang="en-US" sz="1200" dirty="0">
+                <a:solidFill>
+                  <a:srgbClr val="8892A4"/>
+                </a:solidFill>
+              </a:rPr>
+              <a:t>→</a:t>
+            </a:r>
+            <a:endParaRPr lang="en-US" sz="1200" dirty="0"/>
+          </a:p>
+        </p:txBody>
+      </p:sp>
+      <p:sp>
+        <p:nvSpPr>
+          <p:cNvPr id="29" name="Shape 27"/>
+          <p:cNvSpPr/>
+          <p:nvPr/>
+        </p:nvSpPr>
+        <p:spPr>
+          <a:xfrm>
+            <a:off x="6409944" y="1920240"/>
+            <a:ext cx="1078992" cy="1005840"/>
+          </a:xfrm>
+          <a:prstGeom prst="rect">
+            <a:avLst/>
+          </a:prstGeom>
+          <a:solidFill>
+            <a:srgbClr val="1C2236"/>
+          </a:solidFill>
+          <a:ln w="12700">
+            <a:solidFill>
+              <a:srgbClr val="252D42"/>
+            </a:solidFill>
+            <a:prstDash val="solid"/>
+          </a:ln>
+          <a:effectLst>
+            <a:outerShdw blurRad="101600" dist="25400" dir="8100000" algn="bl" rotWithShape="0">
+              <a:srgbClr val="000000">
+                <a:alpha val="25000"/>
+              </a:srgbClr>
+            </a:outerShdw>
+          </a:effectLst>
+        </p:spPr>
+        <p:txBody>
+          <a:bodyPr/>
+          <a:lstStyle/>
+          <a:p>
+            <a:endParaRPr lang="en-KR"/>
+          </a:p>
+        </p:txBody>
+      </p:sp>
+      <p:sp>
+        <p:nvSpPr>
+          <p:cNvPr id="30" name="Shape 28"/>
+          <p:cNvSpPr/>
+          <p:nvPr/>
+        </p:nvSpPr>
+        <p:spPr>
+          <a:xfrm>
+            <a:off x="6409944" y="1920240"/>
+            <a:ext cx="1078992" cy="54864"/>
+          </a:xfrm>
+          <a:prstGeom prst="rect">
+            <a:avLst/>
+          </a:prstGeom>
+          <a:solidFill>
+            <a:srgbClr val="FFB300"/>
+          </a:solidFill>
+          <a:ln w="12700">
+            <a:solidFill>
+              <a:srgbClr val="FFB300"/>
+            </a:solidFill>
+            <a:prstDash val="solid"/>
+          </a:ln>
+        </p:spPr>
+        <p:txBody>
+          <a:bodyPr/>
+          <a:lstStyle/>
+          <a:p>
+            <a:endParaRPr lang="en-KR"/>
+          </a:p>
+        </p:txBody>
+      </p:sp>
+      <p:sp>
+        <p:nvSpPr>
+          <p:cNvPr id="31" name="Text 29"/>
+          <p:cNvSpPr/>
+          <p:nvPr/>
+        </p:nvSpPr>
+        <p:spPr>
+          <a:xfrm>
+            <a:off x="6409944" y="2057400"/>
+            <a:ext cx="1078992" cy="731520"/>
+          </a:xfrm>
+          <a:prstGeom prst="rect">
+            <a:avLst/>
+          </a:prstGeom>
+          <a:noFill/>
+          <a:ln/>
+        </p:spPr>
+        <p:txBody>
+          <a:bodyPr wrap="square" lIns="0" tIns="0" rIns="0" bIns="0" rtlCol="0" anchor="ctr"/>
+          <a:lstStyle/>
+          <a:p>
+            <a:pPr marL="0" indent="0" algn="ctr">
+              <a:buNone/>
+            </a:pPr>
+            <a:r>
+              <a:rPr lang="en-US" sz="1300" b="1" dirty="0">
+                <a:solidFill>
+                  <a:srgbClr val="FFFFFF"/>
+                </a:solidFill>
+                <a:latin typeface="Calibri" pitchFamily="34" charset="0"/>
+                <a:ea typeface="Calibri" pitchFamily="34" charset="-122"/>
+                <a:cs typeface="Calibri" pitchFamily="34" charset="-120"/>
+              </a:rPr>
+              <a:t>Claude</a:t>
+            </a:r>
+            <a:endParaRPr lang="en-US" sz="1300" dirty="0"/>
+          </a:p>
+          <a:p>
+            <a:pPr marL="0" indent="0" algn="ctr">
+              <a:buNone/>
+            </a:pPr>
+            <a:r>
+              <a:rPr lang="en-US" sz="1300" b="1" dirty="0">
+                <a:solidFill>
+                  <a:srgbClr val="FFFFFF"/>
+                </a:solidFill>
+                <a:latin typeface="Calibri" pitchFamily="34" charset="0"/>
+                <a:ea typeface="Calibri" pitchFamily="34" charset="-122"/>
+                <a:cs typeface="Calibri" pitchFamily="34" charset="-120"/>
+              </a:rPr>
+              <a:t>Haiku API</a:t>
+            </a:r>
+            <a:endParaRPr lang="en-US" sz="1300" dirty="0"/>
+          </a:p>
+        </p:txBody>
+      </p:sp>
+      <p:sp>
+        <p:nvSpPr>
+          <p:cNvPr id="32" name="Shape 30"/>
+          <p:cNvSpPr/>
+          <p:nvPr/>
+        </p:nvSpPr>
+        <p:spPr>
+          <a:xfrm>
+            <a:off x="7488936" y="2423160"/>
+            <a:ext cx="109728" cy="0"/>
+          </a:xfrm>
+          <a:prstGeom prst="line">
+            <a:avLst/>
+          </a:prstGeom>
+          <a:noFill/>
+          <a:ln w="25400">
+            <a:solidFill>
+              <a:srgbClr val="4A5568"/>
+            </a:solidFill>
+            <a:prstDash val="solid"/>
+          </a:ln>
+        </p:spPr>
+        <p:txBody>
+          <a:bodyPr/>
+          <a:lstStyle/>
+          <a:p>
+            <a:endParaRPr lang="en-KR"/>
+          </a:p>
+        </p:txBody>
+      </p:sp>
+      <p:sp>
+        <p:nvSpPr>
+          <p:cNvPr id="33" name="Text 31"/>
+          <p:cNvSpPr/>
+          <p:nvPr/>
+        </p:nvSpPr>
+        <p:spPr>
+          <a:xfrm>
+            <a:off x="7488936" y="2286000"/>
+            <a:ext cx="109728" cy="274320"/>
+          </a:xfrm>
+          <a:prstGeom prst="rect">
+            <a:avLst/>
+          </a:prstGeom>
+          <a:noFill/>
+          <a:ln/>
+        </p:spPr>
+        <p:txBody>
+          <a:bodyPr wrap="square" lIns="0" tIns="0" rIns="0" bIns="0" rtlCol="0" anchor="ctr"/>
+          <a:lstStyle/>
+          <a:p>
+            <a:pPr marL="0" indent="0" algn="ctr">
+              <a:buNone/>
+            </a:pPr>
+            <a:r>
+              <a:rPr lang="en-US" sz="1200" dirty="0">
+                <a:solidFill>
+                  <a:srgbClr val="8892A4"/>
+                </a:solidFill>
+              </a:rPr>
+              <a:t>→</a:t>
+            </a:r>
+            <a:endParaRPr lang="en-US" sz="1200" dirty="0"/>
+          </a:p>
+        </p:txBody>
+      </p:sp>
+      <p:sp>
+        <p:nvSpPr>
+          <p:cNvPr id="34" name="Shape 32"/>
+          <p:cNvSpPr/>
+          <p:nvPr/>
+        </p:nvSpPr>
+        <p:spPr>
+          <a:xfrm>
+            <a:off x="7598664" y="1920240"/>
+            <a:ext cx="1078992" cy="1005840"/>
+          </a:xfrm>
+          <a:prstGeom prst="rect">
+            <a:avLst/>
+          </a:prstGeom>
+          <a:solidFill>
+            <a:srgbClr val="1C2236"/>
+          </a:solidFill>
+          <a:ln w="12700">
+            <a:solidFill>
+              <a:srgbClr val="252D42"/>
+            </a:solidFill>
+            <a:prstDash val="solid"/>
+          </a:ln>
+          <a:effectLst>
+            <a:outerShdw blurRad="101600" dist="25400" dir="8100000" algn="bl" rotWithShape="0">
+              <a:srgbClr val="000000">
+                <a:alpha val="25000"/>
+              </a:srgbClr>
+            </a:outerShdw>
+          </a:effectLst>
+        </p:spPr>
+        <p:txBody>
+          <a:bodyPr/>
+          <a:lstStyle/>
+          <a:p>
+            <a:endParaRPr lang="en-KR"/>
+          </a:p>
+        </p:txBody>
+      </p:sp>
+      <p:sp>
+        <p:nvSpPr>
+          <p:cNvPr id="35" name="Shape 33"/>
+          <p:cNvSpPr/>
+          <p:nvPr/>
+        </p:nvSpPr>
+        <p:spPr>
+          <a:xfrm>
+            <a:off x="7598664" y="1920240"/>
+            <a:ext cx="1078992" cy="54864"/>
+          </a:xfrm>
+          <a:prstGeom prst="rect">
+            <a:avLst/>
+          </a:prstGeom>
+          <a:solidFill>
+            <a:srgbClr val="43A047"/>
+          </a:solidFill>
+          <a:ln w="12700">
+            <a:solidFill>
+              <a:srgbClr val="43A047"/>
+            </a:solidFill>
+            <a:prstDash val="solid"/>
+          </a:ln>
+        </p:spPr>
+        <p:txBody>
+          <a:bodyPr/>
+          <a:lstStyle/>
+          <a:p>
+            <a:endParaRPr lang="en-KR"/>
+          </a:p>
+        </p:txBody>
+      </p:sp>
+      <p:sp>
+        <p:nvSpPr>
+          <p:cNvPr id="36" name="Text 34"/>
+          <p:cNvSpPr/>
+          <p:nvPr/>
+        </p:nvSpPr>
+        <p:spPr>
+          <a:xfrm>
+            <a:off x="7598664" y="2057400"/>
+            <a:ext cx="1078992" cy="731520"/>
+          </a:xfrm>
+          <a:prstGeom prst="rect">
+            <a:avLst/>
+          </a:prstGeom>
+          <a:noFill/>
+          <a:ln/>
+        </p:spPr>
+        <p:txBody>
+          <a:bodyPr wrap="square" lIns="0" tIns="0" rIns="0" bIns="0" rtlCol="0" anchor="ctr"/>
+          <a:lstStyle/>
+          <a:p>
+            <a:pPr marL="0" indent="0" algn="ctr">
+              <a:buNone/>
+            </a:pPr>
+            <a:r>
+              <a:rPr lang="en-US" sz="1300" b="1" dirty="0">
+                <a:solidFill>
+                  <a:srgbClr val="FFFFFF"/>
+                </a:solidFill>
+                <a:latin typeface="Calibri" pitchFamily="34" charset="0"/>
+                <a:ea typeface="Calibri" pitchFamily="34" charset="-122"/>
+                <a:cs typeface="Calibri" pitchFamily="34" charset="-120"/>
+              </a:rPr>
+              <a:t>Results</a:t>
+            </a:r>
+            <a:endParaRPr lang="en-US" sz="1300" dirty="0"/>
+          </a:p>
+          <a:p>
+            <a:pPr marL="0" indent="0" algn="ctr">
+              <a:buNone/>
+            </a:pPr>
+            <a:r>
+              <a:rPr lang="en-US" sz="1300" b="1" dirty="0">
+                <a:solidFill>
+                  <a:srgbClr val="FFFFFF"/>
+                </a:solidFill>
+                <a:latin typeface="Calibri" pitchFamily="34" charset="0"/>
+                <a:ea typeface="Calibri" pitchFamily="34" charset="-122"/>
+                <a:cs typeface="Calibri" pitchFamily="34" charset="-120"/>
+              </a:rPr>
+              <a:t>Screen</a:t>
+            </a:r>
+            <a:endParaRPr lang="en-US" sz="1300" dirty="0"/>
+          </a:p>
+        </p:txBody>
+      </p:sp>
+      <p:sp>
+        <p:nvSpPr>
+          <p:cNvPr id="37" name="Text 35"/>
+          <p:cNvSpPr/>
+          <p:nvPr/>
+        </p:nvSpPr>
+        <p:spPr>
+          <a:xfrm>
+            <a:off x="466344" y="3063240"/>
+            <a:ext cx="1078992" cy="548640"/>
+          </a:xfrm>
+          <a:prstGeom prst="rect">
+            <a:avLst/>
+          </a:prstGeom>
+          <a:noFill/>
+          <a:ln/>
+        </p:spPr>
+        <p:txBody>
+          <a:bodyPr wrap="square" lIns="0" tIns="0" rIns="0" bIns="0" rtlCol="0" anchor="ctr"/>
+          <a:lstStyle/>
+          <a:p>
+            <a:pPr marL="0" indent="0" algn="ctr">
+              <a:buNone/>
+            </a:pPr>
+            <a:r>
+              <a:rPr lang="en-US" sz="1000" dirty="0">
+                <a:solidFill>
+                  <a:srgbClr val="8892A4"/>
+                </a:solidFill>
+                <a:latin typeface="Calibri" pitchFamily="34" charset="0"/>
+                <a:ea typeface="Calibri" pitchFamily="34" charset="-122"/>
+                <a:cs typeface="Calibri" pitchFamily="34" charset="-120"/>
+              </a:rPr>
+              <a:t>30fps front</a:t>
+            </a:r>
+            <a:endParaRPr lang="en-US" sz="1000" dirty="0"/>
+          </a:p>
+          <a:p>
+            <a:pPr marL="0" indent="0" algn="ctr">
+              <a:buNone/>
+            </a:pPr>
+            <a:r>
+              <a:rPr lang="en-US" sz="1000" dirty="0">
+                <a:solidFill>
+                  <a:srgbClr val="8892A4"/>
+                </a:solidFill>
+                <a:latin typeface="Calibri" pitchFamily="34" charset="0"/>
+                <a:ea typeface="Calibri" pitchFamily="34" charset="-122"/>
+                <a:cs typeface="Calibri" pitchFamily="34" charset="-120"/>
+              </a:rPr>
+              <a:t>camera feed</a:t>
+            </a:r>
+            <a:endParaRPr lang="en-US" sz="1000" dirty="0"/>
+          </a:p>
+        </p:txBody>
+      </p:sp>
+      <p:sp>
+        <p:nvSpPr>
+          <p:cNvPr id="38" name="Text 36"/>
+          <p:cNvSpPr/>
+          <p:nvPr/>
+        </p:nvSpPr>
+        <p:spPr>
+          <a:xfrm>
+            <a:off x="1655064" y="3063240"/>
+            <a:ext cx="1078992" cy="548640"/>
+          </a:xfrm>
+          <a:prstGeom prst="rect">
+            <a:avLst/>
+          </a:prstGeom>
+          <a:noFill/>
+          <a:ln/>
+        </p:spPr>
+        <p:txBody>
+          <a:bodyPr wrap="square" lIns="0" tIns="0" rIns="0" bIns="0" rtlCol="0" anchor="ctr"/>
+          <a:lstStyle/>
+          <a:p>
+            <a:pPr marL="0" indent="0" algn="ctr">
+              <a:buNone/>
+            </a:pPr>
+            <a:r>
+              <a:rPr lang="en-US" sz="1000" dirty="0">
+                <a:solidFill>
+                  <a:srgbClr val="8892A4"/>
+                </a:solidFill>
+                <a:latin typeface="Calibri" pitchFamily="34" charset="0"/>
+                <a:ea typeface="Calibri" pitchFamily="34" charset="-122"/>
+                <a:cs typeface="Calibri" pitchFamily="34" charset="-120"/>
+              </a:rPr>
+              <a:t>Every 10th</a:t>
+            </a:r>
+            <a:endParaRPr lang="en-US" sz="1000" dirty="0"/>
+          </a:p>
+          <a:p>
+            <a:pPr marL="0" indent="0" algn="ctr">
+              <a:buNone/>
+            </a:pPr>
+            <a:r>
+              <a:rPr lang="en-US" sz="1000" dirty="0">
+                <a:solidFill>
+                  <a:srgbClr val="8892A4"/>
+                </a:solidFill>
+                <a:latin typeface="Calibri" pitchFamily="34" charset="0"/>
+                <a:ea typeface="Calibri" pitchFamily="34" charset="-122"/>
+                <a:cs typeface="Calibri" pitchFamily="34" charset="-120"/>
+              </a:rPr>
+              <a:t>frame (3fps)</a:t>
+            </a:r>
+            <a:endParaRPr lang="en-US" sz="1000" dirty="0"/>
+          </a:p>
+        </p:txBody>
+      </p:sp>
+      <p:sp>
+        <p:nvSpPr>
+          <p:cNvPr id="39" name="Text 37"/>
+          <p:cNvSpPr/>
+          <p:nvPr/>
+        </p:nvSpPr>
+        <p:spPr>
+          <a:xfrm>
+            <a:off x="2843784" y="3063240"/>
+            <a:ext cx="1078992" cy="548640"/>
+          </a:xfrm>
+          <a:prstGeom prst="rect">
+            <a:avLst/>
+          </a:prstGeom>
+          <a:noFill/>
+          <a:ln/>
+        </p:spPr>
+        <p:txBody>
+          <a:bodyPr wrap="square" lIns="0" tIns="0" rIns="0" bIns="0" rtlCol="0" anchor="ctr"/>
+          <a:lstStyle/>
+          <a:p>
+            <a:pPr marL="0" indent="0" algn="ctr">
+              <a:buNone/>
+            </a:pPr>
+            <a:r>
+              <a:rPr lang="en-US" sz="1000" dirty="0">
+                <a:solidFill>
+                  <a:srgbClr val="8892A4"/>
+                </a:solidFill>
+                <a:latin typeface="Calibri" pitchFamily="34" charset="0"/>
+                <a:ea typeface="Calibri" pitchFamily="34" charset="-122"/>
+                <a:cs typeface="Calibri" pitchFamily="34" charset="-120"/>
+              </a:rPr>
+              <a:t>17 keypoints</a:t>
+            </a:r>
+            <a:endParaRPr lang="en-US" sz="1000" dirty="0"/>
+          </a:p>
+          <a:p>
+            <a:pPr marL="0" indent="0" algn="ctr">
+              <a:buNone/>
+            </a:pPr>
+            <a:r>
+              <a:rPr lang="en-US" sz="1000" dirty="0">
+                <a:solidFill>
+                  <a:srgbClr val="8892A4"/>
+                </a:solidFill>
+                <a:latin typeface="Calibri" pitchFamily="34" charset="0"/>
+                <a:ea typeface="Calibri" pitchFamily="34" charset="-122"/>
+                <a:cs typeface="Calibri" pitchFamily="34" charset="-120"/>
+              </a:rPr>
+              <a:t>@ 192×192px</a:t>
+            </a:r>
+            <a:endParaRPr lang="en-US" sz="1000" dirty="0"/>
+          </a:p>
+        </p:txBody>
+      </p:sp>
+      <p:sp>
+        <p:nvSpPr>
+          <p:cNvPr id="40" name="Text 38"/>
+          <p:cNvSpPr/>
+          <p:nvPr/>
+        </p:nvSpPr>
+        <p:spPr>
+          <a:xfrm>
+            <a:off x="4032504" y="3063240"/>
+            <a:ext cx="1078992" cy="548640"/>
+          </a:xfrm>
+          <a:prstGeom prst="rect">
+            <a:avLst/>
+          </a:prstGeom>
+          <a:noFill/>
+          <a:ln/>
+        </p:spPr>
+        <p:txBody>
+          <a:bodyPr wrap="square" lIns="0" tIns="0" rIns="0" bIns="0" rtlCol="0" anchor="ctr"/>
+          <a:lstStyle/>
+          <a:p>
+            <a:pPr marL="0" indent="0" algn="ctr">
+              <a:buNone/>
+            </a:pPr>
+            <a:r>
+              <a:rPr lang="en-US" sz="1000" dirty="0">
+                <a:solidFill>
+                  <a:srgbClr val="8892A4"/>
+                </a:solidFill>
+                <a:latin typeface="Calibri" pitchFamily="34" charset="0"/>
+                <a:ea typeface="Calibri" pitchFamily="34" charset="-122"/>
+                <a:cs typeface="Calibri" pitchFamily="34" charset="-120"/>
+              </a:rPr>
+              <a:t>Stores keypoints</a:t>
+            </a:r>
+            <a:endParaRPr lang="en-US" sz="1000" dirty="0"/>
+          </a:p>
+          <a:p>
+            <a:pPr marL="0" indent="0" algn="ctr">
+              <a:buNone/>
+            </a:pPr>
+            <a:r>
+              <a:rPr lang="en-US" sz="1000" dirty="0">
+                <a:solidFill>
+                  <a:srgbClr val="8892A4"/>
+                </a:solidFill>
+                <a:latin typeface="Calibri" pitchFamily="34" charset="0"/>
+                <a:ea typeface="Calibri" pitchFamily="34" charset="-122"/>
+                <a:cs typeface="Calibri" pitchFamily="34" charset="-120"/>
+              </a:rPr>
+              <a:t>+ timestamps</a:t>
+            </a:r>
+            <a:endParaRPr lang="en-US" sz="1000" dirty="0"/>
+          </a:p>
+        </p:txBody>
+      </p:sp>
+      <p:sp>
+        <p:nvSpPr>
+          <p:cNvPr id="41" name="Text 39"/>
+          <p:cNvSpPr/>
+          <p:nvPr/>
+        </p:nvSpPr>
+        <p:spPr>
+          <a:xfrm>
+            <a:off x="5221224" y="3063240"/>
+            <a:ext cx="1078992" cy="548640"/>
+          </a:xfrm>
+          <a:prstGeom prst="rect">
+            <a:avLst/>
+          </a:prstGeom>
+          <a:noFill/>
+          <a:ln/>
+        </p:spPr>
+        <p:txBody>
+          <a:bodyPr wrap="square" lIns="0" tIns="0" rIns="0" bIns="0" rtlCol="0" anchor="ctr"/>
+          <a:lstStyle/>
+          <a:p>
+            <a:pPr marL="0" indent="0" algn="ctr">
+              <a:buNone/>
+            </a:pPr>
+            <a:r>
+              <a:rPr lang="en-US" sz="1000" dirty="0">
+                <a:solidFill>
+                  <a:srgbClr val="8892A4"/>
+                </a:solidFill>
+                <a:latin typeface="Calibri" pitchFamily="34" charset="0"/>
+                <a:ea typeface="Calibri" pitchFamily="34" charset="-122"/>
+                <a:cs typeface="Calibri" pitchFamily="34" charset="-120"/>
+              </a:rPr>
+              <a:t>Velocity peaks</a:t>
+            </a:r>
+            <a:endParaRPr lang="en-US" sz="1000" dirty="0"/>
+          </a:p>
+          <a:p>
+            <a:pPr marL="0" indent="0" algn="ctr">
+              <a:buNone/>
+            </a:pPr>
+            <a:r>
+              <a:rPr lang="en-US" sz="1000" dirty="0">
+                <a:solidFill>
+                  <a:srgbClr val="8892A4"/>
+                </a:solidFill>
+                <a:latin typeface="Calibri" pitchFamily="34" charset="0"/>
+                <a:ea typeface="Calibri" pitchFamily="34" charset="-122"/>
+                <a:cs typeface="Calibri" pitchFamily="34" charset="-120"/>
+              </a:rPr>
+              <a:t>guard + shoulder</a:t>
+            </a:r>
+            <a:endParaRPr lang="en-US" sz="1000" dirty="0"/>
+          </a:p>
+        </p:txBody>
+      </p:sp>
+      <p:sp>
+        <p:nvSpPr>
+          <p:cNvPr id="42" name="Text 40"/>
+          <p:cNvSpPr/>
+          <p:nvPr/>
+        </p:nvSpPr>
+        <p:spPr>
+          <a:xfrm>
+            <a:off x="6409944" y="3063240"/>
+            <a:ext cx="1078992" cy="548640"/>
+          </a:xfrm>
+          <a:prstGeom prst="rect">
+            <a:avLst/>
+          </a:prstGeom>
+          <a:noFill/>
+          <a:ln/>
+        </p:spPr>
+        <p:txBody>
+          <a:bodyPr wrap="square" lIns="0" tIns="0" rIns="0" bIns="0" rtlCol="0" anchor="ctr"/>
+          <a:lstStyle/>
+          <a:p>
+            <a:pPr marL="0" indent="0" algn="ctr">
+              <a:buNone/>
+            </a:pPr>
+            <a:r>
+              <a:rPr lang="en-US" sz="1000" dirty="0">
+                <a:solidFill>
+                  <a:srgbClr val="8892A4"/>
+                </a:solidFill>
+                <a:latin typeface="Calibri" pitchFamily="34" charset="0"/>
+                <a:ea typeface="Calibri" pitchFamily="34" charset="-122"/>
+                <a:cs typeface="Calibri" pitchFamily="34" charset="-120"/>
+              </a:rPr>
+              <a:t>Motion summary</a:t>
+            </a:r>
+            <a:endParaRPr lang="en-US" sz="1000" dirty="0"/>
+          </a:p>
+          <a:p>
+            <a:pPr marL="0" indent="0" algn="ctr">
+              <a:buNone/>
+            </a:pPr>
+            <a:r>
+              <a:rPr lang="en-US" sz="1000" dirty="0">
+                <a:solidFill>
+                  <a:srgbClr val="8892A4"/>
+                </a:solidFill>
+                <a:latin typeface="Calibri" pitchFamily="34" charset="0"/>
+                <a:ea typeface="Calibri" pitchFamily="34" charset="-122"/>
+                <a:cs typeface="Calibri" pitchFamily="34" charset="-120"/>
+              </a:rPr>
+              <a:t>→ JSON output</a:t>
+            </a:r>
+            <a:endParaRPr lang="en-US" sz="1000" dirty="0"/>
+          </a:p>
+        </p:txBody>
+      </p:sp>
+      <p:sp>
+        <p:nvSpPr>
+          <p:cNvPr id="43" name="Text 41"/>
+          <p:cNvSpPr/>
+          <p:nvPr/>
+        </p:nvSpPr>
+        <p:spPr>
+          <a:xfrm>
+            <a:off x="7598664" y="3063240"/>
+            <a:ext cx="1078992" cy="548640"/>
+          </a:xfrm>
+          <a:prstGeom prst="rect">
+            <a:avLst/>
+          </a:prstGeom>
+          <a:noFill/>
+          <a:ln/>
+        </p:spPr>
+        <p:txBody>
+          <a:bodyPr wrap="square" lIns="0" tIns="0" rIns="0" bIns="0" rtlCol="0" anchor="ctr"/>
+          <a:lstStyle/>
+          <a:p>
+            <a:pPr marL="0" indent="0" algn="ctr">
+              <a:buNone/>
+            </a:pPr>
+            <a:r>
+              <a:rPr lang="en-US" sz="1000" dirty="0">
+                <a:solidFill>
+                  <a:srgbClr val="8892A4"/>
+                </a:solidFill>
+                <a:latin typeface="Calibri" pitchFamily="34" charset="0"/>
+                <a:ea typeface="Calibri" pitchFamily="34" charset="-122"/>
+                <a:cs typeface="Calibri" pitchFamily="34" charset="-120"/>
+              </a:rPr>
+              <a:t>Counts + feedback</a:t>
+            </a:r>
+            <a:endParaRPr lang="en-US" sz="1000" dirty="0"/>
+          </a:p>
+          <a:p>
+            <a:pPr marL="0" indent="0" algn="ctr">
+              <a:buNone/>
+            </a:pPr>
+            <a:r>
+              <a:rPr lang="en-US" sz="1000" dirty="0">
+                <a:solidFill>
+                  <a:srgbClr val="8892A4"/>
+                </a:solidFill>
+                <a:latin typeface="Calibri" pitchFamily="34" charset="0"/>
+                <a:ea typeface="Calibri" pitchFamily="34" charset="-122"/>
+                <a:cs typeface="Calibri" pitchFamily="34" charset="-120"/>
+              </a:rPr>
+              <a:t>+ guard tips</a:t>
+            </a:r>
+            <a:endParaRPr lang="en-US" sz="1000" dirty="0"/>
+          </a:p>
+        </p:txBody>
+      </p:sp>
+      <p:sp>
+        <p:nvSpPr>
+          <p:cNvPr id="44" name="Text 42"/>
+          <p:cNvSpPr/>
+          <p:nvPr/>
+        </p:nvSpPr>
+        <p:spPr>
+          <a:xfrm>
+            <a:off x="457200" y="4389120"/>
+            <a:ext cx="8229600" cy="274320"/>
+          </a:xfrm>
+          <a:prstGeom prst="rect">
+            <a:avLst/>
+          </a:prstGeom>
+          <a:noFill/>
+          <a:ln/>
+        </p:spPr>
+        <p:txBody>
+          <a:bodyPr wrap="square" lIns="0" tIns="0" rIns="0" bIns="0" rtlCol="0" anchor="ctr"/>
+          <a:lstStyle/>
+          <a:p>
+            <a:pPr marL="0" indent="0" algn="ctr">
+              <a:buNone/>
+            </a:pPr>
+            <a:r>
+              <a:rPr lang="en-US" sz="1100" i="1" dirty="0">
+                <a:solidFill>
+                  <a:srgbClr val="4A5568"/>
+                </a:solidFill>
+                <a:latin typeface="Calibri" pitchFamily="34" charset="0"/>
+                <a:ea typeface="Calibri" pitchFamily="34" charset="-122"/>
+                <a:cs typeface="Calibri" pitchFamily="34" charset="-120"/>
+              </a:rPr>
+              <a:t>MoveNet Lightning runs fully on-device (TFLite) · Claude API called once per session</a:t>
+            </a:r>
+            <a:endParaRPr lang="en-US" sz="1100" dirty="0"/>
+          </a:p>
+        </p:txBody>
+      </p:sp>
+    </p:spTree>
+  </p:cSld>
+  <p:clrMapOvr>
+    <a:masterClrMapping/>
+  </p:clrMapOvr>
+</p:sld>
+</file>
+
 <file path=ppt/slides/slide8.xml><?xml version="1.0" encoding="utf-8"?>
+<p:sld xmlns:a="http://schemas.openxmlformats.org/drawingml/2006/main" xmlns:r="http://schemas.openxmlformats.org/officeDocument/2006/relationships" xmlns:p="http://schemas.openxmlformats.org/presentationml/2006/main">
+  <p:cSld>
+    <p:bg>
+      <p:bgPr>
+        <a:solidFill>
+          <a:srgbClr val="090E1B"/>
+        </a:solidFill>
+        <a:effectLst/>
+      </p:bgPr>
+    </p:bg>
+    <p:spTree>
+      <p:nvGrpSpPr>
+        <p:cNvPr id="1" name=""/>
+        <p:cNvGrpSpPr/>
+        <p:nvPr/>
+      </p:nvGrpSpPr>
+      <p:grpSpPr>
+        <a:xfrm>
+          <a:off x="0" y="0"/>
+          <a:ext cx="0" cy="0"/>
+          <a:chOff x="0" y="0"/>
+          <a:chExt cx="0" cy="0"/>
+        </a:xfrm>
+      </p:grpSpPr>
+      <p:sp>
+        <p:nvSpPr>
+          <p:cNvPr id="2" name="Text 0"/>
+          <p:cNvSpPr/>
+          <p:nvPr/>
+        </p:nvSpPr>
+        <p:spPr>
+          <a:xfrm>
+            <a:off x="457200" y="320040"/>
+            <a:ext cx="8229600" cy="502920"/>
+          </a:xfrm>
+          <a:prstGeom prst="rect">
+            <a:avLst/>
+          </a:prstGeom>
+          <a:noFill/>
+          <a:ln/>
+        </p:spPr>
+        <p:txBody>
+          <a:bodyPr wrap="square" lIns="0" tIns="0" rIns="0" bIns="0" rtlCol="0" anchor="ctr"/>
+          <a:lstStyle/>
+          <a:p>
+            <a:pPr marL="0" indent="0" algn="l">
+              <a:buNone/>
+            </a:pPr>
+            <a:r>
+              <a:rPr lang="en-US" sz="2800" b="1" dirty="0">
+                <a:solidFill>
+                  <a:srgbClr val="FFFFFF"/>
+                </a:solidFill>
+                <a:latin typeface="Trebuchet MS" pitchFamily="34" charset="0"/>
+                <a:ea typeface="Trebuchet MS" pitchFamily="34" charset="-122"/>
+                <a:cs typeface="Trebuchet MS" pitchFamily="34" charset="-120"/>
+              </a:rPr>
+              <a:t>Keypoint Buffer &amp; Feature Extractor</a:t>
+            </a:r>
+            <a:endParaRPr lang="en-US" sz="2800" dirty="0"/>
+          </a:p>
+        </p:txBody>
+      </p:sp>
+      <p:sp>
+        <p:nvSpPr>
+          <p:cNvPr id="3" name="Shape 1"/>
+          <p:cNvSpPr/>
+          <p:nvPr/>
+        </p:nvSpPr>
+        <p:spPr>
+          <a:xfrm>
+            <a:off x="457200" y="850392"/>
+            <a:ext cx="1097280" cy="36576"/>
+          </a:xfrm>
+          <a:prstGeom prst="rect">
+            <a:avLst/>
+          </a:prstGeom>
+          <a:solidFill>
+            <a:srgbClr val="E53935"/>
+          </a:solidFill>
+          <a:ln w="12700">
+            <a:solidFill>
+              <a:srgbClr val="E53935"/>
+            </a:solidFill>
+            <a:prstDash val="solid"/>
+          </a:ln>
+        </p:spPr>
+        <p:txBody>
+          <a:bodyPr/>
+          <a:lstStyle/>
+          <a:p>
+            <a:endParaRPr lang="en-KR"/>
+          </a:p>
+        </p:txBody>
+      </p:sp>
+      <p:sp>
+        <p:nvSpPr>
+          <p:cNvPr id="4" name="Shape 2"/>
+          <p:cNvSpPr/>
+          <p:nvPr/>
+        </p:nvSpPr>
+        <p:spPr>
+          <a:xfrm>
+            <a:off x="365760" y="1051560"/>
+            <a:ext cx="3931920" cy="3749040"/>
+          </a:xfrm>
+          <a:prstGeom prst="rect">
+            <a:avLst/>
+          </a:prstGeom>
+          <a:solidFill>
+            <a:srgbClr val="1C2236"/>
+          </a:solidFill>
+          <a:ln w="12700">
+            <a:solidFill>
+              <a:srgbClr val="252D42"/>
+            </a:solidFill>
+            <a:prstDash val="solid"/>
+          </a:ln>
+          <a:effectLst>
+            <a:outerShdw blurRad="101600" dist="25400" dir="8100000" algn="bl" rotWithShape="0">
+              <a:srgbClr val="000000">
+                <a:alpha val="25000"/>
+              </a:srgbClr>
+            </a:outerShdw>
+          </a:effectLst>
+        </p:spPr>
+        <p:txBody>
+          <a:bodyPr/>
+          <a:lstStyle/>
+          <a:p>
+            <a:endParaRPr lang="en-KR"/>
+          </a:p>
+        </p:txBody>
+      </p:sp>
+      <p:sp>
+        <p:nvSpPr>
+          <p:cNvPr id="5" name="Text 3"/>
+          <p:cNvSpPr/>
+          <p:nvPr/>
+        </p:nvSpPr>
+        <p:spPr>
+          <a:xfrm>
+            <a:off x="502920" y="1143000"/>
+            <a:ext cx="3657600" cy="228600"/>
+          </a:xfrm>
+          <a:prstGeom prst="rect">
+            <a:avLst/>
+          </a:prstGeom>
+          <a:noFill/>
+          <a:ln/>
+        </p:spPr>
+        <p:txBody>
+          <a:bodyPr wrap="square" lIns="0" tIns="0" rIns="0" bIns="0" rtlCol="0" anchor="ctr"/>
+          <a:lstStyle/>
+          <a:p>
+            <a:pPr marL="0" indent="0" algn="l">
+              <a:buNone/>
+            </a:pPr>
+            <a:r>
+              <a:rPr lang="en-US" sz="900" b="1" kern="0" spc="300" dirty="0">
+                <a:solidFill>
+                  <a:srgbClr val="1976D2"/>
+                </a:solidFill>
+                <a:latin typeface="Calibri" pitchFamily="34" charset="0"/>
+                <a:ea typeface="Calibri" pitchFamily="34" charset="-122"/>
+                <a:cs typeface="Calibri" pitchFamily="34" charset="-120"/>
+              </a:rPr>
+              <a:t>KEYPOINT BUFFER</a:t>
+            </a:r>
+            <a:endParaRPr lang="en-US" sz="900" dirty="0"/>
+          </a:p>
+        </p:txBody>
+      </p:sp>
+      <p:sp>
+        <p:nvSpPr>
+          <p:cNvPr id="6" name="Text 4"/>
+          <p:cNvSpPr/>
+          <p:nvPr/>
+        </p:nvSpPr>
+        <p:spPr>
+          <a:xfrm>
+            <a:off x="502920" y="1417320"/>
+            <a:ext cx="3566160" cy="3108960"/>
+          </a:xfrm>
+          <a:prstGeom prst="rect">
+            <a:avLst/>
+          </a:prstGeom>
+          <a:noFill/>
+          <a:ln/>
+        </p:spPr>
+        <p:txBody>
+          <a:bodyPr wrap="square" rtlCol="0" anchor="ctr"/>
+          <a:lstStyle/>
+          <a:p>
+            <a:pPr marL="342900" indent="-342900">
+              <a:buSzPct val="100000"/>
+              <a:buChar char="•"/>
+            </a:pPr>
+            <a:r>
+              <a:rPr lang="en-US" sz="1500" dirty="0">
+                <a:solidFill>
+                  <a:srgbClr val="E8EAF0"/>
+                </a:solidFill>
+                <a:latin typeface="Calibri" pitchFamily="34" charset="0"/>
+                <a:ea typeface="Calibri" pitchFamily="34" charset="-122"/>
+                <a:cs typeface="Calibri" pitchFamily="34" charset="-120"/>
+              </a:rPr>
+              <a:t>Accumulates MoveNet output during the session</a:t>
+            </a:r>
+            <a:endParaRPr lang="en-US" sz="1300" dirty="0"/>
+          </a:p>
+          <a:p>
+            <a:pPr marL="342900" indent="-342900">
+              <a:buSzPct val="100000"/>
+              <a:buChar char="•"/>
+            </a:pPr>
+            <a:r>
+              <a:rPr lang="en-US" sz="1500" dirty="0">
+                <a:solidFill>
+                  <a:srgbClr val="E8EAF0"/>
+                </a:solidFill>
+                <a:latin typeface="Calibri" pitchFamily="34" charset="0"/>
+                <a:ea typeface="Calibri" pitchFamily="34" charset="-122"/>
+                <a:cs typeface="Calibri" pitchFamily="34" charset="-120"/>
+              </a:rPr>
+              <a:t>Each entry: (timestamp, FloatArray[51])</a:t>
+            </a:r>
+            <a:endParaRPr lang="en-US" sz="1300" dirty="0"/>
+          </a:p>
+          <a:p>
+            <a:pPr marL="342900" indent="-342900">
+              <a:buSzPct val="100000"/>
+              <a:buChar char="•"/>
+            </a:pPr>
+            <a:r>
+              <a:rPr lang="en-US" sz="1500" dirty="0">
+                <a:solidFill>
+                  <a:srgbClr val="E8EAF0"/>
+                </a:solidFill>
+                <a:latin typeface="Calibri" pitchFamily="34" charset="0"/>
+                <a:ea typeface="Calibri" pitchFamily="34" charset="-122"/>
+                <a:cs typeface="Calibri" pitchFamily="34" charset="-120"/>
+              </a:rPr>
+              <a:t>51 = 17 keypoints × 3 values (y, x, confidence)</a:t>
+            </a:r>
+            <a:endParaRPr lang="en-US" sz="1300" dirty="0"/>
+          </a:p>
+          <a:p>
+            <a:pPr marL="342900" indent="-342900">
+              <a:buSzPct val="100000"/>
+              <a:buChar char="•"/>
+            </a:pPr>
+            <a:r>
+              <a:rPr lang="en-US" sz="1500" dirty="0">
+                <a:solidFill>
+                  <a:srgbClr val="E8EAF0"/>
+                </a:solidFill>
+                <a:latin typeface="Calibri" pitchFamily="34" charset="0"/>
+                <a:ea typeface="Calibri" pitchFamily="34" charset="-122"/>
+                <a:cs typeface="Calibri" pitchFamily="34" charset="-120"/>
+              </a:rPr>
+              <a:t>Sampled at ~3fps → 45 entries for 15s session</a:t>
+            </a:r>
+            <a:endParaRPr lang="en-US" sz="1300" dirty="0"/>
+          </a:p>
+          <a:p>
+            <a:pPr marL="342900" indent="-342900">
+              <a:buSzPct val="100000"/>
+              <a:buChar char="•"/>
+            </a:pPr>
+            <a:r>
+              <a:rPr lang="en-US" sz="1500" dirty="0">
+                <a:solidFill>
+                  <a:srgbClr val="E8EAF0"/>
+                </a:solidFill>
+                <a:latin typeface="Calibri" pitchFamily="34" charset="0"/>
+                <a:ea typeface="Calibri" pitchFamily="34" charset="-122"/>
+                <a:cs typeface="Calibri" pitchFamily="34" charset="-120"/>
+              </a:rPr>
+              <a:t>Stored in memory until session ends</a:t>
+            </a:r>
+            <a:endParaRPr lang="en-US" sz="1300" dirty="0"/>
+          </a:p>
+          <a:p>
+            <a:pPr marL="342900" indent="-342900">
+              <a:buSzPct val="100000"/>
+              <a:buChar char="•"/>
+            </a:pPr>
+            <a:r>
+              <a:rPr lang="en-US" sz="1500" dirty="0">
+                <a:solidFill>
+                  <a:srgbClr val="E8EAF0"/>
+                </a:solidFill>
+                <a:latin typeface="Calibri" pitchFamily="34" charset="0"/>
+                <a:ea typeface="Calibri" pitchFamily="34" charset="-122"/>
+                <a:cs typeface="Calibri" pitchFamily="34" charset="-120"/>
+              </a:rPr>
+              <a:t>Session ends → entire buffer sent to Feature Extractor</a:t>
+            </a:r>
+            <a:endParaRPr lang="en-US" sz="1300" dirty="0"/>
+          </a:p>
+        </p:txBody>
+      </p:sp>
+      <p:sp>
+        <p:nvSpPr>
+          <p:cNvPr id="7" name="Shape 5"/>
+          <p:cNvSpPr/>
+          <p:nvPr/>
+        </p:nvSpPr>
+        <p:spPr>
+          <a:xfrm>
+            <a:off x="4526280" y="1051560"/>
+            <a:ext cx="4206240" cy="3749040"/>
+          </a:xfrm>
+          <a:prstGeom prst="rect">
+            <a:avLst/>
+          </a:prstGeom>
+          <a:solidFill>
+            <a:srgbClr val="1C2236"/>
+          </a:solidFill>
+          <a:ln w="12700">
+            <a:solidFill>
+              <a:srgbClr val="252D42"/>
+            </a:solidFill>
+            <a:prstDash val="solid"/>
+          </a:ln>
+          <a:effectLst>
+            <a:outerShdw blurRad="101600" dist="25400" dir="8100000" algn="bl" rotWithShape="0">
+              <a:srgbClr val="000000">
+                <a:alpha val="25000"/>
+              </a:srgbClr>
+            </a:outerShdw>
+          </a:effectLst>
+        </p:spPr>
+        <p:txBody>
+          <a:bodyPr/>
+          <a:lstStyle/>
+          <a:p>
+            <a:endParaRPr lang="en-KR"/>
+          </a:p>
+        </p:txBody>
+      </p:sp>
+      <p:sp>
+        <p:nvSpPr>
+          <p:cNvPr id="8" name="Text 6"/>
+          <p:cNvSpPr/>
+          <p:nvPr/>
+        </p:nvSpPr>
+        <p:spPr>
+          <a:xfrm>
+            <a:off x="4663440" y="1074420"/>
+            <a:ext cx="3657600" cy="228600"/>
+          </a:xfrm>
+          <a:prstGeom prst="rect">
+            <a:avLst/>
+          </a:prstGeom>
+          <a:noFill/>
+          <a:ln/>
+        </p:spPr>
+        <p:txBody>
+          <a:bodyPr wrap="square" lIns="0" tIns="0" rIns="0" bIns="0" rtlCol="0" anchor="ctr"/>
+          <a:lstStyle/>
+          <a:p>
+            <a:pPr marL="0" indent="0" algn="l">
+              <a:buNone/>
+            </a:pPr>
+            <a:r>
+              <a:rPr lang="en-US" sz="900" b="1" kern="0" spc="300" dirty="0">
+                <a:solidFill>
+                  <a:srgbClr val="FFB300"/>
+                </a:solidFill>
+                <a:latin typeface="Calibri" pitchFamily="34" charset="0"/>
+                <a:ea typeface="Calibri" pitchFamily="34" charset="-122"/>
+                <a:cs typeface="Calibri" pitchFamily="34" charset="-120"/>
+              </a:rPr>
+              <a:t>FEATURE EXTRACTOR</a:t>
+            </a:r>
+            <a:endParaRPr lang="en-US" sz="900" dirty="0"/>
+          </a:p>
+        </p:txBody>
+      </p:sp>
+      <p:sp>
+        <p:nvSpPr>
+          <p:cNvPr id="9" name="Text 7"/>
+          <p:cNvSpPr/>
+          <p:nvPr/>
+        </p:nvSpPr>
+        <p:spPr>
+          <a:xfrm>
+            <a:off x="4663440" y="1417320"/>
+            <a:ext cx="3840480" cy="3200400"/>
+          </a:xfrm>
+          <a:prstGeom prst="rect">
+            <a:avLst/>
+          </a:prstGeom>
+          <a:noFill/>
+          <a:ln/>
+        </p:spPr>
+        <p:txBody>
+          <a:bodyPr wrap="square" rtlCol="0" anchor="ctr"/>
+          <a:lstStyle/>
+          <a:p>
+            <a:pPr marL="342900" indent="-342900">
+              <a:buSzPct val="100000"/>
+              <a:buChar char="•"/>
+            </a:pPr>
+            <a:r>
+              <a:rPr lang="en-US" sz="1500" dirty="0">
+                <a:solidFill>
+                  <a:srgbClr val="E8EAF0"/>
+                </a:solidFill>
+                <a:latin typeface="Calibri" pitchFamily="34" charset="0"/>
+                <a:ea typeface="Calibri" pitchFamily="34" charset="-122"/>
+                <a:cs typeface="Calibri" pitchFamily="34" charset="-120"/>
+              </a:rPr>
+              <a:t>normalizeHipBased() — centers keypoints on hip midpoint, scales by torso height → body-relative positions</a:t>
+            </a:r>
+            <a:endParaRPr lang="en-US" sz="1200" dirty="0"/>
+          </a:p>
+          <a:p>
+            <a:pPr marL="342900" indent="-342900">
+              <a:buSzPct val="100000"/>
+              <a:buChar char="•"/>
+            </a:pPr>
+            <a:r>
+              <a:rPr lang="en-US" sz="1500" dirty="0">
+                <a:solidFill>
+                  <a:srgbClr val="E8EAF0"/>
+                </a:solidFill>
+                <a:latin typeface="Calibri" pitchFamily="34" charset="0"/>
+                <a:ea typeface="Calibri" pitchFamily="34" charset="-122"/>
+                <a:cs typeface="Calibri" pitchFamily="34" charset="-120"/>
+              </a:rPr>
+              <a:t>velocityPeaks() — finds frames where wrist speed spikes then drops (punch signature) → timestamp + direction + speed</a:t>
+            </a:r>
+            <a:endParaRPr lang="en-US" sz="1200" dirty="0"/>
+          </a:p>
+          <a:p>
+            <a:pPr marL="342900" indent="-342900">
+              <a:buSzPct val="100000"/>
+              <a:buChar char="•"/>
+            </a:pPr>
+            <a:r>
+              <a:rPr lang="en-US" sz="1500" dirty="0">
+                <a:solidFill>
+                  <a:srgbClr val="E8EAF0"/>
+                </a:solidFill>
+                <a:latin typeface="Calibri" pitchFamily="34" charset="0"/>
+                <a:ea typeface="Calibri" pitchFamily="34" charset="-122"/>
+                <a:cs typeface="Calibri" pitchFamily="34" charset="-120"/>
+              </a:rPr>
+              <a:t>wristActivity() — sums wrist displacement per 1s window → shows active vs idle periods</a:t>
+            </a:r>
+            <a:endParaRPr lang="en-US" sz="1200" dirty="0"/>
+          </a:p>
+          <a:p>
+            <a:pPr marL="342900" indent="-342900">
+              <a:buSzPct val="100000"/>
+              <a:buChar char="•"/>
+            </a:pPr>
+            <a:r>
+              <a:rPr lang="en-US" sz="1500" dirty="0">
+                <a:solidFill>
+                  <a:srgbClr val="E8EAF0"/>
+                </a:solidFill>
+                <a:latin typeface="Calibri" pitchFamily="34" charset="0"/>
+                <a:ea typeface="Calibri" pitchFamily="34" charset="-122"/>
+                <a:cs typeface="Calibri" pitchFamily="34" charset="-120"/>
+              </a:rPr>
+              <a:t>shoulderRotations() — detects shoulder width changes &gt; 0.05 → cross/hook indicator</a:t>
+            </a:r>
+            <a:endParaRPr lang="en-US" sz="1200" dirty="0"/>
+          </a:p>
+          <a:p>
+            <a:pPr marL="342900" indent="-342900">
+              <a:buSzPct val="100000"/>
+              <a:buChar char="•"/>
+            </a:pPr>
+            <a:r>
+              <a:rPr lang="en-US" sz="1500" dirty="0">
+                <a:solidFill>
+                  <a:srgbClr val="E8EAF0"/>
+                </a:solidFill>
+                <a:latin typeface="Calibri" pitchFamily="34" charset="0"/>
+                <a:ea typeface="Calibri" pitchFamily="34" charset="-122"/>
+                <a:cs typeface="Calibri" pitchFamily="34" charset="-120"/>
+              </a:rPr>
+              <a:t>analyzeGuard() — counts % frames wrists dropped below chin or elbows flared</a:t>
+            </a:r>
+            <a:endParaRPr lang="en-US" sz="1200" dirty="0"/>
+          </a:p>
+        </p:txBody>
+      </p:sp>
+      <p:sp>
+        <p:nvSpPr>
+          <p:cNvPr id="10" name="Text 8"/>
+          <p:cNvSpPr/>
+          <p:nvPr/>
+        </p:nvSpPr>
+        <p:spPr>
+          <a:xfrm>
+            <a:off x="365760" y="4846320"/>
+            <a:ext cx="8412480" cy="228600"/>
+          </a:xfrm>
+          <a:prstGeom prst="rect">
+            <a:avLst/>
+          </a:prstGeom>
+          <a:noFill/>
+          <a:ln/>
+        </p:spPr>
+        <p:txBody>
+          <a:bodyPr wrap="square" lIns="0" tIns="0" rIns="0" bIns="0" rtlCol="0" anchor="ctr"/>
+          <a:lstStyle/>
+          <a:p>
+            <a:pPr marL="0" indent="0" algn="ctr">
+              <a:buNone/>
+            </a:pPr>
+            <a:r>
+              <a:rPr lang="en-US" sz="1000" i="1" dirty="0">
+                <a:solidFill>
+                  <a:srgbClr val="4A5568"/>
+                </a:solidFill>
+                <a:latin typeface="Calibri" pitchFamily="34" charset="0"/>
+                <a:ea typeface="Calibri" pitchFamily="34" charset="-122"/>
+                <a:cs typeface="Calibri" pitchFamily="34" charset="-120"/>
+              </a:rPr>
+              <a:t>No ML model used in this step.                                                                                Output is compact text sent to Claude</a:t>
+            </a:r>
+            <a:endParaRPr lang="en-US" sz="1000" dirty="0"/>
+          </a:p>
+        </p:txBody>
+      </p:sp>
+    </p:spTree>
+  </p:cSld>
+  <p:clrMapOvr>
+    <a:masterClrMapping/>
+  </p:clrMapOvr>
+</p:sld>
+</file>
+
+<file path=ppt/slides/slide9.xml><?xml version="1.0" encoding="utf-8"?>
 <p:sld xmlns:a="http://schemas.openxmlformats.org/drawingml/2006/main" xmlns:r="http://schemas.openxmlformats.org/officeDocument/2006/relationships" xmlns:p="http://schemas.openxmlformats.org/presentationml/2006/main">
   <p:cSld name="Slide 8">
     <p:bg>
@@ -10408,979 +11758,6 @@
               <a:t>}</a:t>
             </a:r>
             <a:endParaRPr lang="en-US" sz="1100" dirty="0"/>
-          </a:p>
-        </p:txBody>
-      </p:sp>
-    </p:spTree>
-  </p:cSld>
-  <p:clrMapOvr>
-    <a:masterClrMapping/>
-  </p:clrMapOvr>
-</p:sld>
-</file>
-
-<file path=ppt/slides/slide9.xml><?xml version="1.0" encoding="utf-8"?>
-<p:sld xmlns:a="http://schemas.openxmlformats.org/drawingml/2006/main" xmlns:r="http://schemas.openxmlformats.org/officeDocument/2006/relationships" xmlns:p="http://schemas.openxmlformats.org/presentationml/2006/main">
-  <p:cSld name="Slide 9">
-    <p:bg>
-      <p:bgPr>
-        <a:solidFill>
-          <a:srgbClr val="0A0E1A"/>
-        </a:solidFill>
-        <a:effectLst/>
-      </p:bgPr>
-    </p:bg>
-    <p:spTree>
-      <p:nvGrpSpPr>
-        <p:cNvPr id="1" name=""/>
-        <p:cNvGrpSpPr/>
-        <p:nvPr/>
-      </p:nvGrpSpPr>
-      <p:grpSpPr>
-        <a:xfrm>
-          <a:off x="0" y="0"/>
-          <a:ext cx="0" cy="0"/>
-          <a:chOff x="0" y="0"/>
-          <a:chExt cx="0" cy="0"/>
-        </a:xfrm>
-      </p:grpSpPr>
-      <p:sp>
-        <p:nvSpPr>
-          <p:cNvPr id="2" name="Text 0"/>
-          <p:cNvSpPr/>
-          <p:nvPr/>
-        </p:nvSpPr>
-        <p:spPr>
-          <a:xfrm>
-            <a:off x="457200" y="320040"/>
-            <a:ext cx="8229600" cy="502920"/>
-          </a:xfrm>
-          <a:prstGeom prst="rect">
-            <a:avLst/>
-          </a:prstGeom>
-          <a:noFill/>
-          <a:ln/>
-        </p:spPr>
-        <p:txBody>
-          <a:bodyPr wrap="square" lIns="0" tIns="0" rIns="0" bIns="0" rtlCol="0" anchor="ctr"/>
-          <a:lstStyle/>
-          <a:p>
-            <a:pPr marL="0" indent="0" algn="l">
-              <a:buNone/>
-            </a:pPr>
-            <a:r>
-              <a:rPr lang="en-US" sz="2800" b="1" dirty="0">
-                <a:solidFill>
-                  <a:srgbClr val="FFFFFF"/>
-                </a:solidFill>
-                <a:latin typeface="Trebuchet MS" pitchFamily="34" charset="0"/>
-                <a:ea typeface="Trebuchet MS" pitchFamily="34" charset="-122"/>
-                <a:cs typeface="Trebuchet MS" pitchFamily="34" charset="-120"/>
-              </a:rPr>
-              <a:t>Android Application</a:t>
-            </a:r>
-            <a:endParaRPr lang="en-US" sz="2800" dirty="0"/>
-          </a:p>
-        </p:txBody>
-      </p:sp>
-      <p:sp>
-        <p:nvSpPr>
-          <p:cNvPr id="3" name="Shape 1"/>
-          <p:cNvSpPr/>
-          <p:nvPr/>
-        </p:nvSpPr>
-        <p:spPr>
-          <a:xfrm>
-            <a:off x="457200" y="850392"/>
-            <a:ext cx="1097280" cy="36576"/>
-          </a:xfrm>
-          <a:prstGeom prst="rect">
-            <a:avLst/>
-          </a:prstGeom>
-          <a:solidFill>
-            <a:srgbClr val="E53935"/>
-          </a:solidFill>
-          <a:ln w="12700">
-            <a:solidFill>
-              <a:srgbClr val="E53935"/>
-            </a:solidFill>
-            <a:prstDash val="solid"/>
-          </a:ln>
-        </p:spPr>
-        <p:txBody>
-          <a:bodyPr/>
-          <a:lstStyle/>
-          <a:p>
-            <a:endParaRPr lang="en-KR"/>
-          </a:p>
-        </p:txBody>
-      </p:sp>
-      <p:sp>
-        <p:nvSpPr>
-          <p:cNvPr id="4" name="Shape 2"/>
-          <p:cNvSpPr/>
-          <p:nvPr/>
-        </p:nvSpPr>
-        <p:spPr>
-          <a:xfrm>
-            <a:off x="365760" y="1051560"/>
-            <a:ext cx="3931920" cy="3749040"/>
-          </a:xfrm>
-          <a:prstGeom prst="rect">
-            <a:avLst/>
-          </a:prstGeom>
-          <a:solidFill>
-            <a:srgbClr val="1C2236"/>
-          </a:solidFill>
-          <a:ln w="12700">
-            <a:solidFill>
-              <a:srgbClr val="252D42"/>
-            </a:solidFill>
-            <a:prstDash val="solid"/>
-          </a:ln>
-          <a:effectLst>
-            <a:outerShdw blurRad="101600" dist="25400" dir="8100000" algn="bl" rotWithShape="0">
-              <a:srgbClr val="000000">
-                <a:alpha val="25000"/>
-              </a:srgbClr>
-            </a:outerShdw>
-          </a:effectLst>
-        </p:spPr>
-        <p:txBody>
-          <a:bodyPr/>
-          <a:lstStyle/>
-          <a:p>
-            <a:endParaRPr lang="en-KR"/>
-          </a:p>
-        </p:txBody>
-      </p:sp>
-      <p:sp>
-        <p:nvSpPr>
-          <p:cNvPr id="5" name="Text 3"/>
-          <p:cNvSpPr/>
-          <p:nvPr/>
-        </p:nvSpPr>
-        <p:spPr>
-          <a:xfrm>
-            <a:off x="502920" y="1143000"/>
-            <a:ext cx="3657600" cy="228600"/>
-          </a:xfrm>
-          <a:prstGeom prst="rect">
-            <a:avLst/>
-          </a:prstGeom>
-          <a:noFill/>
-          <a:ln/>
-        </p:spPr>
-        <p:txBody>
-          <a:bodyPr wrap="square" lIns="0" tIns="0" rIns="0" bIns="0" rtlCol="0" anchor="ctr"/>
-          <a:lstStyle/>
-          <a:p>
-            <a:pPr marL="0" indent="0" algn="l">
-              <a:buNone/>
-            </a:pPr>
-            <a:r>
-              <a:rPr lang="en-US" sz="900" b="1" kern="0" spc="300" dirty="0">
-                <a:solidFill>
-                  <a:srgbClr val="1565C0"/>
-                </a:solidFill>
-                <a:latin typeface="Calibri" pitchFamily="34" charset="0"/>
-                <a:ea typeface="Calibri" pitchFamily="34" charset="-122"/>
-                <a:cs typeface="Calibri" pitchFamily="34" charset="-120"/>
-              </a:rPr>
-              <a:t>MAIN SESSION SCREEN</a:t>
-            </a:r>
-            <a:endParaRPr lang="en-US" sz="900" dirty="0"/>
-          </a:p>
-        </p:txBody>
-      </p:sp>
-      <p:sp>
-        <p:nvSpPr>
-          <p:cNvPr id="6" name="Text 4"/>
-          <p:cNvSpPr/>
-          <p:nvPr/>
-        </p:nvSpPr>
-        <p:spPr>
-          <a:xfrm>
-            <a:off x="502920" y="1371600"/>
-            <a:ext cx="3566160" cy="3200400"/>
-          </a:xfrm>
-          <a:prstGeom prst="rect">
-            <a:avLst/>
-          </a:prstGeom>
-          <a:noFill/>
-          <a:ln/>
-        </p:spPr>
-        <p:txBody>
-          <a:bodyPr wrap="square" rtlCol="0" anchor="ctr"/>
-          <a:lstStyle/>
-          <a:p>
-            <a:pPr marL="342900" indent="-342900">
-              <a:buSzPct val="100000"/>
-              <a:buChar char="•"/>
-            </a:pPr>
-            <a:r>
-              <a:rPr lang="en-US" sz="1500" dirty="0">
-                <a:solidFill>
-                  <a:srgbClr val="E8EAF0"/>
-                </a:solidFill>
-                <a:latin typeface="Calibri" pitchFamily="34" charset="0"/>
-                <a:ea typeface="Calibri" pitchFamily="34" charset="-122"/>
-                <a:cs typeface="Calibri" pitchFamily="34" charset="-120"/>
-              </a:rPr>
-              <a:t>Stance selector: Orthodox / Southpaw</a:t>
-            </a:r>
-            <a:endParaRPr lang="en-US" sz="1300" dirty="0"/>
-          </a:p>
-          <a:p>
-            <a:pPr marL="342900" indent="-342900">
-              <a:buSzPct val="100000"/>
-              <a:buChar char="•"/>
-            </a:pPr>
-            <a:r>
-              <a:rPr lang="en-US" sz="1500" dirty="0">
-                <a:solidFill>
-                  <a:srgbClr val="E8EAF0"/>
-                </a:solidFill>
-                <a:latin typeface="Calibri" pitchFamily="34" charset="0"/>
-                <a:ea typeface="Calibri" pitchFamily="34" charset="-122"/>
-                <a:cs typeface="Calibri" pitchFamily="34" charset="-120"/>
-              </a:rPr>
-              <a:t>Duration selector: 10s / 15s / 30s</a:t>
-            </a:r>
-            <a:endParaRPr lang="en-US" sz="1300" dirty="0"/>
-          </a:p>
-          <a:p>
-            <a:pPr marL="342900" indent="-342900">
-              <a:buSzPct val="100000"/>
-              <a:buChar char="•"/>
-            </a:pPr>
-            <a:r>
-              <a:rPr lang="en-US" sz="1500" dirty="0">
-                <a:solidFill>
-                  <a:srgbClr val="E8EAF0"/>
-                </a:solidFill>
-                <a:latin typeface="Calibri" pitchFamily="34" charset="0"/>
-                <a:ea typeface="Calibri" pitchFamily="34" charset="-122"/>
-                <a:cs typeface="Calibri" pitchFamily="34" charset="-120"/>
-              </a:rPr>
-              <a:t>START → countdown → auto-record → analyze</a:t>
-            </a:r>
-            <a:endParaRPr lang="en-US" sz="1300" dirty="0"/>
-          </a:p>
-          <a:p>
-            <a:pPr marL="342900" indent="-342900">
-              <a:buSzPct val="100000"/>
-              <a:buChar char="•"/>
-            </a:pPr>
-            <a:r>
-              <a:rPr lang="en-US" sz="1500" dirty="0">
-                <a:solidFill>
-                  <a:srgbClr val="E8EAF0"/>
-                </a:solidFill>
-                <a:latin typeface="Calibri" pitchFamily="34" charset="0"/>
-                <a:ea typeface="Calibri" pitchFamily="34" charset="-122"/>
-                <a:cs typeface="Calibri" pitchFamily="34" charset="-120"/>
-              </a:rPr>
-              <a:t>Live camera preview with real-time skeleton overlay</a:t>
-            </a:r>
-            <a:endParaRPr lang="en-US" sz="1300" dirty="0"/>
-          </a:p>
-          <a:p>
-            <a:pPr marL="342900" indent="-342900">
-              <a:buSzPct val="100000"/>
-              <a:buChar char="•"/>
-            </a:pPr>
-            <a:r>
-              <a:rPr lang="en-US" sz="1500" dirty="0">
-                <a:solidFill>
-                  <a:srgbClr val="E8EAF0"/>
-                </a:solidFill>
-                <a:latin typeface="Calibri" pitchFamily="34" charset="0"/>
-                <a:ea typeface="Calibri" pitchFamily="34" charset="-122"/>
-                <a:cs typeface="Calibri" pitchFamily="34" charset="-120"/>
-              </a:rPr>
-              <a:t>MoveNet Lightning runs on-device (TFLite)</a:t>
-            </a:r>
-            <a:endParaRPr lang="en-US" sz="1300" dirty="0"/>
-          </a:p>
-          <a:p>
-            <a:pPr marL="342900" indent="-342900">
-              <a:buSzPct val="100000"/>
-              <a:buChar char="•"/>
-            </a:pPr>
-            <a:r>
-              <a:rPr lang="en-US" sz="1500" dirty="0">
-                <a:solidFill>
-                  <a:srgbClr val="E8EAF0"/>
-                </a:solidFill>
-                <a:latin typeface="Calibri" pitchFamily="34" charset="0"/>
-                <a:ea typeface="Calibri" pitchFamily="34" charset="-122"/>
-                <a:cs typeface="Calibri" pitchFamily="34" charset="-120"/>
-              </a:rPr>
-              <a:t>Keypoints sampled at ~3fps during session</a:t>
-            </a:r>
-            <a:endParaRPr lang="en-US" sz="1300" dirty="0"/>
-          </a:p>
-        </p:txBody>
-      </p:sp>
-      <p:sp>
-        <p:nvSpPr>
-          <p:cNvPr id="7" name="Shape 5"/>
-          <p:cNvSpPr/>
-          <p:nvPr/>
-        </p:nvSpPr>
-        <p:spPr>
-          <a:xfrm>
-            <a:off x="4526280" y="1051560"/>
-            <a:ext cx="4206240" cy="3749040"/>
-          </a:xfrm>
-          <a:prstGeom prst="rect">
-            <a:avLst/>
-          </a:prstGeom>
-          <a:solidFill>
-            <a:srgbClr val="1C2236"/>
-          </a:solidFill>
-          <a:ln w="12700">
-            <a:solidFill>
-              <a:srgbClr val="252D42"/>
-            </a:solidFill>
-            <a:prstDash val="solid"/>
-          </a:ln>
-          <a:effectLst>
-            <a:outerShdw blurRad="101600" dist="25400" dir="8100000" algn="bl" rotWithShape="0">
-              <a:srgbClr val="000000">
-                <a:alpha val="25000"/>
-              </a:srgbClr>
-            </a:outerShdw>
-          </a:effectLst>
-        </p:spPr>
-        <p:txBody>
-          <a:bodyPr/>
-          <a:lstStyle/>
-          <a:p>
-            <a:endParaRPr lang="en-KR"/>
-          </a:p>
-        </p:txBody>
-      </p:sp>
-      <p:sp>
-        <p:nvSpPr>
-          <p:cNvPr id="8" name="Text 6"/>
-          <p:cNvSpPr/>
-          <p:nvPr/>
-        </p:nvSpPr>
-        <p:spPr>
-          <a:xfrm>
-            <a:off x="4663440" y="1143000"/>
-            <a:ext cx="3657600" cy="228600"/>
-          </a:xfrm>
-          <a:prstGeom prst="rect">
-            <a:avLst/>
-          </a:prstGeom>
-          <a:noFill/>
-          <a:ln/>
-        </p:spPr>
-        <p:txBody>
-          <a:bodyPr wrap="square" lIns="0" tIns="0" rIns="0" bIns="0" rtlCol="0" anchor="ctr"/>
-          <a:lstStyle/>
-          <a:p>
-            <a:pPr marL="0" indent="0" algn="l">
-              <a:buNone/>
-            </a:pPr>
-            <a:r>
-              <a:rPr lang="en-US" sz="900" b="1" kern="0" spc="300" dirty="0">
-                <a:solidFill>
-                  <a:srgbClr val="43A047"/>
-                </a:solidFill>
-                <a:latin typeface="Calibri" pitchFamily="34" charset="0"/>
-                <a:ea typeface="Calibri" pitchFamily="34" charset="-122"/>
-                <a:cs typeface="Calibri" pitchFamily="34" charset="-120"/>
-              </a:rPr>
-              <a:t>RESULTS SCREEN</a:t>
-            </a:r>
-            <a:endParaRPr lang="en-US" sz="900" dirty="0"/>
-          </a:p>
-        </p:txBody>
-      </p:sp>
-      <p:sp>
-        <p:nvSpPr>
-          <p:cNvPr id="9" name="Text 7"/>
-          <p:cNvSpPr/>
-          <p:nvPr/>
-        </p:nvSpPr>
-        <p:spPr>
-          <a:xfrm>
-            <a:off x="4663440" y="1371600"/>
-            <a:ext cx="3840480" cy="3200400"/>
-          </a:xfrm>
-          <a:prstGeom prst="rect">
-            <a:avLst/>
-          </a:prstGeom>
-          <a:noFill/>
-          <a:ln/>
-        </p:spPr>
-        <p:txBody>
-          <a:bodyPr wrap="square" rtlCol="0" anchor="ctr"/>
-          <a:lstStyle/>
-          <a:p>
-            <a:pPr marL="342900" indent="-342900">
-              <a:buSzPct val="100000"/>
-              <a:buChar char="•"/>
-            </a:pPr>
-            <a:r>
-              <a:rPr lang="en-US" sz="1500" dirty="0">
-                <a:solidFill>
-                  <a:srgbClr val="E8EAF0"/>
-                </a:solidFill>
-                <a:latin typeface="Calibri" pitchFamily="34" charset="0"/>
-                <a:ea typeface="Calibri" pitchFamily="34" charset="-122"/>
-                <a:cs typeface="Calibri" pitchFamily="34" charset="-120"/>
-              </a:rPr>
-              <a:t>Punch counts: Jab / Cross / Hook</a:t>
-            </a:r>
-            <a:endParaRPr lang="en-US" sz="1300" dirty="0"/>
-          </a:p>
-          <a:p>
-            <a:pPr marL="342900" indent="-342900">
-              <a:buSzPct val="100000"/>
-              <a:buChar char="•"/>
-            </a:pPr>
-            <a:r>
-              <a:rPr lang="en-US" sz="1500" dirty="0">
-                <a:solidFill>
-                  <a:srgbClr val="E8EAF0"/>
-                </a:solidFill>
-                <a:latin typeface="Calibri" pitchFamily="34" charset="0"/>
-                <a:ea typeface="Calibri" pitchFamily="34" charset="-122"/>
-                <a:cs typeface="Calibri" pitchFamily="34" charset="-120"/>
-              </a:rPr>
-              <a:t>Coach feedback — 2–3 sentence summary</a:t>
-            </a:r>
-            <a:endParaRPr lang="en-US" sz="1300" dirty="0"/>
-          </a:p>
-          <a:p>
-            <a:pPr marL="342900" indent="-342900">
-              <a:buSzPct val="100000"/>
-              <a:buChar char="•"/>
-            </a:pPr>
-            <a:r>
-              <a:rPr lang="en-US" sz="1500" dirty="0">
-                <a:solidFill>
-                  <a:srgbClr val="E8EAF0"/>
-                </a:solidFill>
-                <a:latin typeface="Calibri" pitchFamily="34" charset="0"/>
-                <a:ea typeface="Calibri" pitchFamily="34" charset="-122"/>
-                <a:cs typeface="Calibri" pitchFamily="34" charset="-120"/>
-              </a:rPr>
-              <a:t>Strengths (green ✓)</a:t>
-            </a:r>
-            <a:endParaRPr lang="en-US" sz="1300" dirty="0"/>
-          </a:p>
-          <a:p>
-            <a:pPr marL="342900" indent="-342900">
-              <a:buSzPct val="100000"/>
-              <a:buChar char="•"/>
-            </a:pPr>
-            <a:r>
-              <a:rPr lang="en-US" sz="1500" dirty="0">
-                <a:solidFill>
-                  <a:srgbClr val="E8EAF0"/>
-                </a:solidFill>
-                <a:latin typeface="Calibri" pitchFamily="34" charset="0"/>
-                <a:ea typeface="Calibri" pitchFamily="34" charset="-122"/>
-                <a:cs typeface="Calibri" pitchFamily="34" charset="-120"/>
-              </a:rPr>
-              <a:t>Areas to improve (orange →)</a:t>
-            </a:r>
-            <a:endParaRPr lang="en-US" sz="1300" dirty="0"/>
-          </a:p>
-          <a:p>
-            <a:pPr marL="342900" indent="-342900">
-              <a:buSzPct val="100000"/>
-              <a:buChar char="•"/>
-            </a:pPr>
-            <a:r>
-              <a:rPr lang="en-US" sz="1500" dirty="0">
-                <a:solidFill>
-                  <a:srgbClr val="E8EAF0"/>
-                </a:solidFill>
-                <a:latin typeface="Calibri" pitchFamily="34" charset="0"/>
-                <a:ea typeface="Calibri" pitchFamily="34" charset="-122"/>
-                <a:cs typeface="Calibri" pitchFamily="34" charset="-120"/>
-              </a:rPr>
-              <a:t>Guard feedback — raised if hands dropped below chin</a:t>
-            </a:r>
-            <a:endParaRPr lang="en-US" sz="1300" dirty="0"/>
-          </a:p>
-          <a:p>
-            <a:pPr marL="342900" indent="-342900">
-              <a:buSzPct val="100000"/>
-              <a:buChar char="•"/>
-            </a:pPr>
-            <a:r>
-              <a:rPr lang="en-US" sz="1500" dirty="0">
-                <a:solidFill>
-                  <a:srgbClr val="E8EAF0"/>
-                </a:solidFill>
-                <a:latin typeface="Calibri" pitchFamily="34" charset="0"/>
-                <a:ea typeface="Calibri" pitchFamily="34" charset="-122"/>
-                <a:cs typeface="Calibri" pitchFamily="34" charset="-120"/>
-              </a:rPr>
-              <a:t>Punch timeline — collapsible, shows each detected punch with timestamp</a:t>
-            </a:r>
-            <a:endParaRPr lang="en-US" sz="1300" dirty="0"/>
-          </a:p>
-        </p:txBody>
-      </p:sp>
-      <p:sp>
-        <p:nvSpPr>
-          <p:cNvPr id="10" name="Shape 8"/>
-          <p:cNvSpPr/>
-          <p:nvPr/>
-        </p:nvSpPr>
-        <p:spPr>
-          <a:xfrm>
-            <a:off x="365760" y="4663440"/>
-            <a:ext cx="8366760" cy="320040"/>
-          </a:xfrm>
-          <a:prstGeom prst="rect">
-            <a:avLst/>
-          </a:prstGeom>
-          <a:solidFill>
-            <a:srgbClr val="141928"/>
-          </a:solidFill>
-          <a:ln w="12700">
-            <a:solidFill>
-              <a:srgbClr val="252D42"/>
-            </a:solidFill>
-            <a:prstDash val="solid"/>
-          </a:ln>
-          <a:effectLst>
-            <a:outerShdw blurRad="101600" dist="25400" dir="8100000" algn="bl" rotWithShape="0">
-              <a:srgbClr val="000000">
-                <a:alpha val="25000"/>
-              </a:srgbClr>
-            </a:outerShdw>
-          </a:effectLst>
-        </p:spPr>
-        <p:txBody>
-          <a:bodyPr/>
-          <a:lstStyle/>
-          <a:p>
-            <a:endParaRPr lang="en-KR"/>
-          </a:p>
-        </p:txBody>
-      </p:sp>
-      <p:sp>
-        <p:nvSpPr>
-          <p:cNvPr id="11" name="Text 9"/>
-          <p:cNvSpPr/>
-          <p:nvPr/>
-        </p:nvSpPr>
-        <p:spPr>
-          <a:xfrm>
-            <a:off x="548640" y="4718304"/>
-            <a:ext cx="1280160" cy="210312"/>
-          </a:xfrm>
-          <a:prstGeom prst="rect">
-            <a:avLst/>
-          </a:prstGeom>
-          <a:noFill/>
-          <a:ln/>
-        </p:spPr>
-        <p:txBody>
-          <a:bodyPr wrap="square" lIns="0" tIns="0" rIns="0" bIns="0" rtlCol="0" anchor="ctr"/>
-          <a:lstStyle/>
-          <a:p>
-            <a:pPr marL="0" indent="0" algn="ctr">
-              <a:buNone/>
-            </a:pPr>
-            <a:r>
-              <a:rPr lang="en-US" sz="1000" b="1" dirty="0">
-                <a:solidFill>
-                  <a:srgbClr val="00ACC1"/>
-                </a:solidFill>
-                <a:latin typeface="Calibri" pitchFamily="34" charset="0"/>
-                <a:ea typeface="Calibri" pitchFamily="34" charset="-122"/>
-                <a:cs typeface="Calibri" pitchFamily="34" charset="-120"/>
-              </a:rPr>
-              <a:t>Kotlin</a:t>
-            </a:r>
-            <a:endParaRPr lang="en-US" sz="1000" dirty="0"/>
-          </a:p>
-        </p:txBody>
-      </p:sp>
-      <p:sp>
-        <p:nvSpPr>
-          <p:cNvPr id="12" name="Text 10"/>
-          <p:cNvSpPr/>
-          <p:nvPr/>
-        </p:nvSpPr>
-        <p:spPr>
-          <a:xfrm>
-            <a:off x="1828800" y="4718304"/>
-            <a:ext cx="109728" cy="210312"/>
-          </a:xfrm>
-          <a:prstGeom prst="rect">
-            <a:avLst/>
-          </a:prstGeom>
-          <a:noFill/>
-          <a:ln/>
-        </p:spPr>
-        <p:txBody>
-          <a:bodyPr wrap="square" lIns="0" tIns="0" rIns="0" bIns="0" rtlCol="0" anchor="ctr"/>
-          <a:lstStyle/>
-          <a:p>
-            <a:pPr marL="0" indent="0" algn="ctr">
-              <a:buNone/>
-            </a:pPr>
-            <a:r>
-              <a:rPr lang="en-US" sz="1000" dirty="0">
-                <a:solidFill>
-                  <a:srgbClr val="4A5568"/>
-                </a:solidFill>
-              </a:rPr>
-              <a:t>·</a:t>
-            </a:r>
-            <a:endParaRPr lang="en-US" sz="1000" dirty="0"/>
-          </a:p>
-        </p:txBody>
-      </p:sp>
-      <p:sp>
-        <p:nvSpPr>
-          <p:cNvPr id="13" name="Text 11"/>
-          <p:cNvSpPr/>
-          <p:nvPr/>
-        </p:nvSpPr>
-        <p:spPr>
-          <a:xfrm>
-            <a:off x="1938528" y="4718304"/>
-            <a:ext cx="1280160" cy="210312"/>
-          </a:xfrm>
-          <a:prstGeom prst="rect">
-            <a:avLst/>
-          </a:prstGeom>
-          <a:noFill/>
-          <a:ln/>
-        </p:spPr>
-        <p:txBody>
-          <a:bodyPr wrap="square" lIns="0" tIns="0" rIns="0" bIns="0" rtlCol="0" anchor="ctr"/>
-          <a:lstStyle/>
-          <a:p>
-            <a:pPr marL="0" indent="0" algn="ctr">
-              <a:buNone/>
-            </a:pPr>
-            <a:r>
-              <a:rPr lang="en-US" sz="1000" b="1" dirty="0">
-                <a:solidFill>
-                  <a:srgbClr val="00ACC1"/>
-                </a:solidFill>
-                <a:latin typeface="Calibri" pitchFamily="34" charset="0"/>
-                <a:ea typeface="Calibri" pitchFamily="34" charset="-122"/>
-                <a:cs typeface="Calibri" pitchFamily="34" charset="-120"/>
-              </a:rPr>
-              <a:t>CameraX</a:t>
-            </a:r>
-            <a:endParaRPr lang="en-US" sz="1000" dirty="0"/>
-          </a:p>
-        </p:txBody>
-      </p:sp>
-      <p:sp>
-        <p:nvSpPr>
-          <p:cNvPr id="14" name="Text 12"/>
-          <p:cNvSpPr/>
-          <p:nvPr/>
-        </p:nvSpPr>
-        <p:spPr>
-          <a:xfrm>
-            <a:off x="3218688" y="4718304"/>
-            <a:ext cx="109728" cy="210312"/>
-          </a:xfrm>
-          <a:prstGeom prst="rect">
-            <a:avLst/>
-          </a:prstGeom>
-          <a:noFill/>
-          <a:ln/>
-        </p:spPr>
-        <p:txBody>
-          <a:bodyPr wrap="square" lIns="0" tIns="0" rIns="0" bIns="0" rtlCol="0" anchor="ctr"/>
-          <a:lstStyle/>
-          <a:p>
-            <a:pPr marL="0" indent="0" algn="ctr">
-              <a:buNone/>
-            </a:pPr>
-            <a:r>
-              <a:rPr lang="en-US" sz="1000" dirty="0">
-                <a:solidFill>
-                  <a:srgbClr val="4A5568"/>
-                </a:solidFill>
-              </a:rPr>
-              <a:t>·</a:t>
-            </a:r>
-            <a:endParaRPr lang="en-US" sz="1000" dirty="0"/>
-          </a:p>
-        </p:txBody>
-      </p:sp>
-      <p:sp>
-        <p:nvSpPr>
-          <p:cNvPr id="15" name="Text 13"/>
-          <p:cNvSpPr/>
-          <p:nvPr/>
-        </p:nvSpPr>
-        <p:spPr>
-          <a:xfrm>
-            <a:off x="3328416" y="4718304"/>
-            <a:ext cx="1280160" cy="210312"/>
-          </a:xfrm>
-          <a:prstGeom prst="rect">
-            <a:avLst/>
-          </a:prstGeom>
-          <a:noFill/>
-          <a:ln/>
-        </p:spPr>
-        <p:txBody>
-          <a:bodyPr wrap="square" lIns="0" tIns="0" rIns="0" bIns="0" rtlCol="0" anchor="ctr"/>
-          <a:lstStyle/>
-          <a:p>
-            <a:pPr marL="0" indent="0" algn="ctr">
-              <a:buNone/>
-            </a:pPr>
-            <a:r>
-              <a:rPr lang="en-US" sz="1000" b="1" dirty="0">
-                <a:solidFill>
-                  <a:srgbClr val="00ACC1"/>
-                </a:solidFill>
-                <a:latin typeface="Calibri" pitchFamily="34" charset="0"/>
-                <a:ea typeface="Calibri" pitchFamily="34" charset="-122"/>
-                <a:cs typeface="Calibri" pitchFamily="34" charset="-120"/>
-              </a:rPr>
-              <a:t>MoveNet Lightning</a:t>
-            </a:r>
-            <a:endParaRPr lang="en-US" sz="1000" dirty="0"/>
-          </a:p>
-        </p:txBody>
-      </p:sp>
-      <p:sp>
-        <p:nvSpPr>
-          <p:cNvPr id="16" name="Text 14"/>
-          <p:cNvSpPr/>
-          <p:nvPr/>
-        </p:nvSpPr>
-        <p:spPr>
-          <a:xfrm>
-            <a:off x="4608576" y="4718304"/>
-            <a:ext cx="109728" cy="210312"/>
-          </a:xfrm>
-          <a:prstGeom prst="rect">
-            <a:avLst/>
-          </a:prstGeom>
-          <a:noFill/>
-          <a:ln/>
-        </p:spPr>
-        <p:txBody>
-          <a:bodyPr wrap="square" lIns="0" tIns="0" rIns="0" bIns="0" rtlCol="0" anchor="ctr"/>
-          <a:lstStyle/>
-          <a:p>
-            <a:pPr marL="0" indent="0" algn="ctr">
-              <a:buNone/>
-            </a:pPr>
-            <a:r>
-              <a:rPr lang="en-US" sz="1000" dirty="0">
-                <a:solidFill>
-                  <a:srgbClr val="4A5568"/>
-                </a:solidFill>
-              </a:rPr>
-              <a:t>·</a:t>
-            </a:r>
-            <a:endParaRPr lang="en-US" sz="1000" dirty="0"/>
-          </a:p>
-        </p:txBody>
-      </p:sp>
-      <p:sp>
-        <p:nvSpPr>
-          <p:cNvPr id="17" name="Text 15"/>
-          <p:cNvSpPr/>
-          <p:nvPr/>
-        </p:nvSpPr>
-        <p:spPr>
-          <a:xfrm>
-            <a:off x="4718304" y="4718304"/>
-            <a:ext cx="1280160" cy="210312"/>
-          </a:xfrm>
-          <a:prstGeom prst="rect">
-            <a:avLst/>
-          </a:prstGeom>
-          <a:noFill/>
-          <a:ln/>
-        </p:spPr>
-        <p:txBody>
-          <a:bodyPr wrap="square" lIns="0" tIns="0" rIns="0" bIns="0" rtlCol="0" anchor="ctr"/>
-          <a:lstStyle/>
-          <a:p>
-            <a:pPr marL="0" indent="0" algn="ctr">
-              <a:buNone/>
-            </a:pPr>
-            <a:r>
-              <a:rPr lang="en-US" sz="1000" b="1" dirty="0">
-                <a:solidFill>
-                  <a:srgbClr val="00ACC1"/>
-                </a:solidFill>
-                <a:latin typeface="Calibri" pitchFamily="34" charset="0"/>
-                <a:ea typeface="Calibri" pitchFamily="34" charset="-122"/>
-                <a:cs typeface="Calibri" pitchFamily="34" charset="-120"/>
-              </a:rPr>
-              <a:t>TFLite</a:t>
-            </a:r>
-            <a:endParaRPr lang="en-US" sz="1000" dirty="0"/>
-          </a:p>
-        </p:txBody>
-      </p:sp>
-      <p:sp>
-        <p:nvSpPr>
-          <p:cNvPr id="18" name="Text 16"/>
-          <p:cNvSpPr/>
-          <p:nvPr/>
-        </p:nvSpPr>
-        <p:spPr>
-          <a:xfrm>
-            <a:off x="5998464" y="4718304"/>
-            <a:ext cx="109728" cy="210312"/>
-          </a:xfrm>
-          <a:prstGeom prst="rect">
-            <a:avLst/>
-          </a:prstGeom>
-          <a:noFill/>
-          <a:ln/>
-        </p:spPr>
-        <p:txBody>
-          <a:bodyPr wrap="square" lIns="0" tIns="0" rIns="0" bIns="0" rtlCol="0" anchor="ctr"/>
-          <a:lstStyle/>
-          <a:p>
-            <a:pPr marL="0" indent="0" algn="ctr">
-              <a:buNone/>
-            </a:pPr>
-            <a:r>
-              <a:rPr lang="en-US" sz="1000" dirty="0">
-                <a:solidFill>
-                  <a:srgbClr val="4A5568"/>
-                </a:solidFill>
-              </a:rPr>
-              <a:t>·</a:t>
-            </a:r>
-            <a:endParaRPr lang="en-US" sz="1000" dirty="0"/>
-          </a:p>
-        </p:txBody>
-      </p:sp>
-      <p:sp>
-        <p:nvSpPr>
-          <p:cNvPr id="19" name="Text 17"/>
-          <p:cNvSpPr/>
-          <p:nvPr/>
-        </p:nvSpPr>
-        <p:spPr>
-          <a:xfrm>
-            <a:off x="6108192" y="4718304"/>
-            <a:ext cx="1280160" cy="210312"/>
-          </a:xfrm>
-          <a:prstGeom prst="rect">
-            <a:avLst/>
-          </a:prstGeom>
-          <a:noFill/>
-          <a:ln/>
-        </p:spPr>
-        <p:txBody>
-          <a:bodyPr wrap="square" lIns="0" tIns="0" rIns="0" bIns="0" rtlCol="0" anchor="ctr"/>
-          <a:lstStyle/>
-          <a:p>
-            <a:pPr marL="0" indent="0" algn="ctr">
-              <a:buNone/>
-            </a:pPr>
-            <a:r>
-              <a:rPr lang="en-US" sz="1000" b="1" dirty="0">
-                <a:solidFill>
-                  <a:srgbClr val="00ACC1"/>
-                </a:solidFill>
-                <a:latin typeface="Calibri" pitchFamily="34" charset="0"/>
-                <a:ea typeface="Calibri" pitchFamily="34" charset="-122"/>
-                <a:cs typeface="Calibri" pitchFamily="34" charset="-120"/>
-              </a:rPr>
-              <a:t>Claude Haiku API</a:t>
-            </a:r>
-            <a:endParaRPr lang="en-US" sz="1000" dirty="0"/>
-          </a:p>
-        </p:txBody>
-      </p:sp>
-      <p:sp>
-        <p:nvSpPr>
-          <p:cNvPr id="20" name="Text 18"/>
-          <p:cNvSpPr/>
-          <p:nvPr/>
-        </p:nvSpPr>
-        <p:spPr>
-          <a:xfrm>
-            <a:off x="7388352" y="4718304"/>
-            <a:ext cx="109728" cy="210312"/>
-          </a:xfrm>
-          <a:prstGeom prst="rect">
-            <a:avLst/>
-          </a:prstGeom>
-          <a:noFill/>
-          <a:ln/>
-        </p:spPr>
-        <p:txBody>
-          <a:bodyPr wrap="square" lIns="0" tIns="0" rIns="0" bIns="0" rtlCol="0" anchor="ctr"/>
-          <a:lstStyle/>
-          <a:p>
-            <a:pPr marL="0" indent="0" algn="ctr">
-              <a:buNone/>
-            </a:pPr>
-            <a:r>
-              <a:rPr lang="en-US" sz="1000" dirty="0">
-                <a:solidFill>
-                  <a:srgbClr val="4A5568"/>
-                </a:solidFill>
-              </a:rPr>
-              <a:t>·</a:t>
-            </a:r>
-            <a:endParaRPr lang="en-US" sz="1000" dirty="0"/>
-          </a:p>
-        </p:txBody>
-      </p:sp>
-      <p:sp>
-        <p:nvSpPr>
-          <p:cNvPr id="21" name="Text 19"/>
-          <p:cNvSpPr/>
-          <p:nvPr/>
-        </p:nvSpPr>
-        <p:spPr>
-          <a:xfrm>
-            <a:off x="7498080" y="4718304"/>
-            <a:ext cx="1280160" cy="210312"/>
-          </a:xfrm>
-          <a:prstGeom prst="rect">
-            <a:avLst/>
-          </a:prstGeom>
-          <a:noFill/>
-          <a:ln/>
-        </p:spPr>
-        <p:txBody>
-          <a:bodyPr wrap="square" lIns="0" tIns="0" rIns="0" bIns="0" rtlCol="0" anchor="ctr"/>
-          <a:lstStyle/>
-          <a:p>
-            <a:pPr marL="0" indent="0" algn="ctr">
-              <a:buNone/>
-            </a:pPr>
-            <a:r>
-              <a:rPr lang="en-US" sz="1000" b="1" dirty="0">
-                <a:solidFill>
-                  <a:srgbClr val="00ACC1"/>
-                </a:solidFill>
-                <a:latin typeface="Calibri" pitchFamily="34" charset="0"/>
-                <a:ea typeface="Calibri" pitchFamily="34" charset="-122"/>
-                <a:cs typeface="Calibri" pitchFamily="34" charset="-120"/>
-              </a:rPr>
-              <a:t>Android 8+</a:t>
-            </a:r>
-            <a:endParaRPr lang="en-US" sz="1000" dirty="0"/>
           </a:p>
         </p:txBody>
       </p:sp>
